--- a/课件/C1/C1-A-05/C1-A-05.pptx
+++ b/课件/C1/C1-A-05/C1-A-05.pptx
@@ -1,31 +1,31 @@
 
 <file path=ppt/presentation.xml><?xml version="1.0" encoding="utf-8"?>
-<p:presentation xmlns:a="http://schemas.openxmlformats.org/drawingml/2006/main" xmlns:r="http://schemas.openxmlformats.org/officeDocument/2006/relationships" xmlns:p="http://schemas.openxmlformats.org/presentationml/2006/main" autoCompressPictures="0">
+<p:presentation xmlns:a="http://schemas.openxmlformats.org/drawingml/2006/main" xmlns:r="http://schemas.openxmlformats.org/officeDocument/2006/relationships" xmlns:p="http://schemas.openxmlformats.org/presentationml/2006/main" saveSubsetFonts="1" autoCompressPictures="0">
   <p:sldMasterIdLst>
     <p:sldMasterId id="2147483648" r:id="rId1"/>
   </p:sldMasterIdLst>
+  <p:sldIdLst>
+    <p:sldId id="256" r:id="rId2"/>
+    <p:sldId id="257" r:id="rId3"/>
+    <p:sldId id="258" r:id="rId4"/>
+    <p:sldId id="259" r:id="rId5"/>
+    <p:sldId id="260" r:id="rId6"/>
+    <p:sldId id="261" r:id="rId7"/>
+    <p:sldId id="262" r:id="rId8"/>
+    <p:sldId id="263" r:id="rId9"/>
+    <p:sldId id="264" r:id="rId10"/>
+    <p:sldId id="265" r:id="rId11"/>
+    <p:sldId id="266" r:id="rId12"/>
+    <p:sldId id="267" r:id="rId13"/>
+    <p:sldId id="268" r:id="rId14"/>
+    <p:sldId id="269" r:id="rId15"/>
+    <p:sldId id="270" r:id="rId16"/>
+  </p:sldIdLst>
   <p:notesMasterIdLst>
-    <p:notesMasterId r:id="rId4"/>
+    <p:notesMasterId r:id="rId17"/>
   </p:notesMasterIdLst>
-  <p:sldIdLst>
-    <p:sldId id="256" r:id="rId3"/>
-    <p:sldId id="257" r:id="rId5"/>
-    <p:sldId id="258" r:id="rId6"/>
-    <p:sldId id="259" r:id="rId7"/>
-    <p:sldId id="260" r:id="rId8"/>
-    <p:sldId id="261" r:id="rId9"/>
-    <p:sldId id="262" r:id="rId10"/>
-    <p:sldId id="263" r:id="rId11"/>
-    <p:sldId id="264" r:id="rId12"/>
-    <p:sldId id="265" r:id="rId13"/>
-    <p:sldId id="266" r:id="rId14"/>
-    <p:sldId id="267" r:id="rId15"/>
-    <p:sldId id="268" r:id="rId16"/>
-    <p:sldId id="269" r:id="rId17"/>
-    <p:sldId id="270" r:id="rId18"/>
-  </p:sldIdLst>
-  <p:sldSz cx="12191365" cy="6858000"/>
-  <p:notesSz cx="6858000" cy="12191365"/>
+  <p:sldSz cx="12191695" cy="6858000"/>
+  <p:notesSz cx="6858000" cy="12191695"/>
   <p:defaultTextStyle>
     <a:lvl1pPr marL="0" algn="l" defTabSz="914400" rtl="0" eaLnBrk="1" latinLnBrk="0" hangingPunct="1">
       <a:defRPr sz="1800" kern="1200">
@@ -203,6 +203,7 @@
           <a:p>
             <a:fld id="{5282F153-3F37-0F45-9E97-73ACFA13230C}" type="datetimeFigureOut">
               <a:rPr lang="en-US"/>
+              <a:t>7/23/19</a:t>
             </a:fld>
             <a:endParaRPr lang="en-US"/>
           </a:p>
@@ -269,7 +270,6 @@
               <a:rPr lang="en-US"/>
               <a:t>Click to edit Master text styles</a:t>
             </a:r>
-            <a:endParaRPr lang="en-US"/>
           </a:p>
           <a:p>
             <a:pPr lvl="1"/>
@@ -277,7 +277,6 @@
               <a:rPr lang="en-US"/>
               <a:t>Second level</a:t>
             </a:r>
-            <a:endParaRPr lang="en-US"/>
           </a:p>
           <a:p>
             <a:pPr lvl="2"/>
@@ -285,7 +284,6 @@
               <a:rPr lang="en-US"/>
               <a:t>Third level</a:t>
             </a:r>
-            <a:endParaRPr lang="en-US"/>
           </a:p>
           <a:p>
             <a:pPr lvl="3"/>
@@ -293,7 +291,6 @@
               <a:rPr lang="en-US"/>
               <a:t>Fourth level</a:t>
             </a:r>
-            <a:endParaRPr lang="en-US"/>
           </a:p>
           <a:p>
             <a:pPr lvl="4"/>
@@ -301,7 +298,6 @@
               <a:rPr lang="en-US"/>
               <a:t>Fifth level</a:t>
             </a:r>
-            <a:endParaRPr lang="en-US"/>
           </a:p>
         </p:txBody>
       </p:sp>
@@ -365,12 +361,18 @@
           <a:p>
             <a:fld id="{CE5E9CC1-C706-0F49-92D6-E571CC5EEA8F}" type="slidenum">
               <a:rPr lang="en-US"/>
+              <a:t>‹#›</a:t>
             </a:fld>
             <a:endParaRPr lang="en-US"/>
           </a:p>
         </p:txBody>
       </p:sp>
     </p:spTree>
+    <p:extLst>
+      <p:ext uri="{BB962C8B-B14F-4D97-AF65-F5344CB8AC3E}">
+        <p14:creationId xmlns:p14="http://schemas.microsoft.com/office/powerpoint/2010/main" val="1024086991"/>
+      </p:ext>
+    </p:extLst>
   </p:cSld>
   <p:clrMap bg1="lt1" tx1="dk1" bg2="lt2" tx2="dk2" accent1="accent1" accent2="accent2" accent3="accent3" accent4="accent4" accent5="accent5" accent6="accent6" hlink="hlink" folHlink="folHlink"/>
   <p:notesStyle>
@@ -512,6 +514,10 @@
           <a:bodyPr/>
           <a:lstStyle/>
           <a:p>
+            <a:r>
+              <a:rPr lang="en-US" dirty="0"/>
+              <a:t/>
+            </a:r>
             <a:endParaRPr lang="en-US" dirty="0"/>
           </a:p>
         </p:txBody>
@@ -533,12 +539,18 @@
           <a:p>
             <a:fld id="{F7021451-1387-4CA6-816F-3879F97B5CBC}" type="slidenum">
               <a:rPr lang="en-US"/>
+              <a:t>1</a:t>
             </a:fld>
             <a:endParaRPr lang="en-US"/>
           </a:p>
         </p:txBody>
       </p:sp>
     </p:spTree>
+    <p:extLst>
+      <p:ext uri="{BB962C8B-B14F-4D97-AF65-F5344CB8AC3E}">
+        <p14:creationId xmlns:p14="http://schemas.microsoft.com/office/powerpoint/2010/main" val="1024086991"/>
+      </p:ext>
+    </p:extLst>
   </p:cSld>
   <p:clrMapOvr>
     <a:masterClrMapping/>
@@ -590,6 +602,10 @@
           <a:bodyPr/>
           <a:lstStyle/>
           <a:p>
+            <a:r>
+              <a:rPr lang="en-US" dirty="0"/>
+              <a:t/>
+            </a:r>
             <a:endParaRPr lang="en-US" dirty="0"/>
           </a:p>
         </p:txBody>
@@ -611,12 +627,18 @@
           <a:p>
             <a:fld id="{F7021451-1387-4CA6-816F-3879F97B5CBC}" type="slidenum">
               <a:rPr lang="en-US"/>
+              <a:t>10</a:t>
             </a:fld>
             <a:endParaRPr lang="en-US"/>
           </a:p>
         </p:txBody>
       </p:sp>
     </p:spTree>
+    <p:extLst>
+      <p:ext uri="{BB962C8B-B14F-4D97-AF65-F5344CB8AC3E}">
+        <p14:creationId xmlns:p14="http://schemas.microsoft.com/office/powerpoint/2010/main" val="1024086991"/>
+      </p:ext>
+    </p:extLst>
   </p:cSld>
   <p:clrMapOvr>
     <a:masterClrMapping/>
@@ -668,6 +690,10 @@
           <a:bodyPr/>
           <a:lstStyle/>
           <a:p>
+            <a:r>
+              <a:rPr lang="en-US" dirty="0"/>
+              <a:t/>
+            </a:r>
             <a:endParaRPr lang="en-US" dirty="0"/>
           </a:p>
         </p:txBody>
@@ -689,12 +715,18 @@
           <a:p>
             <a:fld id="{F7021451-1387-4CA6-816F-3879F97B5CBC}" type="slidenum">
               <a:rPr lang="en-US"/>
+              <a:t>11</a:t>
             </a:fld>
             <a:endParaRPr lang="en-US"/>
           </a:p>
         </p:txBody>
       </p:sp>
     </p:spTree>
+    <p:extLst>
+      <p:ext uri="{BB962C8B-B14F-4D97-AF65-F5344CB8AC3E}">
+        <p14:creationId xmlns:p14="http://schemas.microsoft.com/office/powerpoint/2010/main" val="1024086991"/>
+      </p:ext>
+    </p:extLst>
   </p:cSld>
   <p:clrMapOvr>
     <a:masterClrMapping/>
@@ -746,6 +778,10 @@
           <a:bodyPr/>
           <a:lstStyle/>
           <a:p>
+            <a:r>
+              <a:rPr lang="en-US" dirty="0"/>
+              <a:t/>
+            </a:r>
             <a:endParaRPr lang="en-US" dirty="0"/>
           </a:p>
         </p:txBody>
@@ -767,12 +803,18 @@
           <a:p>
             <a:fld id="{F7021451-1387-4CA6-816F-3879F97B5CBC}" type="slidenum">
               <a:rPr lang="en-US"/>
+              <a:t>12</a:t>
             </a:fld>
             <a:endParaRPr lang="en-US"/>
           </a:p>
         </p:txBody>
       </p:sp>
     </p:spTree>
+    <p:extLst>
+      <p:ext uri="{BB962C8B-B14F-4D97-AF65-F5344CB8AC3E}">
+        <p14:creationId xmlns:p14="http://schemas.microsoft.com/office/powerpoint/2010/main" val="1024086991"/>
+      </p:ext>
+    </p:extLst>
   </p:cSld>
   <p:clrMapOvr>
     <a:masterClrMapping/>
@@ -824,6 +866,10 @@
           <a:bodyPr/>
           <a:lstStyle/>
           <a:p>
+            <a:r>
+              <a:rPr lang="en-US" dirty="0"/>
+              <a:t/>
+            </a:r>
             <a:endParaRPr lang="en-US" dirty="0"/>
           </a:p>
         </p:txBody>
@@ -845,12 +891,18 @@
           <a:p>
             <a:fld id="{F7021451-1387-4CA6-816F-3879F97B5CBC}" type="slidenum">
               <a:rPr lang="en-US"/>
+              <a:t>13</a:t>
             </a:fld>
             <a:endParaRPr lang="en-US"/>
           </a:p>
         </p:txBody>
       </p:sp>
     </p:spTree>
+    <p:extLst>
+      <p:ext uri="{BB962C8B-B14F-4D97-AF65-F5344CB8AC3E}">
+        <p14:creationId xmlns:p14="http://schemas.microsoft.com/office/powerpoint/2010/main" val="1024086991"/>
+      </p:ext>
+    </p:extLst>
   </p:cSld>
   <p:clrMapOvr>
     <a:masterClrMapping/>
@@ -902,6 +954,10 @@
           <a:bodyPr/>
           <a:lstStyle/>
           <a:p>
+            <a:r>
+              <a:rPr lang="en-US" dirty="0"/>
+              <a:t/>
+            </a:r>
             <a:endParaRPr lang="en-US" dirty="0"/>
           </a:p>
         </p:txBody>
@@ -923,12 +979,18 @@
           <a:p>
             <a:fld id="{F7021451-1387-4CA6-816F-3879F97B5CBC}" type="slidenum">
               <a:rPr lang="en-US"/>
+              <a:t>14</a:t>
             </a:fld>
             <a:endParaRPr lang="en-US"/>
           </a:p>
         </p:txBody>
       </p:sp>
     </p:spTree>
+    <p:extLst>
+      <p:ext uri="{BB962C8B-B14F-4D97-AF65-F5344CB8AC3E}">
+        <p14:creationId xmlns:p14="http://schemas.microsoft.com/office/powerpoint/2010/main" val="1024086991"/>
+      </p:ext>
+    </p:extLst>
   </p:cSld>
   <p:clrMapOvr>
     <a:masterClrMapping/>
@@ -980,6 +1042,10 @@
           <a:bodyPr/>
           <a:lstStyle/>
           <a:p>
+            <a:r>
+              <a:rPr lang="en-US" dirty="0"/>
+              <a:t/>
+            </a:r>
             <a:endParaRPr lang="en-US" dirty="0"/>
           </a:p>
         </p:txBody>
@@ -1001,12 +1067,18 @@
           <a:p>
             <a:fld id="{F7021451-1387-4CA6-816F-3879F97B5CBC}" type="slidenum">
               <a:rPr lang="en-US"/>
+              <a:t>15</a:t>
             </a:fld>
             <a:endParaRPr lang="en-US"/>
           </a:p>
         </p:txBody>
       </p:sp>
     </p:spTree>
+    <p:extLst>
+      <p:ext uri="{BB962C8B-B14F-4D97-AF65-F5344CB8AC3E}">
+        <p14:creationId xmlns:p14="http://schemas.microsoft.com/office/powerpoint/2010/main" val="1024086991"/>
+      </p:ext>
+    </p:extLst>
   </p:cSld>
   <p:clrMapOvr>
     <a:masterClrMapping/>
@@ -1058,6 +1130,10 @@
           <a:bodyPr/>
           <a:lstStyle/>
           <a:p>
+            <a:r>
+              <a:rPr lang="en-US" dirty="0"/>
+              <a:t/>
+            </a:r>
             <a:endParaRPr lang="en-US" dirty="0"/>
           </a:p>
         </p:txBody>
@@ -1079,12 +1155,18 @@
           <a:p>
             <a:fld id="{F7021451-1387-4CA6-816F-3879F97B5CBC}" type="slidenum">
               <a:rPr lang="en-US"/>
+              <a:t>2</a:t>
             </a:fld>
             <a:endParaRPr lang="en-US"/>
           </a:p>
         </p:txBody>
       </p:sp>
     </p:spTree>
+    <p:extLst>
+      <p:ext uri="{BB962C8B-B14F-4D97-AF65-F5344CB8AC3E}">
+        <p14:creationId xmlns:p14="http://schemas.microsoft.com/office/powerpoint/2010/main" val="1024086991"/>
+      </p:ext>
+    </p:extLst>
   </p:cSld>
   <p:clrMapOvr>
     <a:masterClrMapping/>
@@ -1136,6 +1218,10 @@
           <a:bodyPr/>
           <a:lstStyle/>
           <a:p>
+            <a:r>
+              <a:rPr lang="en-US" dirty="0"/>
+              <a:t/>
+            </a:r>
             <a:endParaRPr lang="en-US" dirty="0"/>
           </a:p>
         </p:txBody>
@@ -1157,12 +1243,18 @@
           <a:p>
             <a:fld id="{F7021451-1387-4CA6-816F-3879F97B5CBC}" type="slidenum">
               <a:rPr lang="en-US"/>
+              <a:t>3</a:t>
             </a:fld>
             <a:endParaRPr lang="en-US"/>
           </a:p>
         </p:txBody>
       </p:sp>
     </p:spTree>
+    <p:extLst>
+      <p:ext uri="{BB962C8B-B14F-4D97-AF65-F5344CB8AC3E}">
+        <p14:creationId xmlns:p14="http://schemas.microsoft.com/office/powerpoint/2010/main" val="1024086991"/>
+      </p:ext>
+    </p:extLst>
   </p:cSld>
   <p:clrMapOvr>
     <a:masterClrMapping/>
@@ -1214,6 +1306,10 @@
           <a:bodyPr/>
           <a:lstStyle/>
           <a:p>
+            <a:r>
+              <a:rPr lang="en-US" dirty="0"/>
+              <a:t/>
+            </a:r>
             <a:endParaRPr lang="en-US" dirty="0"/>
           </a:p>
         </p:txBody>
@@ -1235,12 +1331,18 @@
           <a:p>
             <a:fld id="{F7021451-1387-4CA6-816F-3879F97B5CBC}" type="slidenum">
               <a:rPr lang="en-US"/>
+              <a:t>4</a:t>
             </a:fld>
             <a:endParaRPr lang="en-US"/>
           </a:p>
         </p:txBody>
       </p:sp>
     </p:spTree>
+    <p:extLst>
+      <p:ext uri="{BB962C8B-B14F-4D97-AF65-F5344CB8AC3E}">
+        <p14:creationId xmlns:p14="http://schemas.microsoft.com/office/powerpoint/2010/main" val="1024086991"/>
+      </p:ext>
+    </p:extLst>
   </p:cSld>
   <p:clrMapOvr>
     <a:masterClrMapping/>
@@ -1292,6 +1394,10 @@
           <a:bodyPr/>
           <a:lstStyle/>
           <a:p>
+            <a:r>
+              <a:rPr lang="en-US" dirty="0"/>
+              <a:t/>
+            </a:r>
             <a:endParaRPr lang="en-US" dirty="0"/>
           </a:p>
         </p:txBody>
@@ -1313,12 +1419,18 @@
           <a:p>
             <a:fld id="{F7021451-1387-4CA6-816F-3879F97B5CBC}" type="slidenum">
               <a:rPr lang="en-US"/>
+              <a:t>5</a:t>
             </a:fld>
             <a:endParaRPr lang="en-US"/>
           </a:p>
         </p:txBody>
       </p:sp>
     </p:spTree>
+    <p:extLst>
+      <p:ext uri="{BB962C8B-B14F-4D97-AF65-F5344CB8AC3E}">
+        <p14:creationId xmlns:p14="http://schemas.microsoft.com/office/powerpoint/2010/main" val="1024086991"/>
+      </p:ext>
+    </p:extLst>
   </p:cSld>
   <p:clrMapOvr>
     <a:masterClrMapping/>
@@ -1370,6 +1482,10 @@
           <a:bodyPr/>
           <a:lstStyle/>
           <a:p>
+            <a:r>
+              <a:rPr lang="en-US" dirty="0"/>
+              <a:t/>
+            </a:r>
             <a:endParaRPr lang="en-US" dirty="0"/>
           </a:p>
         </p:txBody>
@@ -1391,12 +1507,18 @@
           <a:p>
             <a:fld id="{F7021451-1387-4CA6-816F-3879F97B5CBC}" type="slidenum">
               <a:rPr lang="en-US"/>
+              <a:t>6</a:t>
             </a:fld>
             <a:endParaRPr lang="en-US"/>
           </a:p>
         </p:txBody>
       </p:sp>
     </p:spTree>
+    <p:extLst>
+      <p:ext uri="{BB962C8B-B14F-4D97-AF65-F5344CB8AC3E}">
+        <p14:creationId xmlns:p14="http://schemas.microsoft.com/office/powerpoint/2010/main" val="1024086991"/>
+      </p:ext>
+    </p:extLst>
   </p:cSld>
   <p:clrMapOvr>
     <a:masterClrMapping/>
@@ -1448,6 +1570,10 @@
           <a:bodyPr/>
           <a:lstStyle/>
           <a:p>
+            <a:r>
+              <a:rPr lang="en-US" dirty="0"/>
+              <a:t/>
+            </a:r>
             <a:endParaRPr lang="en-US" dirty="0"/>
           </a:p>
         </p:txBody>
@@ -1469,12 +1595,18 @@
           <a:p>
             <a:fld id="{F7021451-1387-4CA6-816F-3879F97B5CBC}" type="slidenum">
               <a:rPr lang="en-US"/>
+              <a:t>7</a:t>
             </a:fld>
             <a:endParaRPr lang="en-US"/>
           </a:p>
         </p:txBody>
       </p:sp>
     </p:spTree>
+    <p:extLst>
+      <p:ext uri="{BB962C8B-B14F-4D97-AF65-F5344CB8AC3E}">
+        <p14:creationId xmlns:p14="http://schemas.microsoft.com/office/powerpoint/2010/main" val="1024086991"/>
+      </p:ext>
+    </p:extLst>
   </p:cSld>
   <p:clrMapOvr>
     <a:masterClrMapping/>
@@ -1526,6 +1658,10 @@
           <a:bodyPr/>
           <a:lstStyle/>
           <a:p>
+            <a:r>
+              <a:rPr lang="en-US" dirty="0"/>
+              <a:t/>
+            </a:r>
             <a:endParaRPr lang="en-US" dirty="0"/>
           </a:p>
         </p:txBody>
@@ -1547,12 +1683,18 @@
           <a:p>
             <a:fld id="{F7021451-1387-4CA6-816F-3879F97B5CBC}" type="slidenum">
               <a:rPr lang="en-US"/>
+              <a:t>8</a:t>
             </a:fld>
             <a:endParaRPr lang="en-US"/>
           </a:p>
         </p:txBody>
       </p:sp>
     </p:spTree>
+    <p:extLst>
+      <p:ext uri="{BB962C8B-B14F-4D97-AF65-F5344CB8AC3E}">
+        <p14:creationId xmlns:p14="http://schemas.microsoft.com/office/powerpoint/2010/main" val="1024086991"/>
+      </p:ext>
+    </p:extLst>
   </p:cSld>
   <p:clrMapOvr>
     <a:masterClrMapping/>
@@ -1604,6 +1746,10 @@
           <a:bodyPr/>
           <a:lstStyle/>
           <a:p>
+            <a:r>
+              <a:rPr lang="en-US" dirty="0"/>
+              <a:t/>
+            </a:r>
             <a:endParaRPr lang="en-US" dirty="0"/>
           </a:p>
         </p:txBody>
@@ -1625,12 +1771,18 @@
           <a:p>
             <a:fld id="{F7021451-1387-4CA6-816F-3879F97B5CBC}" type="slidenum">
               <a:rPr lang="en-US"/>
+              <a:t>9</a:t>
             </a:fld>
             <a:endParaRPr lang="en-US"/>
           </a:p>
         </p:txBody>
       </p:sp>
     </p:spTree>
+    <p:extLst>
+      <p:ext uri="{BB962C8B-B14F-4D97-AF65-F5344CB8AC3E}">
+        <p14:creationId xmlns:p14="http://schemas.microsoft.com/office/powerpoint/2010/main" val="1024086991"/>
+      </p:ext>
+    </p:extLst>
   </p:cSld>
   <p:clrMapOvr>
     <a:masterClrMapping/>
@@ -1671,11 +1823,6 @@
 <file path=ppt/slideMasters/slideMaster1.xml><?xml version="1.0" encoding="utf-8"?>
 <p:sldMaster xmlns:a="http://schemas.openxmlformats.org/drawingml/2006/main" xmlns:r="http://schemas.openxmlformats.org/officeDocument/2006/relationships" xmlns:p="http://schemas.openxmlformats.org/presentationml/2006/main">
   <p:cSld>
-    <p:bg>
-      <p:bgRef idx="1001">
-        <a:schemeClr val="bg1"/>
-      </p:bgRef>
-    </p:bg>
     <p:spTree>
       <p:nvGrpSpPr>
         <p:cNvPr id="1" name=""/>
@@ -1719,7 +1866,7 @@
         <a:spcBef>
           <a:spcPct val="20000"/>
         </a:spcBef>
-        <a:buFont typeface="Arial" panose="020B0604020202020204" pitchFamily="34" charset="0"/>
+        <a:buFont typeface="Arial" pitchFamily="34" charset="0"/>
         <a:buChar char="•"/>
         <a:defRPr sz="3200" kern="1200">
           <a:solidFill>
@@ -1734,7 +1881,7 @@
         <a:spcBef>
           <a:spcPct val="20000"/>
         </a:spcBef>
-        <a:buFont typeface="Arial" panose="020B0604020202020204" pitchFamily="34" charset="0"/>
+        <a:buFont typeface="Arial" pitchFamily="34" charset="0"/>
         <a:buChar char="–"/>
         <a:defRPr sz="2800" kern="1200">
           <a:solidFill>
@@ -1749,7 +1896,7 @@
         <a:spcBef>
           <a:spcPct val="20000"/>
         </a:spcBef>
-        <a:buFont typeface="Arial" panose="020B0604020202020204" pitchFamily="34" charset="0"/>
+        <a:buFont typeface="Arial" pitchFamily="34" charset="0"/>
         <a:buChar char="•"/>
         <a:defRPr sz="2400" kern="1200">
           <a:solidFill>
@@ -1764,7 +1911,7 @@
         <a:spcBef>
           <a:spcPct val="20000"/>
         </a:spcBef>
-        <a:buFont typeface="Arial" panose="020B0604020202020204" pitchFamily="34" charset="0"/>
+        <a:buFont typeface="Arial" pitchFamily="34" charset="0"/>
         <a:buChar char="–"/>
         <a:defRPr sz="2000" kern="1200">
           <a:solidFill>
@@ -1779,7 +1926,7 @@
         <a:spcBef>
           <a:spcPct val="20000"/>
         </a:spcBef>
-        <a:buFont typeface="Arial" panose="020B0604020202020204" pitchFamily="34" charset="0"/>
+        <a:buFont typeface="Arial" pitchFamily="34" charset="0"/>
         <a:buChar char="»"/>
         <a:defRPr sz="2000" kern="1200">
           <a:solidFill>
@@ -1794,7 +1941,7 @@
         <a:spcBef>
           <a:spcPct val="20000"/>
         </a:spcBef>
-        <a:buFont typeface="Arial" panose="020B0604020202020204" pitchFamily="34" charset="0"/>
+        <a:buFont typeface="Arial" pitchFamily="34" charset="0"/>
         <a:buChar char="•"/>
         <a:defRPr sz="2000" kern="1200">
           <a:solidFill>
@@ -1809,7 +1956,7 @@
         <a:spcBef>
           <a:spcPct val="20000"/>
         </a:spcBef>
-        <a:buFont typeface="Arial" panose="020B0604020202020204" pitchFamily="34" charset="0"/>
+        <a:buFont typeface="Arial" pitchFamily="34" charset="0"/>
         <a:buChar char="•"/>
         <a:defRPr sz="2000" kern="1200">
           <a:solidFill>
@@ -1824,7 +1971,7 @@
         <a:spcBef>
           <a:spcPct val="20000"/>
         </a:spcBef>
-        <a:buFont typeface="Arial" panose="020B0604020202020204" pitchFamily="34" charset="0"/>
+        <a:buFont typeface="Arial" pitchFamily="34" charset="0"/>
         <a:buChar char="•"/>
         <a:defRPr sz="2000" kern="1200">
           <a:solidFill>
@@ -1839,7 +1986,7 @@
         <a:spcBef>
           <a:spcPct val="20000"/>
         </a:spcBef>
-        <a:buFont typeface="Arial" panose="020B0604020202020204" pitchFamily="34" charset="0"/>
+        <a:buFont typeface="Arial" pitchFamily="34" charset="0"/>
         <a:buChar char="•"/>
         <a:defRPr sz="2000" kern="1200">
           <a:solidFill>
@@ -1952,7 +2099,7 @@
 
 <file path=ppt/slides/slide1.xml><?xml version="1.0" encoding="utf-8"?>
 <p:sld xmlns:a="http://schemas.openxmlformats.org/drawingml/2006/main" xmlns:r="http://schemas.openxmlformats.org/officeDocument/2006/relationships" xmlns:p="http://schemas.openxmlformats.org/presentationml/2006/main">
-  <p:cSld>
+  <p:cSld name="Slide 1">
     <p:bg>
       <p:bgPr>
         <a:blipFill dpi="0" rotWithShape="1">
@@ -1996,12 +2143,13 @@
             <a:avLst/>
           </a:prstGeom>
           <a:noFill/>
+          <a:ln/>
         </p:spPr>
         <p:txBody>
           <a:bodyPr wrap="square" rtlCol="0" anchor="ctr"/>
           <a:lstStyle/>
           <a:p>
-            <a:pPr marL="0" indent="0" algn="r">
+            <a:pPr algn="r" indent="0" marL="0">
               <a:buNone/>
             </a:pPr>
             <a:r>
@@ -2009,9 +2157,9 @@
                 <a:solidFill>
                   <a:srgbClr val="8A9099"/>
                 </a:solidFill>
-                <a:latin typeface="微软雅黑" panose="020B0503020204020204" pitchFamily="34" charset="-122"/>
-                <a:ea typeface="微软雅黑" panose="020B0503020204020204" pitchFamily="34" charset="-122"/>
-                <a:cs typeface="微软雅黑" panose="020B0503020204020204" pitchFamily="34" charset="-120"/>
+                <a:latin typeface="微软雅黑" pitchFamily="34" charset="0"/>
+                <a:ea typeface="微软雅黑" pitchFamily="34" charset="-122"/>
+                <a:cs typeface="微软雅黑" pitchFamily="34" charset="-120"/>
               </a:rPr>
               <a:t>1 / 15</a:t>
             </a:r>
@@ -2034,12 +2182,13 @@
             <a:avLst/>
           </a:prstGeom>
           <a:noFill/>
+          <a:ln/>
         </p:spPr>
         <p:txBody>
           <a:bodyPr wrap="square" rtlCol="0" anchor="ctr"/>
           <a:lstStyle/>
           <a:p>
-            <a:pPr marL="0" indent="0" algn="ctr">
+            <a:pPr algn="ctr" indent="0" marL="0">
               <a:buNone/>
             </a:pPr>
             <a:r>
@@ -2047,9 +2196,9 @@
                 <a:solidFill>
                   <a:srgbClr val="1F4E9C"/>
                 </a:solidFill>
-                <a:latin typeface="微软雅黑" panose="020B0503020204020204" pitchFamily="34" charset="-122"/>
-                <a:ea typeface="微软雅黑" panose="020B0503020204020204" pitchFamily="34" charset="-122"/>
-                <a:cs typeface="微软雅黑" panose="020B0503020204020204" pitchFamily="34" charset="-120"/>
+                <a:latin typeface="微软雅黑" pitchFamily="34" charset="0"/>
+                <a:ea typeface="微软雅黑" pitchFamily="34" charset="-122"/>
+                <a:cs typeface="微软雅黑" pitchFamily="34" charset="-120"/>
               </a:rPr>
               <a:t>重邮802 数据结构代码课程</a:t>
             </a:r>
@@ -2072,12 +2221,13 @@
             <a:avLst/>
           </a:prstGeom>
           <a:noFill/>
+          <a:ln/>
         </p:spPr>
         <p:txBody>
           <a:bodyPr wrap="square" rtlCol="0" anchor="ctr"/>
           <a:lstStyle/>
           <a:p>
-            <a:pPr marL="0" indent="0" algn="ctr">
+            <a:pPr algn="ctr" indent="0" marL="0">
               <a:buNone/>
             </a:pPr>
             <a:r>
@@ -2085,9 +2235,9 @@
                 <a:solidFill>
                   <a:srgbClr val="1F2329"/>
                 </a:solidFill>
-                <a:latin typeface="微软雅黑" panose="020B0503020204020204" pitchFamily="34" charset="-122"/>
-                <a:ea typeface="微软雅黑" panose="020B0503020204020204" pitchFamily="34" charset="-122"/>
-                <a:cs typeface="微软雅黑" panose="020B0503020204020204" pitchFamily="34" charset="-120"/>
+                <a:latin typeface="微软雅黑" pitchFamily="34" charset="0"/>
+                <a:ea typeface="微软雅黑" pitchFamily="34" charset="-122"/>
+                <a:cs typeface="微软雅黑" pitchFamily="34" charset="-120"/>
               </a:rPr>
               <a:t>C语言基础阶段</a:t>
             </a:r>
@@ -2110,12 +2260,13 @@
             <a:avLst/>
           </a:prstGeom>
           <a:noFill/>
+          <a:ln/>
         </p:spPr>
         <p:txBody>
           <a:bodyPr wrap="square" rtlCol="0" anchor="ctr"/>
           <a:lstStyle/>
           <a:p>
-            <a:pPr marL="0" indent="0" algn="ctr">
+            <a:pPr algn="ctr" indent="0" marL="0">
               <a:buNone/>
             </a:pPr>
             <a:r>
@@ -2123,9 +2274,9 @@
                 <a:solidFill>
                   <a:srgbClr val="1F2329"/>
                 </a:solidFill>
-                <a:latin typeface="微软雅黑" panose="020B0503020204020204" pitchFamily="34" charset="-122"/>
-                <a:ea typeface="微软雅黑" panose="020B0503020204020204" pitchFamily="34" charset="-122"/>
-                <a:cs typeface="微软雅黑" panose="020B0503020204020204" pitchFamily="34" charset="-120"/>
+                <a:latin typeface="微软雅黑" pitchFamily="34" charset="0"/>
+                <a:ea typeface="微软雅黑" pitchFamily="34" charset="-122"/>
+                <a:cs typeface="微软雅黑" pitchFamily="34" charset="-120"/>
               </a:rPr>
               <a:t>第5节 函数与数组</a:t>
             </a:r>
@@ -2148,12 +2299,13 @@
             <a:avLst/>
           </a:prstGeom>
           <a:noFill/>
+          <a:ln/>
         </p:spPr>
         <p:txBody>
           <a:bodyPr wrap="square" rtlCol="0" anchor="ctr"/>
           <a:lstStyle/>
           <a:p>
-            <a:pPr marL="0" indent="0" algn="ctr">
+            <a:pPr algn="ctr" indent="0" marL="0">
               <a:buNone/>
             </a:pPr>
             <a:r>
@@ -2161,9 +2313,9 @@
                 <a:solidFill>
                   <a:srgbClr val="8A9099"/>
                 </a:solidFill>
-                <a:latin typeface="微软雅黑" panose="020B0503020204020204" pitchFamily="34" charset="-122"/>
-                <a:ea typeface="微软雅黑" panose="020B0503020204020204" pitchFamily="34" charset="-122"/>
-                <a:cs typeface="微软雅黑" panose="020B0503020204020204" pitchFamily="34" charset="-120"/>
+                <a:latin typeface="微软雅黑" pitchFamily="34" charset="0"/>
+                <a:ea typeface="微软雅黑" pitchFamily="34" charset="-122"/>
+                <a:cs typeface="微软雅黑" pitchFamily="34" charset="-120"/>
               </a:rPr>
               <a:t>阶段：基础 ｜ 主讲：牙膏学长 ｜ 预计40分钟 ｜ 资料答疑：伴梦研途QQ群</a:t>
             </a:r>
@@ -2181,7 +2333,7 @@
 
 <file path=ppt/slides/slide10.xml><?xml version="1.0" encoding="utf-8"?>
 <p:sld xmlns:a="http://schemas.openxmlformats.org/drawingml/2006/main" xmlns:r="http://schemas.openxmlformats.org/officeDocument/2006/relationships" xmlns:p="http://schemas.openxmlformats.org/presentationml/2006/main">
-  <p:cSld>
+  <p:cSld name="Slide 10">
     <p:bg>
       <p:bgPr>
         <a:blipFill dpi="0" rotWithShape="1">
@@ -2225,12 +2377,13 @@
             <a:avLst/>
           </a:prstGeom>
           <a:noFill/>
+          <a:ln/>
         </p:spPr>
         <p:txBody>
           <a:bodyPr wrap="square" rtlCol="0" anchor="ctr"/>
           <a:lstStyle/>
           <a:p>
-            <a:pPr marL="0" indent="0" algn="r">
+            <a:pPr algn="r" indent="0" marL="0">
               <a:buNone/>
             </a:pPr>
             <a:r>
@@ -2238,9 +2391,9 @@
                 <a:solidFill>
                   <a:srgbClr val="8A9099"/>
                 </a:solidFill>
-                <a:latin typeface="微软雅黑" panose="020B0503020204020204" pitchFamily="34" charset="-122"/>
-                <a:ea typeface="微软雅黑" panose="020B0503020204020204" pitchFamily="34" charset="-122"/>
-                <a:cs typeface="微软雅黑" panose="020B0503020204020204" pitchFamily="34" charset="-120"/>
+                <a:latin typeface="微软雅黑" pitchFamily="34" charset="0"/>
+                <a:ea typeface="微软雅黑" pitchFamily="34" charset="-122"/>
+                <a:cs typeface="微软雅黑" pitchFamily="34" charset="-120"/>
               </a:rPr>
               <a:t>10 / 15</a:t>
             </a:r>
@@ -2263,12 +2416,13 @@
             <a:avLst/>
           </a:prstGeom>
           <a:noFill/>
+          <a:ln/>
         </p:spPr>
         <p:txBody>
           <a:bodyPr wrap="square" rtlCol="0" anchor="ctr"/>
           <a:lstStyle/>
           <a:p>
-            <a:pPr marL="0" indent="0" algn="l">
+            <a:pPr algn="l" indent="0" marL="0">
               <a:buNone/>
             </a:pPr>
             <a:r>
@@ -2276,9 +2430,9 @@
                 <a:solidFill>
                   <a:srgbClr val="1F4E9C"/>
                 </a:solidFill>
-                <a:latin typeface="微软雅黑" panose="020B0503020204020204" pitchFamily="34" charset="-122"/>
-                <a:ea typeface="微软雅黑" panose="020B0503020204020204" pitchFamily="34" charset="-122"/>
-                <a:cs typeface="微软雅黑" panose="020B0503020204020204" pitchFamily="34" charset="-120"/>
+                <a:latin typeface="微软雅黑" pitchFamily="34" charset="0"/>
+                <a:ea typeface="微软雅黑" pitchFamily="34" charset="-122"/>
+                <a:cs typeface="微软雅黑" pitchFamily="34" charset="-120"/>
               </a:rPr>
               <a:t>数组做函数参数</a:t>
             </a:r>
@@ -2301,12 +2455,13 @@
             <a:avLst/>
           </a:prstGeom>
           <a:noFill/>
+          <a:ln/>
         </p:spPr>
         <p:txBody>
           <a:bodyPr wrap="square" rtlCol="0" anchor="ctr"/>
           <a:lstStyle/>
           <a:p>
-            <a:pPr marL="0" indent="0" algn="l">
+            <a:pPr algn="l" indent="0" marL="0">
               <a:buNone/>
             </a:pPr>
             <a:r>
@@ -2314,9 +2469,9 @@
                 <a:solidFill>
                   <a:srgbClr val="1F2329"/>
                 </a:solidFill>
-                <a:latin typeface="微软雅黑" panose="020B0503020204020204" pitchFamily="34" charset="-122"/>
-                <a:ea typeface="微软雅黑" panose="020B0503020204020204" pitchFamily="34" charset="-122"/>
-                <a:cs typeface="微软雅黑" panose="020B0503020204020204" pitchFamily="34" charset="-120"/>
+                <a:latin typeface="微软雅黑" pitchFamily="34" charset="0"/>
+                <a:ea typeface="微软雅黑" pitchFamily="34" charset="-122"/>
+                <a:cs typeface="微软雅黑" pitchFamily="34" charset="-120"/>
               </a:rPr>
               <a:t>把数组交给函数处理</a:t>
             </a:r>
@@ -2364,12 +2519,13 @@
             <a:avLst/>
           </a:prstGeom>
           <a:noFill/>
+          <a:ln/>
         </p:spPr>
         <p:txBody>
           <a:bodyPr wrap="square" rtlCol="0" anchor="t"/>
           <a:lstStyle/>
           <a:p>
-            <a:pPr marL="0" indent="0" algn="l">
+            <a:pPr algn="l" indent="0" marL="0">
               <a:lnSpc>
                 <a:spcPct val="125000"/>
               </a:lnSpc>
@@ -2380,9 +2536,9 @@
                 <a:solidFill>
                   <a:srgbClr val="1F2329"/>
                 </a:solidFill>
-                <a:latin typeface="Consolas" panose="020B0609020204030204" pitchFamily="34" charset="0"/>
-                <a:ea typeface="Consolas" panose="020B0609020204030204" pitchFamily="34" charset="-122"/>
-                <a:cs typeface="Consolas" panose="020B0609020204030204" pitchFamily="34" charset="-120"/>
+                <a:latin typeface="Consolas" pitchFamily="34" charset="0"/>
+                <a:ea typeface="Consolas" pitchFamily="34" charset="-122"/>
+                <a:cs typeface="Consolas" pitchFamily="34" charset="-120"/>
               </a:rPr>
               <a:t>int sum(int a[], int n){
     int s = 0;
@@ -2410,12 +2566,13 @@
             <a:avLst/>
           </a:prstGeom>
           <a:noFill/>
+          <a:ln/>
         </p:spPr>
         <p:txBody>
           <a:bodyPr wrap="square" rtlCol="0" anchor="t"/>
           <a:lstStyle/>
           <a:p>
-            <a:pPr marL="0" indent="0" algn="l">
+            <a:pPr algn="l" indent="0" marL="0">
               <a:lnSpc>
                 <a:spcPct val="115000"/>
               </a:lnSpc>
@@ -2426,12 +2583,18 @@
                 <a:solidFill>
                   <a:srgbClr val="1F4E9C"/>
                 </a:solidFill>
-                <a:latin typeface="微软雅黑" panose="020B0503020204020204" pitchFamily="34" charset="-122"/>
-                <a:ea typeface="微软雅黑" panose="020B0503020204020204" pitchFamily="34" charset="-122"/>
-                <a:cs typeface="微软雅黑" panose="020B0503020204020204" pitchFamily="34" charset="-120"/>
+                <a:latin typeface="微软雅黑" pitchFamily="34" charset="0"/>
+                <a:ea typeface="微软雅黑" pitchFamily="34" charset="-122"/>
+                <a:cs typeface="微软雅黑" pitchFamily="34" charset="-120"/>
               </a:rPr>
               <a:t>•  </a:t>
             </a:r>
+            <a:pPr algn="l" indent="0" marL="0">
+              <a:lnSpc>
+                <a:spcPct val="115000"/>
+              </a:lnSpc>
+              <a:buNone/>
+            </a:pPr>
             <a:r>
               <a:rPr lang="en-US" sz="1800" dirty="0">
                 <a:solidFill>
@@ -2440,6 +2603,12 @@
               </a:rPr>
               <a:t>数组交给函数，要</a:t>
             </a:r>
+            <a:pPr algn="l" indent="0" marL="0">
+              <a:lnSpc>
+                <a:spcPct val="115000"/>
+              </a:lnSpc>
+              <a:buNone/>
+            </a:pPr>
             <a:r>
               <a:rPr lang="en-US" sz="1800" b="1" dirty="0">
                 <a:solidFill>
@@ -2448,6 +2617,12 @@
               </a:rPr>
               <a:t>连长度一起交</a:t>
             </a:r>
+            <a:pPr algn="l" indent="0" marL="0">
+              <a:lnSpc>
+                <a:spcPct val="115000"/>
+              </a:lnSpc>
+              <a:buNone/>
+            </a:pPr>
             <a:r>
               <a:rPr lang="en-US" sz="1800" dirty="0">
                 <a:solidFill>
@@ -2475,12 +2650,13 @@
             <a:avLst/>
           </a:prstGeom>
           <a:noFill/>
+          <a:ln/>
         </p:spPr>
         <p:txBody>
           <a:bodyPr wrap="square" rtlCol="0" anchor="t"/>
           <a:lstStyle/>
           <a:p>
-            <a:pPr marL="0" indent="0" algn="l">
+            <a:pPr algn="l" indent="0" marL="0">
               <a:lnSpc>
                 <a:spcPct val="115000"/>
               </a:lnSpc>
@@ -2491,12 +2667,18 @@
                 <a:solidFill>
                   <a:srgbClr val="1F4E9C"/>
                 </a:solidFill>
-                <a:latin typeface="微软雅黑" panose="020B0503020204020204" pitchFamily="34" charset="-122"/>
-                <a:ea typeface="微软雅黑" panose="020B0503020204020204" pitchFamily="34" charset="-122"/>
-                <a:cs typeface="微软雅黑" panose="020B0503020204020204" pitchFamily="34" charset="-120"/>
+                <a:latin typeface="微软雅黑" pitchFamily="34" charset="0"/>
+                <a:ea typeface="微软雅黑" pitchFamily="34" charset="-122"/>
+                <a:cs typeface="微软雅黑" pitchFamily="34" charset="-120"/>
               </a:rPr>
               <a:t>•  </a:t>
             </a:r>
+            <a:pPr algn="l" indent="0" marL="0">
+              <a:lnSpc>
+                <a:spcPct val="115000"/>
+              </a:lnSpc>
+              <a:buNone/>
+            </a:pPr>
             <a:r>
               <a:rPr lang="en-US" sz="1800" dirty="0">
                 <a:solidFill>
@@ -2524,12 +2706,13 @@
             <a:avLst/>
           </a:prstGeom>
           <a:noFill/>
+          <a:ln/>
         </p:spPr>
         <p:txBody>
           <a:bodyPr wrap="square" rtlCol="0" anchor="t"/>
           <a:lstStyle/>
           <a:p>
-            <a:pPr marL="0" indent="0" algn="l">
+            <a:pPr algn="l" indent="0" marL="0">
               <a:lnSpc>
                 <a:spcPct val="115000"/>
               </a:lnSpc>
@@ -2540,12 +2723,18 @@
                 <a:solidFill>
                   <a:srgbClr val="1F4E9C"/>
                 </a:solidFill>
-                <a:latin typeface="微软雅黑" panose="020B0503020204020204" pitchFamily="34" charset="-122"/>
-                <a:ea typeface="微软雅黑" panose="020B0503020204020204" pitchFamily="34" charset="-122"/>
-                <a:cs typeface="微软雅黑" panose="020B0503020204020204" pitchFamily="34" charset="-120"/>
+                <a:latin typeface="微软雅黑" pitchFamily="34" charset="0"/>
+                <a:ea typeface="微软雅黑" pitchFamily="34" charset="-122"/>
+                <a:cs typeface="微软雅黑" pitchFamily="34" charset="-120"/>
               </a:rPr>
               <a:t>•  </a:t>
             </a:r>
+            <a:pPr algn="l" indent="0" marL="0">
+              <a:lnSpc>
+                <a:spcPct val="115000"/>
+              </a:lnSpc>
+              <a:buNone/>
+            </a:pPr>
             <a:r>
               <a:rPr lang="en-US" sz="1800" dirty="0">
                 <a:solidFill>
@@ -2568,7 +2757,7 @@
 
 <file path=ppt/slides/slide11.xml><?xml version="1.0" encoding="utf-8"?>
 <p:sld xmlns:a="http://schemas.openxmlformats.org/drawingml/2006/main" xmlns:r="http://schemas.openxmlformats.org/officeDocument/2006/relationships" xmlns:p="http://schemas.openxmlformats.org/presentationml/2006/main">
-  <p:cSld>
+  <p:cSld name="Slide 11">
     <p:bg>
       <p:bgPr>
         <a:blipFill dpi="0" rotWithShape="1">
@@ -2612,12 +2801,13 @@
             <a:avLst/>
           </a:prstGeom>
           <a:noFill/>
+          <a:ln/>
         </p:spPr>
         <p:txBody>
           <a:bodyPr wrap="square" rtlCol="0" anchor="ctr"/>
           <a:lstStyle/>
           <a:p>
-            <a:pPr marL="0" indent="0" algn="r">
+            <a:pPr algn="r" indent="0" marL="0">
               <a:buNone/>
             </a:pPr>
             <a:r>
@@ -2625,9 +2815,9 @@
                 <a:solidFill>
                   <a:srgbClr val="8A9099"/>
                 </a:solidFill>
-                <a:latin typeface="微软雅黑" panose="020B0503020204020204" pitchFamily="34" charset="-122"/>
-                <a:ea typeface="微软雅黑" panose="020B0503020204020204" pitchFamily="34" charset="-122"/>
-                <a:cs typeface="微软雅黑" panose="020B0503020204020204" pitchFamily="34" charset="-120"/>
+                <a:latin typeface="微软雅黑" pitchFamily="34" charset="0"/>
+                <a:ea typeface="微软雅黑" pitchFamily="34" charset="-122"/>
+                <a:cs typeface="微软雅黑" pitchFamily="34" charset="-120"/>
               </a:rPr>
               <a:t>11 / 15</a:t>
             </a:r>
@@ -2650,12 +2840,13 @@
             <a:avLst/>
           </a:prstGeom>
           <a:noFill/>
+          <a:ln/>
         </p:spPr>
         <p:txBody>
           <a:bodyPr wrap="square" rtlCol="0" anchor="ctr"/>
           <a:lstStyle/>
           <a:p>
-            <a:pPr marL="0" indent="0" algn="l">
+            <a:pPr algn="l" indent="0" marL="0">
               <a:buNone/>
             </a:pPr>
             <a:r>
@@ -2663,9 +2854,9 @@
                 <a:solidFill>
                   <a:srgbClr val="1F4E9C"/>
                 </a:solidFill>
-                <a:latin typeface="微软雅黑" panose="020B0503020204020204" pitchFamily="34" charset="-122"/>
-                <a:ea typeface="微软雅黑" panose="020B0503020204020204" pitchFamily="34" charset="-122"/>
-                <a:cs typeface="微软雅黑" panose="020B0503020204020204" pitchFamily="34" charset="-120"/>
+                <a:latin typeface="微软雅黑" pitchFamily="34" charset="0"/>
+                <a:ea typeface="微软雅黑" pitchFamily="34" charset="-122"/>
+                <a:cs typeface="微软雅黑" pitchFamily="34" charset="-120"/>
               </a:rPr>
               <a:t>字符数组与字符串</a:t>
             </a:r>
@@ -2688,12 +2879,13 @@
             <a:avLst/>
           </a:prstGeom>
           <a:noFill/>
+          <a:ln/>
         </p:spPr>
         <p:txBody>
           <a:bodyPr wrap="square" rtlCol="0" anchor="ctr"/>
           <a:lstStyle/>
           <a:p>
-            <a:pPr marL="0" indent="0" algn="l">
+            <a:pPr algn="l" indent="0" marL="0">
               <a:buNone/>
             </a:pPr>
             <a:r>
@@ -2701,9 +2893,9 @@
                 <a:solidFill>
                   <a:srgbClr val="1F2329"/>
                 </a:solidFill>
-                <a:latin typeface="微软雅黑" panose="020B0503020204020204" pitchFamily="34" charset="-122"/>
-                <a:ea typeface="微软雅黑" panose="020B0503020204020204" pitchFamily="34" charset="-122"/>
-                <a:cs typeface="微软雅黑" panose="020B0503020204020204" pitchFamily="34" charset="-120"/>
+                <a:latin typeface="微软雅黑" pitchFamily="34" charset="0"/>
+                <a:ea typeface="微软雅黑" pitchFamily="34" charset="-122"/>
+                <a:cs typeface="微软雅黑" pitchFamily="34" charset="-120"/>
               </a:rPr>
               <a:t>字符串 = 字符数组 + 结尾标记</a:t>
             </a:r>
@@ -2751,12 +2943,13 @@
             <a:avLst/>
           </a:prstGeom>
           <a:noFill/>
+          <a:ln/>
         </p:spPr>
         <p:txBody>
           <a:bodyPr wrap="square" rtlCol="0" anchor="t"/>
           <a:lstStyle/>
           <a:p>
-            <a:pPr marL="0" indent="0" algn="l">
+            <a:pPr algn="l" indent="0" marL="0">
               <a:lnSpc>
                 <a:spcPct val="125000"/>
               </a:lnSpc>
@@ -2767,9 +2960,9 @@
                 <a:solidFill>
                   <a:srgbClr val="1F2329"/>
                 </a:solidFill>
-                <a:latin typeface="Consolas" panose="020B0609020204030204" pitchFamily="34" charset="0"/>
-                <a:ea typeface="Consolas" panose="020B0609020204030204" pitchFamily="34" charset="-122"/>
-                <a:cs typeface="Consolas" panose="020B0609020204030204" pitchFamily="34" charset="-120"/>
+                <a:latin typeface="Consolas" pitchFamily="34" charset="0"/>
+                <a:ea typeface="Consolas" pitchFamily="34" charset="-122"/>
+                <a:cs typeface="Consolas" pitchFamily="34" charset="-120"/>
               </a:rPr>
               <a:t>char s[] = "hello";         // 实际存了6个字符
 // h  e  l  l  o  '\0'
@@ -2794,12 +2987,13 @@
             <a:avLst/>
           </a:prstGeom>
           <a:noFill/>
+          <a:ln/>
         </p:spPr>
         <p:txBody>
           <a:bodyPr wrap="square" rtlCol="0" anchor="t"/>
           <a:lstStyle/>
           <a:p>
-            <a:pPr marL="0" indent="0" algn="l">
+            <a:pPr algn="l" indent="0" marL="0">
               <a:lnSpc>
                 <a:spcPct val="115000"/>
               </a:lnSpc>
@@ -2810,12 +3004,18 @@
                 <a:solidFill>
                   <a:srgbClr val="1F4E9C"/>
                 </a:solidFill>
-                <a:latin typeface="微软雅黑" panose="020B0503020204020204" pitchFamily="34" charset="-122"/>
-                <a:ea typeface="微软雅黑" panose="020B0503020204020204" pitchFamily="34" charset="-122"/>
-                <a:cs typeface="微软雅黑" panose="020B0503020204020204" pitchFamily="34" charset="-120"/>
+                <a:latin typeface="微软雅黑" pitchFamily="34" charset="0"/>
+                <a:ea typeface="微软雅黑" pitchFamily="34" charset="-122"/>
+                <a:cs typeface="微软雅黑" pitchFamily="34" charset="-120"/>
               </a:rPr>
               <a:t>•  </a:t>
             </a:r>
+            <a:pPr algn="l" indent="0" marL="0">
+              <a:lnSpc>
+                <a:spcPct val="115000"/>
+              </a:lnSpc>
+              <a:buNone/>
+            </a:pPr>
             <a:r>
               <a:rPr lang="en-US" sz="1800" dirty="0">
                 <a:solidFill>
@@ -2824,6 +3024,12 @@
               </a:rPr>
               <a:t>字符串本质是</a:t>
             </a:r>
+            <a:pPr algn="l" indent="0" marL="0">
+              <a:lnSpc>
+                <a:spcPct val="115000"/>
+              </a:lnSpc>
+              <a:buNone/>
+            </a:pPr>
             <a:r>
               <a:rPr lang="en-US" sz="1800" b="1" dirty="0">
                 <a:solidFill>
@@ -2832,6 +3038,12 @@
               </a:rPr>
               <a:t>字符数组</a:t>
             </a:r>
+            <a:pPr algn="l" indent="0" marL="0">
+              <a:lnSpc>
+                <a:spcPct val="115000"/>
+              </a:lnSpc>
+              <a:buNone/>
+            </a:pPr>
             <a:r>
               <a:rPr lang="en-US" sz="1800" dirty="0">
                 <a:solidFill>
@@ -2859,12 +3071,13 @@
             <a:avLst/>
           </a:prstGeom>
           <a:noFill/>
+          <a:ln/>
         </p:spPr>
         <p:txBody>
           <a:bodyPr wrap="square" rtlCol="0" anchor="t"/>
           <a:lstStyle/>
           <a:p>
-            <a:pPr marL="0" indent="0" algn="l">
+            <a:pPr algn="l" indent="0" marL="0">
               <a:lnSpc>
                 <a:spcPct val="115000"/>
               </a:lnSpc>
@@ -2875,12 +3088,18 @@
                 <a:solidFill>
                   <a:srgbClr val="1F4E9C"/>
                 </a:solidFill>
-                <a:latin typeface="微软雅黑" panose="020B0503020204020204" pitchFamily="34" charset="-122"/>
-                <a:ea typeface="微软雅黑" panose="020B0503020204020204" pitchFamily="34" charset="-122"/>
-                <a:cs typeface="微软雅黑" panose="020B0503020204020204" pitchFamily="34" charset="-120"/>
+                <a:latin typeface="微软雅黑" pitchFamily="34" charset="0"/>
+                <a:ea typeface="微软雅黑" pitchFamily="34" charset="-122"/>
+                <a:cs typeface="微软雅黑" pitchFamily="34" charset="-120"/>
               </a:rPr>
               <a:t>•  </a:t>
             </a:r>
+            <a:pPr algn="l" indent="0" marL="0">
+              <a:lnSpc>
+                <a:spcPct val="115000"/>
+              </a:lnSpc>
+              <a:buNone/>
+            </a:pPr>
             <a:r>
               <a:rPr lang="en-US" sz="1800" dirty="0">
                 <a:solidFill>
@@ -2908,12 +3127,13 @@
             <a:avLst/>
           </a:prstGeom>
           <a:noFill/>
+          <a:ln/>
         </p:spPr>
         <p:txBody>
           <a:bodyPr wrap="square" rtlCol="0" anchor="t"/>
           <a:lstStyle/>
           <a:p>
-            <a:pPr marL="0" indent="0" algn="l">
+            <a:pPr algn="l" indent="0" marL="0">
               <a:lnSpc>
                 <a:spcPct val="115000"/>
               </a:lnSpc>
@@ -2924,12 +3144,18 @@
                 <a:solidFill>
                   <a:srgbClr val="1F4E9C"/>
                 </a:solidFill>
-                <a:latin typeface="微软雅黑" panose="020B0503020204020204" pitchFamily="34" charset="-122"/>
-                <a:ea typeface="微软雅黑" panose="020B0503020204020204" pitchFamily="34" charset="-122"/>
-                <a:cs typeface="微软雅黑" panose="020B0503020204020204" pitchFamily="34" charset="-120"/>
+                <a:latin typeface="微软雅黑" pitchFamily="34" charset="0"/>
+                <a:ea typeface="微软雅黑" pitchFamily="34" charset="-122"/>
+                <a:cs typeface="微软雅黑" pitchFamily="34" charset="-120"/>
               </a:rPr>
               <a:t>•  </a:t>
             </a:r>
+            <a:pPr algn="l" indent="0" marL="0">
+              <a:lnSpc>
+                <a:spcPct val="115000"/>
+              </a:lnSpc>
+              <a:buNone/>
+            </a:pPr>
             <a:r>
               <a:rPr lang="en-US" sz="1800" dirty="0">
                 <a:solidFill>
@@ -2952,7 +3178,7 @@
 
 <file path=ppt/slides/slide12.xml><?xml version="1.0" encoding="utf-8"?>
 <p:sld xmlns:a="http://schemas.openxmlformats.org/drawingml/2006/main" xmlns:r="http://schemas.openxmlformats.org/officeDocument/2006/relationships" xmlns:p="http://schemas.openxmlformats.org/presentationml/2006/main">
-  <p:cSld>
+  <p:cSld name="Slide 12">
     <p:bg>
       <p:bgPr>
         <a:blipFill dpi="0" rotWithShape="1">
@@ -2996,12 +3222,13 @@
             <a:avLst/>
           </a:prstGeom>
           <a:noFill/>
+          <a:ln/>
         </p:spPr>
         <p:txBody>
           <a:bodyPr wrap="square" rtlCol="0" anchor="ctr"/>
           <a:lstStyle/>
           <a:p>
-            <a:pPr marL="0" indent="0" algn="r">
+            <a:pPr algn="r" indent="0" marL="0">
               <a:buNone/>
             </a:pPr>
             <a:r>
@@ -3009,9 +3236,9 @@
                 <a:solidFill>
                   <a:srgbClr val="8A9099"/>
                 </a:solidFill>
-                <a:latin typeface="微软雅黑" panose="020B0503020204020204" pitchFamily="34" charset="-122"/>
-                <a:ea typeface="微软雅黑" panose="020B0503020204020204" pitchFamily="34" charset="-122"/>
-                <a:cs typeface="微软雅黑" panose="020B0503020204020204" pitchFamily="34" charset="-120"/>
+                <a:latin typeface="微软雅黑" pitchFamily="34" charset="0"/>
+                <a:ea typeface="微软雅黑" pitchFamily="34" charset="-122"/>
+                <a:cs typeface="微软雅黑" pitchFamily="34" charset="-120"/>
               </a:rPr>
               <a:t>12 / 15</a:t>
             </a:r>
@@ -3034,12 +3261,13 @@
             <a:avLst/>
           </a:prstGeom>
           <a:noFill/>
+          <a:ln/>
         </p:spPr>
         <p:txBody>
           <a:bodyPr wrap="square" rtlCol="0" anchor="ctr"/>
           <a:lstStyle/>
           <a:p>
-            <a:pPr marL="0" indent="0" algn="l">
+            <a:pPr algn="l" indent="0" marL="0">
               <a:buNone/>
             </a:pPr>
             <a:r>
@@ -3047,9 +3275,9 @@
                 <a:solidFill>
                   <a:srgbClr val="1F4E9C"/>
                 </a:solidFill>
-                <a:latin typeface="微软雅黑" panose="020B0503020204020204" pitchFamily="34" charset="-122"/>
-                <a:ea typeface="微软雅黑" panose="020B0503020204020204" pitchFamily="34" charset="-122"/>
-                <a:cs typeface="微软雅黑" panose="020B0503020204020204" pitchFamily="34" charset="-120"/>
+                <a:latin typeface="微软雅黑" pitchFamily="34" charset="0"/>
+                <a:ea typeface="微软雅黑" pitchFamily="34" charset="-122"/>
+                <a:cs typeface="微软雅黑" pitchFamily="34" charset="-120"/>
               </a:rPr>
               <a:t>板书推演</a:t>
             </a:r>
@@ -3072,12 +3300,13 @@
             <a:avLst/>
           </a:prstGeom>
           <a:noFill/>
+          <a:ln/>
         </p:spPr>
         <p:txBody>
           <a:bodyPr wrap="square" rtlCol="0" anchor="ctr"/>
           <a:lstStyle/>
           <a:p>
-            <a:pPr marL="0" indent="0" algn="l">
+            <a:pPr algn="l" indent="0" marL="0">
               <a:buNone/>
             </a:pPr>
             <a:r>
@@ -3085,9 +3314,9 @@
                 <a:solidFill>
                   <a:srgbClr val="1F2329"/>
                 </a:solidFill>
-                <a:latin typeface="微软雅黑" panose="020B0503020204020204" pitchFamily="34" charset="-122"/>
-                <a:ea typeface="微软雅黑" panose="020B0503020204020204" pitchFamily="34" charset="-122"/>
-                <a:cs typeface="微软雅黑" panose="020B0503020204020204" pitchFamily="34" charset="-120"/>
+                <a:latin typeface="微软雅黑" pitchFamily="34" charset="0"/>
+                <a:ea typeface="微软雅黑" pitchFamily="34" charset="-122"/>
+                <a:cs typeface="微软雅黑" pitchFamily="34" charset="-120"/>
               </a:rPr>
               <a:t>从零写：函数求数组最大值</a:t>
             </a:r>
@@ -3110,12 +3339,13 @@
             <a:avLst/>
           </a:prstGeom>
           <a:noFill/>
+          <a:ln/>
         </p:spPr>
         <p:txBody>
           <a:bodyPr wrap="square" rtlCol="0" anchor="t"/>
           <a:lstStyle/>
           <a:p>
-            <a:pPr marL="0" indent="0" algn="l">
+            <a:pPr algn="l" indent="0" marL="0">
               <a:buNone/>
             </a:pPr>
             <a:r>
@@ -3123,9 +3353,9 @@
                 <a:solidFill>
                   <a:srgbClr val="1F2329"/>
                 </a:solidFill>
-                <a:latin typeface="微软雅黑" panose="020B0503020204020204" pitchFamily="34" charset="-122"/>
-                <a:ea typeface="微软雅黑" panose="020B0503020204020204" pitchFamily="34" charset="-122"/>
-                <a:cs typeface="微软雅黑" panose="020B0503020204020204" pitchFamily="34" charset="-120"/>
+                <a:latin typeface="微软雅黑" pitchFamily="34" charset="0"/>
+                <a:ea typeface="微软雅黑" pitchFamily="34" charset="-122"/>
+                <a:cs typeface="微软雅黑" pitchFamily="34" charset="-120"/>
               </a:rPr>
               <a:t>任务：写一个完整程序，定义函数findMax处理数组，在main里声明数组{3,9,2,7}，调用函数求最大值并打印。分六步：头文件 → 定义findMax函数 → main开头 → 声明数组 → 调用并打印 → return 0 补花括号。注意：函数写在main前面；数组传参要带长度</a:t>
             </a:r>
@@ -3173,12 +3403,13 @@
             <a:avLst/>
           </a:prstGeom>
           <a:noFill/>
+          <a:ln/>
         </p:spPr>
         <p:txBody>
           <a:bodyPr wrap="square" rtlCol="0" anchor="ctr"/>
           <a:lstStyle/>
           <a:p>
-            <a:pPr marL="0" indent="0" algn="r">
+            <a:pPr algn="r" indent="0" marL="0">
               <a:buNone/>
             </a:pPr>
             <a:r>
@@ -3186,9 +3417,9 @@
                 <a:solidFill>
                   <a:srgbClr val="8A9099"/>
                 </a:solidFill>
-                <a:latin typeface="微软雅黑" panose="020B0503020204020204" pitchFamily="34" charset="-122"/>
-                <a:ea typeface="微软雅黑" panose="020B0503020204020204" pitchFamily="34" charset="-122"/>
-                <a:cs typeface="微软雅黑" panose="020B0503020204020204" pitchFamily="34" charset="-120"/>
+                <a:latin typeface="微软雅黑" pitchFamily="34" charset="0"/>
+                <a:ea typeface="微软雅黑" pitchFamily="34" charset="-122"/>
+                <a:cs typeface="微软雅黑" pitchFamily="34" charset="-120"/>
               </a:rPr>
               <a:t>此处板书推演</a:t>
             </a:r>
@@ -3206,7 +3437,7 @@
 
 <file path=ppt/slides/slide13.xml><?xml version="1.0" encoding="utf-8"?>
 <p:sld xmlns:a="http://schemas.openxmlformats.org/drawingml/2006/main" xmlns:r="http://schemas.openxmlformats.org/officeDocument/2006/relationships" xmlns:p="http://schemas.openxmlformats.org/presentationml/2006/main">
-  <p:cSld>
+  <p:cSld name="Slide 13">
     <p:bg>
       <p:bgPr>
         <a:blipFill dpi="0" rotWithShape="1">
@@ -3250,12 +3481,13 @@
             <a:avLst/>
           </a:prstGeom>
           <a:noFill/>
+          <a:ln/>
         </p:spPr>
         <p:txBody>
           <a:bodyPr wrap="square" rtlCol="0" anchor="ctr"/>
           <a:lstStyle/>
           <a:p>
-            <a:pPr marL="0" indent="0" algn="r">
+            <a:pPr algn="r" indent="0" marL="0">
               <a:buNone/>
             </a:pPr>
             <a:r>
@@ -3263,9 +3495,9 @@
                 <a:solidFill>
                   <a:srgbClr val="8A9099"/>
                 </a:solidFill>
-                <a:latin typeface="微软雅黑" panose="020B0503020204020204" pitchFamily="34" charset="-122"/>
-                <a:ea typeface="微软雅黑" panose="020B0503020204020204" pitchFamily="34" charset="-122"/>
-                <a:cs typeface="微软雅黑" panose="020B0503020204020204" pitchFamily="34" charset="-120"/>
+                <a:latin typeface="微软雅黑" pitchFamily="34" charset="0"/>
+                <a:ea typeface="微软雅黑" pitchFamily="34" charset="-122"/>
+                <a:cs typeface="微软雅黑" pitchFamily="34" charset="-120"/>
               </a:rPr>
               <a:t>13 / 15</a:t>
             </a:r>
@@ -3288,12 +3520,13 @@
             <a:avLst/>
           </a:prstGeom>
           <a:noFill/>
+          <a:ln/>
         </p:spPr>
         <p:txBody>
           <a:bodyPr wrap="square" rtlCol="0" anchor="ctr"/>
           <a:lstStyle/>
           <a:p>
-            <a:pPr marL="0" indent="0" algn="l">
+            <a:pPr algn="l" indent="0" marL="0">
               <a:buNone/>
             </a:pPr>
             <a:r>
@@ -3301,9 +3534,9 @@
                 <a:solidFill>
                   <a:srgbClr val="1F4E9C"/>
                 </a:solidFill>
-                <a:latin typeface="微软雅黑" panose="020B0503020204020204" pitchFamily="34" charset="-122"/>
-                <a:ea typeface="微软雅黑" panose="020B0503020204020204" pitchFamily="34" charset="-122"/>
-                <a:cs typeface="微软雅黑" panose="020B0503020204020204" pitchFamily="34" charset="-120"/>
+                <a:latin typeface="微软雅黑" pitchFamily="34" charset="0"/>
+                <a:ea typeface="微软雅黑" pitchFamily="34" charset="-122"/>
+                <a:cs typeface="微软雅黑" pitchFamily="34" charset="-120"/>
               </a:rPr>
               <a:t>板书结论</a:t>
             </a:r>
@@ -3326,12 +3559,13 @@
             <a:avLst/>
           </a:prstGeom>
           <a:noFill/>
+          <a:ln/>
         </p:spPr>
         <p:txBody>
           <a:bodyPr wrap="square" rtlCol="0" anchor="ctr"/>
           <a:lstStyle/>
           <a:p>
-            <a:pPr marL="0" indent="0" algn="l">
+            <a:pPr algn="l" indent="0" marL="0">
               <a:buNone/>
             </a:pPr>
             <a:r>
@@ -3339,9 +3573,9 @@
                 <a:solidFill>
                   <a:srgbClr val="1F2329"/>
                 </a:solidFill>
-                <a:latin typeface="微软雅黑" panose="020B0503020204020204" pitchFamily="34" charset="-122"/>
-                <a:ea typeface="微软雅黑" panose="020B0503020204020204" pitchFamily="34" charset="-122"/>
-                <a:cs typeface="微软雅黑" panose="020B0503020204020204" pitchFamily="34" charset="-120"/>
+                <a:latin typeface="微软雅黑" pitchFamily="34" charset="0"/>
+                <a:ea typeface="微软雅黑" pitchFamily="34" charset="-122"/>
+                <a:cs typeface="微软雅黑" pitchFamily="34" charset="-120"/>
               </a:rPr>
               <a:t>程序长这样</a:t>
             </a:r>
@@ -3389,12 +3623,13 @@
             <a:avLst/>
           </a:prstGeom>
           <a:noFill/>
+          <a:ln/>
         </p:spPr>
         <p:txBody>
           <a:bodyPr wrap="square" rtlCol="0" anchor="t"/>
           <a:lstStyle/>
           <a:p>
-            <a:pPr marL="0" indent="0" algn="l">
+            <a:pPr algn="l" indent="0" marL="0">
               <a:lnSpc>
                 <a:spcPct val="125000"/>
               </a:lnSpc>
@@ -3405,9 +3640,9 @@
                 <a:solidFill>
                   <a:srgbClr val="1F2329"/>
                 </a:solidFill>
-                <a:latin typeface="Consolas" panose="020B0609020204030204" pitchFamily="34" charset="0"/>
-                <a:ea typeface="Consolas" panose="020B0609020204030204" pitchFamily="34" charset="-122"/>
-                <a:cs typeface="Consolas" panose="020B0609020204030204" pitchFamily="34" charset="-120"/>
+                <a:latin typeface="Consolas" pitchFamily="34" charset="0"/>
+                <a:ea typeface="Consolas" pitchFamily="34" charset="-122"/>
+                <a:cs typeface="Consolas" pitchFamily="34" charset="-120"/>
               </a:rPr>
               <a:t>#include &lt;stdio.h&gt;
 int findMax(int a[], int n){
@@ -3442,12 +3677,13 @@
             <a:avLst/>
           </a:prstGeom>
           <a:noFill/>
+          <a:ln/>
         </p:spPr>
         <p:txBody>
           <a:bodyPr wrap="square" rtlCol="0" anchor="t"/>
           <a:lstStyle/>
           <a:p>
-            <a:pPr marL="0" indent="0" algn="l">
+            <a:pPr algn="l" indent="0" marL="0">
               <a:buNone/>
             </a:pPr>
             <a:r>
@@ -3455,9 +3691,9 @@
                 <a:solidFill>
                   <a:srgbClr val="8A9099"/>
                 </a:solidFill>
-                <a:latin typeface="微软雅黑" panose="020B0503020204020204" pitchFamily="34" charset="-122"/>
-                <a:ea typeface="微软雅黑" panose="020B0503020204020204" pitchFamily="34" charset="-122"/>
-                <a:cs typeface="微软雅黑" panose="020B0503020204020204" pitchFamily="34" charset="-120"/>
+                <a:latin typeface="微软雅黑" pitchFamily="34" charset="0"/>
+                <a:ea typeface="微软雅黑" pitchFamily="34" charset="-122"/>
+                <a:cs typeface="微软雅黑" pitchFamily="34" charset="-120"/>
               </a:rPr>
               <a:t>输出：最大值：9。"打擂台"思路：先让第一个当擂主，逐个挑战</a:t>
             </a:r>
@@ -3475,7 +3711,7 @@
 
 <file path=ppt/slides/slide14.xml><?xml version="1.0" encoding="utf-8"?>
 <p:sld xmlns:a="http://schemas.openxmlformats.org/drawingml/2006/main" xmlns:r="http://schemas.openxmlformats.org/officeDocument/2006/relationships" xmlns:p="http://schemas.openxmlformats.org/presentationml/2006/main">
-  <p:cSld>
+  <p:cSld name="Slide 14">
     <p:bg>
       <p:bgPr>
         <a:blipFill dpi="0" rotWithShape="1">
@@ -3519,12 +3755,13 @@
             <a:avLst/>
           </a:prstGeom>
           <a:noFill/>
+          <a:ln/>
         </p:spPr>
         <p:txBody>
           <a:bodyPr wrap="square" rtlCol="0" anchor="ctr"/>
           <a:lstStyle/>
           <a:p>
-            <a:pPr marL="0" indent="0" algn="r">
+            <a:pPr algn="r" indent="0" marL="0">
               <a:buNone/>
             </a:pPr>
             <a:r>
@@ -3532,9 +3769,9 @@
                 <a:solidFill>
                   <a:srgbClr val="8A9099"/>
                 </a:solidFill>
-                <a:latin typeface="微软雅黑" panose="020B0503020204020204" pitchFamily="34" charset="-122"/>
-                <a:ea typeface="微软雅黑" panose="020B0503020204020204" pitchFamily="34" charset="-122"/>
-                <a:cs typeface="微软雅黑" panose="020B0503020204020204" pitchFamily="34" charset="-120"/>
+                <a:latin typeface="微软雅黑" pitchFamily="34" charset="0"/>
+                <a:ea typeface="微软雅黑" pitchFamily="34" charset="-122"/>
+                <a:cs typeface="微软雅黑" pitchFamily="34" charset="-120"/>
               </a:rPr>
               <a:t>14 / 15</a:t>
             </a:r>
@@ -3557,12 +3794,13 @@
             <a:avLst/>
           </a:prstGeom>
           <a:noFill/>
+          <a:ln/>
         </p:spPr>
         <p:txBody>
           <a:bodyPr wrap="square" rtlCol="0" anchor="ctr"/>
           <a:lstStyle/>
           <a:p>
-            <a:pPr marL="0" indent="0" algn="l">
+            <a:pPr algn="l" indent="0" marL="0">
               <a:buNone/>
             </a:pPr>
             <a:r>
@@ -3570,9 +3808,9 @@
                 <a:solidFill>
                   <a:srgbClr val="1F4E9C"/>
                 </a:solidFill>
-                <a:latin typeface="微软雅黑" panose="020B0503020204020204" pitchFamily="34" charset="-122"/>
-                <a:ea typeface="微软雅黑" panose="020B0503020204020204" pitchFamily="34" charset="-122"/>
-                <a:cs typeface="微软雅黑" panose="020B0503020204020204" pitchFamily="34" charset="-120"/>
+                <a:latin typeface="微软雅黑" pitchFamily="34" charset="0"/>
+                <a:ea typeface="微软雅黑" pitchFamily="34" charset="-122"/>
+                <a:cs typeface="微软雅黑" pitchFamily="34" charset="-120"/>
               </a:rPr>
               <a:t>基础阶段收官总结</a:t>
             </a:r>
@@ -3595,12 +3833,13 @@
             <a:avLst/>
           </a:prstGeom>
           <a:noFill/>
+          <a:ln/>
         </p:spPr>
         <p:txBody>
           <a:bodyPr wrap="square" rtlCol="0" anchor="ctr"/>
           <a:lstStyle/>
           <a:p>
-            <a:pPr marL="0" indent="0" algn="l">
+            <a:pPr algn="l" indent="0" marL="0">
               <a:buNone/>
             </a:pPr>
             <a:r>
@@ -3608,9 +3847,9 @@
                 <a:solidFill>
                   <a:srgbClr val="1F2329"/>
                 </a:solidFill>
-                <a:latin typeface="微软雅黑" panose="020B0503020204020204" pitchFamily="34" charset="-122"/>
-                <a:ea typeface="微软雅黑" panose="020B0503020204020204" pitchFamily="34" charset="-122"/>
-                <a:cs typeface="微软雅黑" panose="020B0503020204020204" pitchFamily="34" charset="-120"/>
+                <a:latin typeface="微软雅黑" pitchFamily="34" charset="0"/>
+                <a:ea typeface="微软雅黑" pitchFamily="34" charset="-122"/>
+                <a:cs typeface="微软雅黑" pitchFamily="34" charset="-120"/>
               </a:rPr>
               <a:t>五节课，你拿到了什么</a:t>
             </a:r>
@@ -3624,11 +3863,17 @@
           <p:cNvGraphicFramePr>
             <a:graphicFrameLocks noGrp="1"/>
           </p:cNvGraphicFramePr>
-          <p:nvPr/>
+          <p:nvPr>
+            <p:extLst>
+              <p:ext uri="{D42A27DB-BD31-4B8C-83A1-F6EECF244321}">
+                <p14:modId xmlns:p14="http://schemas.microsoft.com/office/powerpoint/2010/main" val="1579011935"/>
+              </p:ext>
+            </p:extLst>
+          </p:nvPr>
         </p:nvGraphicFramePr>
         <p:xfrm>
           <a:off x="822960" y="2395728"/>
-          <a:ext cx="10545776" cy="2523744"/>
+          <a:ext cx="10545775" cy="914400"/>
         </p:xfrm>
         <a:graphic>
           <a:graphicData uri="http://schemas.openxmlformats.org/drawingml/2006/table">
@@ -3644,7 +3889,7 @@
                     <a:bodyPr/>
                     <a:lstStyle/>
                     <a:p>
-                      <a:pPr marL="0" indent="0" algn="ctr">
+                      <a:pPr algn="ctr" indent="0" marL="0">
                         <a:buNone/>
                       </a:pPr>
                       <a:r>
@@ -3652,20 +3897,20 @@
                           <a:solidFill>
                             <a:srgbClr val="1F4E9C"/>
                           </a:solidFill>
-                          <a:latin typeface="微软雅黑" panose="020B0503020204020204" pitchFamily="34" charset="-122"/>
-                          <a:ea typeface="微软雅黑" panose="020B0503020204020204" pitchFamily="34" charset="-122"/>
-                          <a:cs typeface="微软雅黑" panose="020B0503020204020204" pitchFamily="34" charset="-120"/>
+                          <a:latin typeface="微软雅黑" pitchFamily="34" charset="0"/>
+                          <a:ea typeface="微软雅黑" pitchFamily="34" charset="-122"/>
+                          <a:cs typeface="微软雅黑" pitchFamily="34" charset="-120"/>
                         </a:rPr>
                         <a:t>节次</a:t>
                       </a:r>
                       <a:endParaRPr lang="en-US" sz="1500" dirty="0">
-                        <a:latin typeface="微软雅黑" panose="020B0503020204020204" pitchFamily="34" charset="-122"/>
-                        <a:ea typeface="微软雅黑" panose="020B0503020204020204" pitchFamily="34" charset="-122"/>
-                        <a:cs typeface="微软雅黑" panose="020B0503020204020204" pitchFamily="34" charset="-122"/>
+                        <a:latin typeface="微软雅黑" charset="0"/>
+                        <a:ea typeface="微软雅黑" charset="0"/>
+                        <a:cs typeface="微软雅黑" charset="0"/>
                       </a:endParaRPr>
                     </a:p>
                   </a:txBody>
-                  <a:tcPr anchor="ctr">
+                  <a:tcPr marL="91440" marR="91440" marT="45720" marB="45720" anchor="ctr">
                     <a:lnL w="9525" cap="flat" cmpd="sng" algn="ctr">
                       <a:solidFill>
                         <a:srgbClr val="D8DBE0"/>
@@ -3712,7 +3957,7 @@
                     <a:bodyPr/>
                     <a:lstStyle/>
                     <a:p>
-                      <a:pPr marL="0" indent="0" algn="ctr">
+                      <a:pPr algn="ctr" indent="0" marL="0">
                         <a:buNone/>
                       </a:pPr>
                       <a:r>
@@ -3720,20 +3965,20 @@
                           <a:solidFill>
                             <a:srgbClr val="1F4E9C"/>
                           </a:solidFill>
-                          <a:latin typeface="微软雅黑" panose="020B0503020204020204" pitchFamily="34" charset="-122"/>
-                          <a:ea typeface="微软雅黑" panose="020B0503020204020204" pitchFamily="34" charset="-122"/>
-                          <a:cs typeface="微软雅黑" panose="020B0503020204020204" pitchFamily="34" charset="-120"/>
+                          <a:latin typeface="微软雅黑" pitchFamily="34" charset="0"/>
+                          <a:ea typeface="微软雅黑" pitchFamily="34" charset="-122"/>
+                          <a:cs typeface="微软雅黑" pitchFamily="34" charset="-120"/>
                         </a:rPr>
                         <a:t>拿到的能力</a:t>
                       </a:r>
                       <a:endParaRPr lang="en-US" sz="1500" dirty="0">
-                        <a:latin typeface="微软雅黑" panose="020B0503020204020204" pitchFamily="34" charset="-122"/>
-                        <a:ea typeface="微软雅黑" panose="020B0503020204020204" pitchFamily="34" charset="-122"/>
-                        <a:cs typeface="微软雅黑" panose="020B0503020204020204" pitchFamily="34" charset="-122"/>
+                        <a:latin typeface="微软雅黑" charset="0"/>
+                        <a:ea typeface="微软雅黑" charset="0"/>
+                        <a:cs typeface="微软雅黑" charset="0"/>
                       </a:endParaRPr>
                     </a:p>
                   </a:txBody>
-                  <a:tcPr anchor="ctr">
+                  <a:tcPr marL="91440" marR="91440" marT="45720" marB="45720" anchor="ctr">
                     <a:lnL w="9525" cap="flat" cmpd="sng" algn="ctr">
                       <a:solidFill>
                         <a:srgbClr val="D8DBE0"/>
@@ -3782,7 +4027,7 @@
                     <a:bodyPr/>
                     <a:lstStyle/>
                     <a:p>
-                      <a:pPr marL="0" indent="0" algn="ctr">
+                      <a:pPr algn="ctr" indent="0" marL="0">
                         <a:buNone/>
                       </a:pPr>
                       <a:r>
@@ -3790,20 +4035,20 @@
                           <a:solidFill>
                             <a:srgbClr val="1F2329"/>
                           </a:solidFill>
-                          <a:latin typeface="微软雅黑" panose="020B0503020204020204" pitchFamily="34" charset="-122"/>
-                          <a:ea typeface="微软雅黑" panose="020B0503020204020204" pitchFamily="34" charset="-122"/>
-                          <a:cs typeface="微软雅黑" panose="020B0503020204020204" pitchFamily="34" charset="-120"/>
+                          <a:latin typeface="微软雅黑" pitchFamily="34" charset="0"/>
+                          <a:ea typeface="微软雅黑" pitchFamily="34" charset="-122"/>
+                          <a:cs typeface="微软雅黑" pitchFamily="34" charset="-120"/>
                         </a:rPr>
                         <a:t>第1节</a:t>
                       </a:r>
                       <a:endParaRPr lang="en-US" sz="1500" dirty="0">
-                        <a:latin typeface="微软雅黑" panose="020B0503020204020204" pitchFamily="34" charset="-122"/>
-                        <a:ea typeface="微软雅黑" panose="020B0503020204020204" pitchFamily="34" charset="-122"/>
-                        <a:cs typeface="微软雅黑" panose="020B0503020204020204" pitchFamily="34" charset="-122"/>
+                        <a:latin typeface="微软雅黑" charset="0"/>
+                        <a:ea typeface="微软雅黑" charset="0"/>
+                        <a:cs typeface="微软雅黑" charset="0"/>
                       </a:endParaRPr>
                     </a:p>
                   </a:txBody>
-                  <a:tcPr anchor="ctr">
+                  <a:tcPr marL="91440" marR="91440" marT="45720" marB="45720" anchor="ctr">
                     <a:lnL w="9525" cap="flat" cmpd="sng" algn="ctr">
                       <a:solidFill>
                         <a:srgbClr val="D8DBE0"/>
@@ -3850,7 +4095,7 @@
                     <a:bodyPr/>
                     <a:lstStyle/>
                     <a:p>
-                      <a:pPr marL="0" indent="0" algn="ctr">
+                      <a:pPr algn="ctr" indent="0" marL="0">
                         <a:buNone/>
                       </a:pPr>
                       <a:r>
@@ -3858,20 +4103,20 @@
                           <a:solidFill>
                             <a:srgbClr val="1F2329"/>
                           </a:solidFill>
-                          <a:latin typeface="微软雅黑" panose="020B0503020204020204" pitchFamily="34" charset="-122"/>
-                          <a:ea typeface="微软雅黑" panose="020B0503020204020204" pitchFamily="34" charset="-122"/>
-                          <a:cs typeface="微软雅黑" panose="020B0503020204020204" pitchFamily="34" charset="-120"/>
+                          <a:latin typeface="微软雅黑" pitchFamily="34" charset="0"/>
+                          <a:ea typeface="微软雅黑" pitchFamily="34" charset="-122"/>
+                          <a:cs typeface="微软雅黑" pitchFamily="34" charset="-120"/>
                         </a:rPr>
                         <a:t>看懂程序骨架：头文件、main、编译运行</a:t>
                       </a:r>
                       <a:endParaRPr lang="en-US" sz="1500" dirty="0">
-                        <a:latin typeface="微软雅黑" panose="020B0503020204020204" pitchFamily="34" charset="-122"/>
-                        <a:ea typeface="微软雅黑" panose="020B0503020204020204" pitchFamily="34" charset="-122"/>
-                        <a:cs typeface="微软雅黑" panose="020B0503020204020204" pitchFamily="34" charset="-122"/>
+                        <a:latin typeface="微软雅黑" charset="0"/>
+                        <a:ea typeface="微软雅黑" charset="0"/>
+                        <a:cs typeface="微软雅黑" charset="0"/>
                       </a:endParaRPr>
                     </a:p>
                   </a:txBody>
-                  <a:tcPr anchor="ctr">
+                  <a:tcPr marL="91440" marR="91440" marT="45720" marB="45720" anchor="ctr">
                     <a:lnL w="9525" cap="flat" cmpd="sng" algn="ctr">
                       <a:solidFill>
                         <a:srgbClr val="D8DBE0"/>
@@ -3920,7 +4165,7 @@
                     <a:bodyPr/>
                     <a:lstStyle/>
                     <a:p>
-                      <a:pPr marL="0" indent="0" algn="ctr">
+                      <a:pPr algn="ctr" indent="0" marL="0">
                         <a:buNone/>
                       </a:pPr>
                       <a:r>
@@ -3928,20 +4173,20 @@
                           <a:solidFill>
                             <a:srgbClr val="1F2329"/>
                           </a:solidFill>
-                          <a:latin typeface="微软雅黑" panose="020B0503020204020204" pitchFamily="34" charset="-122"/>
-                          <a:ea typeface="微软雅黑" panose="020B0503020204020204" pitchFamily="34" charset="-122"/>
-                          <a:cs typeface="微软雅黑" panose="020B0503020204020204" pitchFamily="34" charset="-120"/>
+                          <a:latin typeface="微软雅黑" pitchFamily="34" charset="0"/>
+                          <a:ea typeface="微软雅黑" pitchFamily="34" charset="-122"/>
+                          <a:cs typeface="微软雅黑" pitchFamily="34" charset="-120"/>
                         </a:rPr>
                         <a:t>第2节</a:t>
                       </a:r>
                       <a:endParaRPr lang="en-US" sz="1500" dirty="0">
-                        <a:latin typeface="微软雅黑" panose="020B0503020204020204" pitchFamily="34" charset="-122"/>
-                        <a:ea typeface="微软雅黑" panose="020B0503020204020204" pitchFamily="34" charset="-122"/>
-                        <a:cs typeface="微软雅黑" panose="020B0503020204020204" pitchFamily="34" charset="-122"/>
+                        <a:latin typeface="微软雅黑" charset="0"/>
+                        <a:ea typeface="微软雅黑" charset="0"/>
+                        <a:cs typeface="微软雅黑" charset="0"/>
                       </a:endParaRPr>
                     </a:p>
                   </a:txBody>
-                  <a:tcPr anchor="ctr">
+                  <a:tcPr marL="91440" marR="91440" marT="45720" marB="45720" anchor="ctr">
                     <a:lnL w="9525" cap="flat" cmpd="sng" algn="ctr">
                       <a:solidFill>
                         <a:srgbClr val="D8DBE0"/>
@@ -3988,7 +4233,7 @@
                     <a:bodyPr/>
                     <a:lstStyle/>
                     <a:p>
-                      <a:pPr marL="0" indent="0" algn="ctr">
+                      <a:pPr algn="ctr" indent="0" marL="0">
                         <a:buNone/>
                       </a:pPr>
                       <a:r>
@@ -3996,20 +4241,20 @@
                           <a:solidFill>
                             <a:srgbClr val="1F2329"/>
                           </a:solidFill>
-                          <a:latin typeface="微软雅黑" panose="020B0503020204020204" pitchFamily="34" charset="-122"/>
-                          <a:ea typeface="微软雅黑" panose="020B0503020204020204" pitchFamily="34" charset="-122"/>
-                          <a:cs typeface="微软雅黑" panose="020B0503020204020204" pitchFamily="34" charset="-120"/>
+                          <a:latin typeface="微软雅黑" pitchFamily="34" charset="0"/>
+                          <a:ea typeface="微软雅黑" pitchFamily="34" charset="-122"/>
+                          <a:cs typeface="微软雅黑" pitchFamily="34" charset="-120"/>
                         </a:rPr>
                         <a:t>变量与类型，数据进出程序</a:t>
                       </a:r>
                       <a:endParaRPr lang="en-US" sz="1500" dirty="0">
-                        <a:latin typeface="微软雅黑" panose="020B0503020204020204" pitchFamily="34" charset="-122"/>
-                        <a:ea typeface="微软雅黑" panose="020B0503020204020204" pitchFamily="34" charset="-122"/>
-                        <a:cs typeface="微软雅黑" panose="020B0503020204020204" pitchFamily="34" charset="-122"/>
+                        <a:latin typeface="微软雅黑" charset="0"/>
+                        <a:ea typeface="微软雅黑" charset="0"/>
+                        <a:cs typeface="微软雅黑" charset="0"/>
                       </a:endParaRPr>
                     </a:p>
                   </a:txBody>
-                  <a:tcPr anchor="ctr">
+                  <a:tcPr marL="91440" marR="91440" marT="45720" marB="45720" anchor="ctr">
                     <a:lnL w="9525" cap="flat" cmpd="sng" algn="ctr">
                       <a:solidFill>
                         <a:srgbClr val="D8DBE0"/>
@@ -4058,7 +4303,7 @@
                     <a:bodyPr/>
                     <a:lstStyle/>
                     <a:p>
-                      <a:pPr marL="0" indent="0" algn="ctr">
+                      <a:pPr algn="ctr" indent="0" marL="0">
                         <a:buNone/>
                       </a:pPr>
                       <a:r>
@@ -4066,20 +4311,20 @@
                           <a:solidFill>
                             <a:srgbClr val="1F2329"/>
                           </a:solidFill>
-                          <a:latin typeface="微软雅黑" panose="020B0503020204020204" pitchFamily="34" charset="-122"/>
-                          <a:ea typeface="微软雅黑" panose="020B0503020204020204" pitchFamily="34" charset="-122"/>
-                          <a:cs typeface="微软雅黑" panose="020B0503020204020204" pitchFamily="34" charset="-120"/>
+                          <a:latin typeface="微软雅黑" pitchFamily="34" charset="0"/>
+                          <a:ea typeface="微软雅黑" pitchFamily="34" charset="-122"/>
+                          <a:cs typeface="微软雅黑" pitchFamily="34" charset="-120"/>
                         </a:rPr>
                         <a:t>第3节</a:t>
                       </a:r>
                       <a:endParaRPr lang="en-US" sz="1500" dirty="0">
-                        <a:latin typeface="微软雅黑" panose="020B0503020204020204" pitchFamily="34" charset="-122"/>
-                        <a:ea typeface="微软雅黑" panose="020B0503020204020204" pitchFamily="34" charset="-122"/>
-                        <a:cs typeface="微软雅黑" panose="020B0503020204020204" pitchFamily="34" charset="-122"/>
+                        <a:latin typeface="微软雅黑" charset="0"/>
+                        <a:ea typeface="微软雅黑" charset="0"/>
+                        <a:cs typeface="微软雅黑" charset="0"/>
                       </a:endParaRPr>
                     </a:p>
                   </a:txBody>
-                  <a:tcPr anchor="ctr">
+                  <a:tcPr marL="91440" marR="91440" marT="45720" marB="45720" anchor="ctr">
                     <a:lnL w="9525" cap="flat" cmpd="sng" algn="ctr">
                       <a:solidFill>
                         <a:srgbClr val="D8DBE0"/>
@@ -4126,7 +4371,7 @@
                     <a:bodyPr/>
                     <a:lstStyle/>
                     <a:p>
-                      <a:pPr marL="0" indent="0" algn="ctr">
+                      <a:pPr algn="ctr" indent="0" marL="0">
                         <a:buNone/>
                       </a:pPr>
                       <a:r>
@@ -4134,20 +4379,20 @@
                           <a:solidFill>
                             <a:srgbClr val="1F2329"/>
                           </a:solidFill>
-                          <a:latin typeface="微软雅黑" panose="020B0503020204020204" pitchFamily="34" charset="-122"/>
-                          <a:ea typeface="微软雅黑" panose="020B0503020204020204" pitchFamily="34" charset="-122"/>
-                          <a:cs typeface="微软雅黑" panose="020B0503020204020204" pitchFamily="34" charset="-120"/>
+                          <a:latin typeface="微软雅黑" pitchFamily="34" charset="0"/>
+                          <a:ea typeface="微软雅黑" pitchFamily="34" charset="-122"/>
+                          <a:cs typeface="微软雅黑" pitchFamily="34" charset="-120"/>
                         </a:rPr>
                         <a:t>五类运算符，让程序会算</a:t>
                       </a:r>
                       <a:endParaRPr lang="en-US" sz="1500" dirty="0">
-                        <a:latin typeface="微软雅黑" panose="020B0503020204020204" pitchFamily="34" charset="-122"/>
-                        <a:ea typeface="微软雅黑" panose="020B0503020204020204" pitchFamily="34" charset="-122"/>
-                        <a:cs typeface="微软雅黑" panose="020B0503020204020204" pitchFamily="34" charset="-122"/>
+                        <a:latin typeface="微软雅黑" charset="0"/>
+                        <a:ea typeface="微软雅黑" charset="0"/>
+                        <a:cs typeface="微软雅黑" charset="0"/>
                       </a:endParaRPr>
                     </a:p>
                   </a:txBody>
-                  <a:tcPr anchor="ctr">
+                  <a:tcPr marL="91440" marR="91440" marT="45720" marB="45720" anchor="ctr">
                     <a:lnL w="9525" cap="flat" cmpd="sng" algn="ctr">
                       <a:solidFill>
                         <a:srgbClr val="D8DBE0"/>
@@ -4196,7 +4441,7 @@
                     <a:bodyPr/>
                     <a:lstStyle/>
                     <a:p>
-                      <a:pPr marL="0" indent="0" algn="ctr">
+                      <a:pPr algn="ctr" indent="0" marL="0">
                         <a:buNone/>
                       </a:pPr>
                       <a:r>
@@ -4204,20 +4449,20 @@
                           <a:solidFill>
                             <a:srgbClr val="1F2329"/>
                           </a:solidFill>
-                          <a:latin typeface="微软雅黑" panose="020B0503020204020204" pitchFamily="34" charset="-122"/>
-                          <a:ea typeface="微软雅黑" panose="020B0503020204020204" pitchFamily="34" charset="-122"/>
-                          <a:cs typeface="微软雅黑" panose="020B0503020204020204" pitchFamily="34" charset="-120"/>
+                          <a:latin typeface="微软雅黑" pitchFamily="34" charset="0"/>
+                          <a:ea typeface="微软雅黑" pitchFamily="34" charset="-122"/>
+                          <a:cs typeface="微软雅黑" pitchFamily="34" charset="-120"/>
                         </a:rPr>
                         <a:t>第4节</a:t>
                       </a:r>
                       <a:endParaRPr lang="en-US" sz="1500" dirty="0">
-                        <a:latin typeface="微软雅黑" panose="020B0503020204020204" pitchFamily="34" charset="-122"/>
-                        <a:ea typeface="微软雅黑" panose="020B0503020204020204" pitchFamily="34" charset="-122"/>
-                        <a:cs typeface="微软雅黑" panose="020B0503020204020204" pitchFamily="34" charset="-122"/>
+                        <a:latin typeface="微软雅黑" charset="0"/>
+                        <a:ea typeface="微软雅黑" charset="0"/>
+                        <a:cs typeface="微软雅黑" charset="0"/>
                       </a:endParaRPr>
                     </a:p>
                   </a:txBody>
-                  <a:tcPr anchor="ctr">
+                  <a:tcPr marL="91440" marR="91440" marT="45720" marB="45720" anchor="ctr">
                     <a:lnL w="9525" cap="flat" cmpd="sng" algn="ctr">
                       <a:solidFill>
                         <a:srgbClr val="D8DBE0"/>
@@ -4264,7 +4509,7 @@
                     <a:bodyPr/>
                     <a:lstStyle/>
                     <a:p>
-                      <a:pPr marL="0" indent="0" algn="ctr">
+                      <a:pPr algn="ctr" indent="0" marL="0">
                         <a:buNone/>
                       </a:pPr>
                       <a:r>
@@ -4272,20 +4517,20 @@
                           <a:solidFill>
                             <a:srgbClr val="1F2329"/>
                           </a:solidFill>
-                          <a:latin typeface="微软雅黑" panose="020B0503020204020204" pitchFamily="34" charset="-122"/>
-                          <a:ea typeface="微软雅黑" panose="020B0503020204020204" pitchFamily="34" charset="-122"/>
-                          <a:cs typeface="微软雅黑" panose="020B0503020204020204" pitchFamily="34" charset="-120"/>
+                          <a:latin typeface="微软雅黑" pitchFamily="34" charset="0"/>
+                          <a:ea typeface="微软雅黑" pitchFamily="34" charset="-122"/>
+                          <a:cs typeface="微软雅黑" pitchFamily="34" charset="-120"/>
                         </a:rPr>
                         <a:t>分支与循环，让程序会判断、会重复</a:t>
                       </a:r>
                       <a:endParaRPr lang="en-US" sz="1500" dirty="0">
-                        <a:latin typeface="微软雅黑" panose="020B0503020204020204" pitchFamily="34" charset="-122"/>
-                        <a:ea typeface="微软雅黑" panose="020B0503020204020204" pitchFamily="34" charset="-122"/>
-                        <a:cs typeface="微软雅黑" panose="020B0503020204020204" pitchFamily="34" charset="-122"/>
+                        <a:latin typeface="微软雅黑" charset="0"/>
+                        <a:ea typeface="微软雅黑" charset="0"/>
+                        <a:cs typeface="微软雅黑" charset="0"/>
                       </a:endParaRPr>
                     </a:p>
                   </a:txBody>
-                  <a:tcPr anchor="ctr">
+                  <a:tcPr marL="91440" marR="91440" marT="45720" marB="45720" anchor="ctr">
                     <a:lnL w="9525" cap="flat" cmpd="sng" algn="ctr">
                       <a:solidFill>
                         <a:srgbClr val="D8DBE0"/>
@@ -4334,7 +4579,7 @@
                     <a:bodyPr/>
                     <a:lstStyle/>
                     <a:p>
-                      <a:pPr marL="0" indent="0" algn="ctr">
+                      <a:pPr algn="ctr" indent="0" marL="0">
                         <a:buNone/>
                       </a:pPr>
                       <a:r>
@@ -4342,20 +4587,20 @@
                           <a:solidFill>
                             <a:srgbClr val="1F2329"/>
                           </a:solidFill>
-                          <a:latin typeface="微软雅黑" panose="020B0503020204020204" pitchFamily="34" charset="-122"/>
-                          <a:ea typeface="微软雅黑" panose="020B0503020204020204" pitchFamily="34" charset="-122"/>
-                          <a:cs typeface="微软雅黑" panose="020B0503020204020204" pitchFamily="34" charset="-120"/>
+                          <a:latin typeface="微软雅黑" pitchFamily="34" charset="0"/>
+                          <a:ea typeface="微软雅黑" pitchFamily="34" charset="-122"/>
+                          <a:cs typeface="微软雅黑" pitchFamily="34" charset="-120"/>
                         </a:rPr>
                         <a:t>第5节（本节）</a:t>
                       </a:r>
                       <a:endParaRPr lang="en-US" sz="1500" dirty="0">
-                        <a:latin typeface="微软雅黑" panose="020B0503020204020204" pitchFamily="34" charset="-122"/>
-                        <a:ea typeface="微软雅黑" panose="020B0503020204020204" pitchFamily="34" charset="-122"/>
-                        <a:cs typeface="微软雅黑" panose="020B0503020204020204" pitchFamily="34" charset="-122"/>
+                        <a:latin typeface="微软雅黑" charset="0"/>
+                        <a:ea typeface="微软雅黑" charset="0"/>
+                        <a:cs typeface="微软雅黑" charset="0"/>
                       </a:endParaRPr>
                     </a:p>
                   </a:txBody>
-                  <a:tcPr anchor="ctr">
+                  <a:tcPr marL="91440" marR="91440" marT="45720" marB="45720" anchor="ctr">
                     <a:lnL w="9525" cap="flat" cmpd="sng" algn="ctr">
                       <a:solidFill>
                         <a:srgbClr val="D8DBE0"/>
@@ -4402,7 +4647,7 @@
                     <a:bodyPr/>
                     <a:lstStyle/>
                     <a:p>
-                      <a:pPr marL="0" indent="0" algn="ctr">
+                      <a:pPr algn="ctr" indent="0" marL="0">
                         <a:buNone/>
                       </a:pPr>
                       <a:r>
@@ -4410,20 +4655,20 @@
                           <a:solidFill>
                             <a:srgbClr val="1F2329"/>
                           </a:solidFill>
-                          <a:latin typeface="微软雅黑" panose="020B0503020204020204" pitchFamily="34" charset="-122"/>
-                          <a:ea typeface="微软雅黑" panose="020B0503020204020204" pitchFamily="34" charset="-122"/>
-                          <a:cs typeface="微软雅黑" panose="020B0503020204020204" pitchFamily="34" charset="-120"/>
+                          <a:latin typeface="微软雅黑" pitchFamily="34" charset="0"/>
+                          <a:ea typeface="微软雅黑" pitchFamily="34" charset="-122"/>
+                          <a:cs typeface="微软雅黑" pitchFamily="34" charset="-120"/>
                         </a:rPr>
                         <a:t>函数与数组，代码打包、批量存数据</a:t>
                       </a:r>
                       <a:endParaRPr lang="en-US" sz="1500" dirty="0">
-                        <a:latin typeface="微软雅黑" panose="020B0503020204020204" pitchFamily="34" charset="-122"/>
-                        <a:ea typeface="微软雅黑" panose="020B0503020204020204" pitchFamily="34" charset="-122"/>
-                        <a:cs typeface="微软雅黑" panose="020B0503020204020204" pitchFamily="34" charset="-122"/>
+                        <a:latin typeface="微软雅黑" charset="0"/>
+                        <a:ea typeface="微软雅黑" charset="0"/>
+                        <a:cs typeface="微软雅黑" charset="0"/>
                       </a:endParaRPr>
                     </a:p>
                   </a:txBody>
-                  <a:tcPr anchor="ctr">
+                  <a:tcPr marL="91440" marR="91440" marT="45720" marB="45720" anchor="ctr">
                     <a:lnL w="9525" cap="flat" cmpd="sng" algn="ctr">
                       <a:solidFill>
                         <a:srgbClr val="D8DBE0"/>
@@ -4485,12 +4730,13 @@
             <a:avLst/>
           </a:prstGeom>
           <a:noFill/>
+          <a:ln/>
         </p:spPr>
         <p:txBody>
           <a:bodyPr wrap="square" rtlCol="0" anchor="t"/>
           <a:lstStyle/>
           <a:p>
-            <a:pPr marL="0" indent="0" algn="l">
+            <a:pPr algn="l" indent="0" marL="0">
               <a:buNone/>
             </a:pPr>
             <a:r>
@@ -4501,6 +4747,9 @@
               </a:rPr>
               <a:t>下一步：强化阶段讲</a:t>
             </a:r>
+            <a:pPr algn="l" indent="0" marL="0">
+              <a:buNone/>
+            </a:pPr>
             <a:r>
               <a:rPr lang="en-US" b="1" dirty="0">
                 <a:solidFill>
@@ -4509,6 +4758,9 @@
               </a:rPr>
               <a:t>指针与结构体</a:t>
             </a:r>
+            <a:pPr algn="l" indent="0" marL="0">
+              <a:buNone/>
+            </a:pPr>
             <a:r>
               <a:rPr lang="en-US" dirty="0">
                 <a:solidFill>
@@ -4531,7 +4783,7 @@
 
 <file path=ppt/slides/slide15.xml><?xml version="1.0" encoding="utf-8"?>
 <p:sld xmlns:a="http://schemas.openxmlformats.org/drawingml/2006/main" xmlns:r="http://schemas.openxmlformats.org/officeDocument/2006/relationships" xmlns:p="http://schemas.openxmlformats.org/presentationml/2006/main">
-  <p:cSld>
+  <p:cSld name="Slide 15">
     <p:bg>
       <p:bgPr>
         <a:blipFill dpi="0" rotWithShape="1">
@@ -4575,12 +4827,13 @@
             <a:avLst/>
           </a:prstGeom>
           <a:noFill/>
+          <a:ln/>
         </p:spPr>
         <p:txBody>
           <a:bodyPr wrap="square" rtlCol="0" anchor="ctr"/>
           <a:lstStyle/>
           <a:p>
-            <a:pPr marL="0" indent="0" algn="r">
+            <a:pPr algn="r" indent="0" marL="0">
               <a:buNone/>
             </a:pPr>
             <a:r>
@@ -4588,9 +4841,9 @@
                 <a:solidFill>
                   <a:srgbClr val="8A9099"/>
                 </a:solidFill>
-                <a:latin typeface="微软雅黑" panose="020B0503020204020204" pitchFamily="34" charset="-122"/>
-                <a:ea typeface="微软雅黑" panose="020B0503020204020204" pitchFamily="34" charset="-122"/>
-                <a:cs typeface="微软雅黑" panose="020B0503020204020204" pitchFamily="34" charset="-120"/>
+                <a:latin typeface="微软雅黑" pitchFamily="34" charset="0"/>
+                <a:ea typeface="微软雅黑" pitchFamily="34" charset="-122"/>
+                <a:cs typeface="微软雅黑" pitchFamily="34" charset="-120"/>
               </a:rPr>
               <a:t>15 / 15</a:t>
             </a:r>
@@ -4613,12 +4866,13 @@
             <a:avLst/>
           </a:prstGeom>
           <a:noFill/>
+          <a:ln/>
         </p:spPr>
         <p:txBody>
           <a:bodyPr wrap="square" rtlCol="0" anchor="ctr"/>
           <a:lstStyle/>
           <a:p>
-            <a:pPr marL="0" indent="0" algn="l">
+            <a:pPr algn="l" indent="0" marL="0">
               <a:buNone/>
             </a:pPr>
             <a:r>
@@ -4626,9 +4880,9 @@
                 <a:solidFill>
                   <a:srgbClr val="1F4E9C"/>
                 </a:solidFill>
-                <a:latin typeface="微软雅黑" panose="020B0503020204020204" pitchFamily="34" charset="-122"/>
-                <a:ea typeface="微软雅黑" panose="020B0503020204020204" pitchFamily="34" charset="-122"/>
-                <a:cs typeface="微软雅黑" panose="020B0503020204020204" pitchFamily="34" charset="-120"/>
+                <a:latin typeface="微软雅黑" pitchFamily="34" charset="0"/>
+                <a:ea typeface="微软雅黑" pitchFamily="34" charset="-122"/>
+                <a:cs typeface="微软雅黑" pitchFamily="34" charset="-120"/>
               </a:rPr>
               <a:t>课后任务</a:t>
             </a:r>
@@ -4651,12 +4905,13 @@
             <a:avLst/>
           </a:prstGeom>
           <a:noFill/>
+          <a:ln/>
         </p:spPr>
         <p:txBody>
           <a:bodyPr wrap="square" rtlCol="0" anchor="ctr"/>
           <a:lstStyle/>
           <a:p>
-            <a:pPr marL="0" indent="0" algn="l">
+            <a:pPr algn="l" indent="0" marL="0">
               <a:buNone/>
             </a:pPr>
             <a:r>
@@ -4664,9 +4919,9 @@
                 <a:solidFill>
                   <a:srgbClr val="1F2329"/>
                 </a:solidFill>
-                <a:latin typeface="微软雅黑" panose="020B0503020204020204" pitchFamily="34" charset="-122"/>
-                <a:ea typeface="微软雅黑" panose="020B0503020204020204" pitchFamily="34" charset="-122"/>
-                <a:cs typeface="微软雅黑" panose="020B0503020204020204" pitchFamily="34" charset="-120"/>
+                <a:latin typeface="微软雅黑" pitchFamily="34" charset="0"/>
+                <a:ea typeface="微软雅黑" pitchFamily="34" charset="-122"/>
+                <a:cs typeface="微软雅黑" pitchFamily="34" charset="-120"/>
               </a:rPr>
               <a:t>1道跟练 ＋ 1道模仿</a:t>
             </a:r>
@@ -4689,12 +4944,13 @@
             <a:avLst/>
           </a:prstGeom>
           <a:noFill/>
+          <a:ln/>
         </p:spPr>
         <p:txBody>
           <a:bodyPr wrap="square" rtlCol="0" anchor="t"/>
           <a:lstStyle/>
           <a:p>
-            <a:pPr marL="0" indent="0" algn="l">
+            <a:pPr algn="l" indent="0" marL="0">
               <a:lnSpc>
                 <a:spcPct val="115000"/>
               </a:lnSpc>
@@ -4705,12 +4961,18 @@
                 <a:solidFill>
                   <a:srgbClr val="1F4E9C"/>
                 </a:solidFill>
-                <a:latin typeface="微软雅黑" panose="020B0503020204020204" pitchFamily="34" charset="-122"/>
-                <a:ea typeface="微软雅黑" panose="020B0503020204020204" pitchFamily="34" charset="-122"/>
-                <a:cs typeface="微软雅黑" panose="020B0503020204020204" pitchFamily="34" charset="-120"/>
+                <a:latin typeface="微软雅黑" pitchFamily="34" charset="0"/>
+                <a:ea typeface="微软雅黑" pitchFamily="34" charset="-122"/>
+                <a:cs typeface="微软雅黑" pitchFamily="34" charset="-120"/>
               </a:rPr>
               <a:t>•  </a:t>
             </a:r>
+            <a:pPr algn="l" indent="0" marL="0">
+              <a:lnSpc>
+                <a:spcPct val="115000"/>
+              </a:lnSpc>
+              <a:buNone/>
+            </a:pPr>
             <a:r>
               <a:rPr lang="en-US" sz="1800" b="1" dirty="0">
                 <a:solidFill>
@@ -4719,6 +4981,12 @@
               </a:rPr>
               <a:t>跟练题</a:t>
             </a:r>
+            <a:pPr algn="l" indent="0" marL="0">
+              <a:lnSpc>
+                <a:spcPct val="115000"/>
+              </a:lnSpc>
+              <a:buNone/>
+            </a:pPr>
             <a:r>
               <a:rPr lang="en-US" sz="1800" dirty="0">
                 <a:solidFill>
@@ -4746,12 +5014,13 @@
             <a:avLst/>
           </a:prstGeom>
           <a:noFill/>
+          <a:ln/>
         </p:spPr>
         <p:txBody>
           <a:bodyPr wrap="square" rtlCol="0" anchor="t"/>
           <a:lstStyle/>
           <a:p>
-            <a:pPr marL="0" indent="0" algn="l">
+            <a:pPr algn="l" indent="0" marL="0">
               <a:lnSpc>
                 <a:spcPct val="115000"/>
               </a:lnSpc>
@@ -4762,12 +5031,18 @@
                 <a:solidFill>
                   <a:srgbClr val="1F4E9C"/>
                 </a:solidFill>
-                <a:latin typeface="微软雅黑" panose="020B0503020204020204" pitchFamily="34" charset="-122"/>
-                <a:ea typeface="微软雅黑" panose="020B0503020204020204" pitchFamily="34" charset="-122"/>
-                <a:cs typeface="微软雅黑" panose="020B0503020204020204" pitchFamily="34" charset="-120"/>
+                <a:latin typeface="微软雅黑" pitchFamily="34" charset="0"/>
+                <a:ea typeface="微软雅黑" pitchFamily="34" charset="-122"/>
+                <a:cs typeface="微软雅黑" pitchFamily="34" charset="-120"/>
               </a:rPr>
               <a:t>•  </a:t>
             </a:r>
+            <a:pPr algn="l" indent="0" marL="0">
+              <a:lnSpc>
+                <a:spcPct val="115000"/>
+              </a:lnSpc>
+              <a:buNone/>
+            </a:pPr>
             <a:r>
               <a:rPr lang="en-US" sz="1800" b="1" dirty="0">
                 <a:solidFill>
@@ -4776,6 +5051,12 @@
               </a:rPr>
               <a:t>模仿题</a:t>
             </a:r>
+            <a:pPr algn="l" indent="0" marL="0">
+              <a:lnSpc>
+                <a:spcPct val="115000"/>
+              </a:lnSpc>
+              <a:buNone/>
+            </a:pPr>
             <a:r>
               <a:rPr lang="en-US" sz="1800" dirty="0">
                 <a:solidFill>
@@ -4803,12 +5084,13 @@
             <a:avLst/>
           </a:prstGeom>
           <a:noFill/>
+          <a:ln/>
         </p:spPr>
         <p:txBody>
           <a:bodyPr wrap="square" rtlCol="0" anchor="t"/>
           <a:lstStyle/>
           <a:p>
-            <a:pPr marL="0" indent="0" algn="l">
+            <a:pPr algn="l" indent="0" marL="0">
               <a:buNone/>
             </a:pPr>
             <a:r>
@@ -4816,9 +5098,9 @@
                 <a:solidFill>
                   <a:srgbClr val="8A9099"/>
                 </a:solidFill>
-                <a:latin typeface="微软雅黑" panose="020B0503020204020204" pitchFamily="34" charset="-122"/>
-                <a:ea typeface="微软雅黑" panose="020B0503020204020204" pitchFamily="34" charset="-122"/>
-                <a:cs typeface="微软雅黑" panose="020B0503020204020204" pitchFamily="34" charset="-120"/>
+                <a:latin typeface="微软雅黑" pitchFamily="34" charset="0"/>
+                <a:ea typeface="微软雅黑" pitchFamily="34" charset="-122"/>
+                <a:cs typeface="微软雅黑" pitchFamily="34" charset="-120"/>
               </a:rPr>
               <a:t>写完对照讲稿附录的参考答案；要求：合上笔记能默写"函数定义四部分"和"数组遍历的for"</a:t>
             </a:r>
@@ -4836,7 +5118,7 @@
 
 <file path=ppt/slides/slide2.xml><?xml version="1.0" encoding="utf-8"?>
 <p:sld xmlns:a="http://schemas.openxmlformats.org/drawingml/2006/main" xmlns:r="http://schemas.openxmlformats.org/officeDocument/2006/relationships" xmlns:p="http://schemas.openxmlformats.org/presentationml/2006/main">
-  <p:cSld>
+  <p:cSld name="Slide 2">
     <p:bg>
       <p:bgPr>
         <a:blipFill dpi="0" rotWithShape="1">
@@ -4880,12 +5162,13 @@
             <a:avLst/>
           </a:prstGeom>
           <a:noFill/>
+          <a:ln/>
         </p:spPr>
         <p:txBody>
           <a:bodyPr wrap="square" rtlCol="0" anchor="ctr"/>
           <a:lstStyle/>
           <a:p>
-            <a:pPr marL="0" indent="0" algn="r">
+            <a:pPr algn="r" indent="0" marL="0">
               <a:buNone/>
             </a:pPr>
             <a:r>
@@ -4893,9 +5176,9 @@
                 <a:solidFill>
                   <a:srgbClr val="8A9099"/>
                 </a:solidFill>
-                <a:latin typeface="微软雅黑" panose="020B0503020204020204" pitchFamily="34" charset="-122"/>
-                <a:ea typeface="微软雅黑" panose="020B0503020204020204" pitchFamily="34" charset="-122"/>
-                <a:cs typeface="微软雅黑" panose="020B0503020204020204" pitchFamily="34" charset="-120"/>
+                <a:latin typeface="微软雅黑" pitchFamily="34" charset="0"/>
+                <a:ea typeface="微软雅黑" pitchFamily="34" charset="-122"/>
+                <a:cs typeface="微软雅黑" pitchFamily="34" charset="-120"/>
               </a:rPr>
               <a:t>2 / 15</a:t>
             </a:r>
@@ -4945,12 +5228,13 @@
             <a:avLst/>
           </a:prstGeom>
           <a:noFill/>
+          <a:ln/>
         </p:spPr>
         <p:txBody>
           <a:bodyPr wrap="square" rtlCol="0" anchor="ctr"/>
           <a:lstStyle/>
           <a:p>
-            <a:pPr marL="0" indent="0" algn="ctr">
+            <a:pPr algn="ctr" indent="0" marL="0">
               <a:buNone/>
             </a:pPr>
             <a:r>
@@ -4958,9 +5242,9 @@
                 <a:solidFill>
                   <a:srgbClr val="C0392B"/>
                 </a:solidFill>
-                <a:latin typeface="微软雅黑" panose="020B0503020204020204" pitchFamily="34" charset="-122"/>
-                <a:ea typeface="微软雅黑" panose="020B0503020204020204" pitchFamily="34" charset="-122"/>
-                <a:cs typeface="微软雅黑" panose="020B0503020204020204" pitchFamily="34" charset="-120"/>
+                <a:latin typeface="微软雅黑" pitchFamily="34" charset="0"/>
+                <a:ea typeface="微软雅黑" pitchFamily="34" charset="-122"/>
+                <a:cs typeface="微软雅黑" pitchFamily="34" charset="-120"/>
               </a:rPr>
               <a:t>第5节 · 基础阶段收官</a:t>
             </a:r>
@@ -4983,12 +5267,13 @@
             <a:avLst/>
           </a:prstGeom>
           <a:noFill/>
+          <a:ln/>
         </p:spPr>
         <p:txBody>
           <a:bodyPr wrap="square" rtlCol="0" anchor="ctr"/>
           <a:lstStyle/>
           <a:p>
-            <a:pPr marL="0" indent="0" algn="l">
+            <a:pPr algn="l" indent="0" marL="0">
               <a:buNone/>
             </a:pPr>
             <a:r>
@@ -4996,9 +5281,9 @@
                 <a:solidFill>
                   <a:srgbClr val="1F4E9C"/>
                 </a:solidFill>
-                <a:latin typeface="微软雅黑" panose="020B0503020204020204" pitchFamily="34" charset="-122"/>
-                <a:ea typeface="微软雅黑" panose="020B0503020204020204" pitchFamily="34" charset="-122"/>
-                <a:cs typeface="微软雅黑" panose="020B0503020204020204" pitchFamily="34" charset="-120"/>
+                <a:latin typeface="微软雅黑" pitchFamily="34" charset="0"/>
+                <a:ea typeface="微软雅黑" pitchFamily="34" charset="-122"/>
+                <a:cs typeface="微软雅黑" pitchFamily="34" charset="-120"/>
               </a:rPr>
               <a:t>先看一个问题</a:t>
             </a:r>
@@ -5021,12 +5306,13 @@
             <a:avLst/>
           </a:prstGeom>
           <a:noFill/>
+          <a:ln/>
         </p:spPr>
         <p:txBody>
           <a:bodyPr wrap="square" rtlCol="0" anchor="ctr"/>
           <a:lstStyle/>
           <a:p>
-            <a:pPr marL="0" indent="0" algn="l">
+            <a:pPr algn="l" indent="0" marL="0">
               <a:buNone/>
             </a:pPr>
             <a:r>
@@ -5034,9 +5320,9 @@
                 <a:solidFill>
                   <a:srgbClr val="1F2329"/>
                 </a:solidFill>
-                <a:latin typeface="微软雅黑" panose="020B0503020204020204" pitchFamily="34" charset="-122"/>
-                <a:ea typeface="微软雅黑" panose="020B0503020204020204" pitchFamily="34" charset="-122"/>
-                <a:cs typeface="微软雅黑" panose="020B0503020204020204" pitchFamily="34" charset="-120"/>
+                <a:latin typeface="微软雅黑" pitchFamily="34" charset="0"/>
+                <a:ea typeface="微软雅黑" pitchFamily="34" charset="-122"/>
+                <a:cs typeface="微软雅黑" pitchFamily="34" charset="-120"/>
               </a:rPr>
               <a:t>代码越写越长，怎么管</a:t>
             </a:r>
@@ -5059,12 +5345,13 @@
             <a:avLst/>
           </a:prstGeom>
           <a:noFill/>
+          <a:ln/>
         </p:spPr>
         <p:txBody>
           <a:bodyPr wrap="square" rtlCol="0" anchor="t"/>
           <a:lstStyle/>
           <a:p>
-            <a:pPr marL="0" indent="0" algn="l">
+            <a:pPr algn="l" indent="0" marL="0">
               <a:lnSpc>
                 <a:spcPct val="115000"/>
               </a:lnSpc>
@@ -5075,12 +5362,18 @@
                 <a:solidFill>
                   <a:srgbClr val="1F4E9C"/>
                 </a:solidFill>
-                <a:latin typeface="微软雅黑" panose="020B0503020204020204" pitchFamily="34" charset="-122"/>
-                <a:ea typeface="微软雅黑" panose="020B0503020204020204" pitchFamily="34" charset="-122"/>
-                <a:cs typeface="微软雅黑" panose="020B0503020204020204" pitchFamily="34" charset="-120"/>
+                <a:latin typeface="微软雅黑" pitchFamily="34" charset="0"/>
+                <a:ea typeface="微软雅黑" pitchFamily="34" charset="-122"/>
+                <a:cs typeface="微软雅黑" pitchFamily="34" charset="-120"/>
               </a:rPr>
               <a:t>•  </a:t>
             </a:r>
+            <a:pPr algn="l" indent="0" marL="0">
+              <a:lnSpc>
+                <a:spcPct val="115000"/>
+              </a:lnSpc>
+              <a:buNone/>
+            </a:pPr>
             <a:r>
               <a:rPr lang="en-US" sz="1800" dirty="0">
                 <a:solidFill>
@@ -5108,12 +5401,13 @@
             <a:avLst/>
           </a:prstGeom>
           <a:noFill/>
+          <a:ln/>
         </p:spPr>
         <p:txBody>
           <a:bodyPr wrap="square" rtlCol="0" anchor="t"/>
           <a:lstStyle/>
           <a:p>
-            <a:pPr marL="0" indent="0" algn="l">
+            <a:pPr algn="l" indent="0" marL="0">
               <a:lnSpc>
                 <a:spcPct val="115000"/>
               </a:lnSpc>
@@ -5124,12 +5418,18 @@
                 <a:solidFill>
                   <a:srgbClr val="1F4E9C"/>
                 </a:solidFill>
-                <a:latin typeface="微软雅黑" panose="020B0503020204020204" pitchFamily="34" charset="-122"/>
-                <a:ea typeface="微软雅黑" panose="020B0503020204020204" pitchFamily="34" charset="-122"/>
-                <a:cs typeface="微软雅黑" panose="020B0503020204020204" pitchFamily="34" charset="-120"/>
+                <a:latin typeface="微软雅黑" pitchFamily="34" charset="0"/>
+                <a:ea typeface="微软雅黑" pitchFamily="34" charset="-122"/>
+                <a:cs typeface="微软雅黑" pitchFamily="34" charset="-120"/>
               </a:rPr>
               <a:t>•  </a:t>
             </a:r>
+            <a:pPr algn="l" indent="0" marL="0">
+              <a:lnSpc>
+                <a:spcPct val="115000"/>
+              </a:lnSpc>
+              <a:buNone/>
+            </a:pPr>
             <a:r>
               <a:rPr lang="en-US" sz="1800" dirty="0">
                 <a:solidFill>
@@ -5138,6 +5438,12 @@
               </a:rPr>
               <a:t>802的算法全是</a:t>
             </a:r>
+            <a:pPr algn="l" indent="0" marL="0">
+              <a:lnSpc>
+                <a:spcPct val="115000"/>
+              </a:lnSpc>
+              <a:buNone/>
+            </a:pPr>
             <a:r>
               <a:rPr lang="en-US" sz="1800" b="1" dirty="0">
                 <a:solidFill>
@@ -5146,6 +5452,12 @@
               </a:rPr>
               <a:t>一个个函数</a:t>
             </a:r>
+            <a:pPr algn="l" indent="0" marL="0">
+              <a:lnSpc>
+                <a:spcPct val="115000"/>
+              </a:lnSpc>
+              <a:buNone/>
+            </a:pPr>
             <a:r>
               <a:rPr lang="en-US" sz="1800" dirty="0">
                 <a:solidFill>
@@ -5173,12 +5485,13 @@
             <a:avLst/>
           </a:prstGeom>
           <a:noFill/>
+          <a:ln/>
         </p:spPr>
         <p:txBody>
           <a:bodyPr wrap="square" rtlCol="0" anchor="t"/>
           <a:lstStyle/>
           <a:p>
-            <a:pPr marL="0" indent="0" algn="l">
+            <a:pPr algn="l" indent="0" marL="0">
               <a:lnSpc>
                 <a:spcPct val="115000"/>
               </a:lnSpc>
@@ -5189,12 +5502,18 @@
                 <a:solidFill>
                   <a:srgbClr val="1F4E9C"/>
                 </a:solidFill>
-                <a:latin typeface="微软雅黑" panose="020B0503020204020204" pitchFamily="34" charset="-122"/>
-                <a:ea typeface="微软雅黑" panose="020B0503020204020204" pitchFamily="34" charset="-122"/>
-                <a:cs typeface="微软雅黑" panose="020B0503020204020204" pitchFamily="34" charset="-120"/>
+                <a:latin typeface="微软雅黑" pitchFamily="34" charset="0"/>
+                <a:ea typeface="微软雅黑" pitchFamily="34" charset="-122"/>
+                <a:cs typeface="微软雅黑" pitchFamily="34" charset="-120"/>
               </a:rPr>
               <a:t>•  </a:t>
             </a:r>
+            <a:pPr algn="l" indent="0" marL="0">
+              <a:lnSpc>
+                <a:spcPct val="115000"/>
+              </a:lnSpc>
+              <a:buNone/>
+            </a:pPr>
             <a:r>
               <a:rPr lang="en-US" sz="1800" dirty="0">
                 <a:solidFill>
@@ -5203,6 +5522,12 @@
               </a:rPr>
               <a:t>本节目标：学完你能</a:t>
             </a:r>
+            <a:pPr algn="l" indent="0" marL="0">
+              <a:lnSpc>
+                <a:spcPct val="115000"/>
+              </a:lnSpc>
+              <a:buNone/>
+            </a:pPr>
             <a:r>
               <a:rPr lang="en-US" sz="1800" b="1" dirty="0">
                 <a:solidFill>
@@ -5230,12 +5555,13 @@
             <a:avLst/>
           </a:prstGeom>
           <a:noFill/>
+          <a:ln/>
         </p:spPr>
         <p:txBody>
           <a:bodyPr wrap="square" rtlCol="0" anchor="t"/>
           <a:lstStyle/>
           <a:p>
-            <a:pPr marL="0" indent="0" algn="l">
+            <a:pPr algn="l" indent="0" marL="0">
               <a:lnSpc>
                 <a:spcPct val="115000"/>
               </a:lnSpc>
@@ -5246,105 +5572,27 @@
                 <a:solidFill>
                   <a:srgbClr val="1F4E9C"/>
                 </a:solidFill>
-                <a:latin typeface="微软雅黑" panose="020B0503020204020204" pitchFamily="34" charset="-122"/>
-                <a:ea typeface="微软雅黑" panose="020B0503020204020204" pitchFamily="34" charset="-122"/>
-                <a:cs typeface="微软雅黑" panose="020B0503020204020204" pitchFamily="34" charset="-120"/>
+                <a:latin typeface="微软雅黑" pitchFamily="34" charset="0"/>
+                <a:ea typeface="微软雅黑" pitchFamily="34" charset="-122"/>
+                <a:cs typeface="微软雅黑" pitchFamily="34" charset="-120"/>
               </a:rPr>
               <a:t>•  </a:t>
             </a:r>
-            <a:r>
-              <a:rPr lang="zh-CN" altLang="en-US" sz="1800" dirty="0">
+            <a:pPr algn="l" indent="0" marL="0">
+              <a:lnSpc>
+                <a:spcPct val="115000"/>
+              </a:lnSpc>
+              <a:buNone/>
+            </a:pPr>
+            <a:r>
+              <a:rPr lang="en-US" sz="1800" dirty="0">
                 <a:solidFill>
                   <a:srgbClr val="000000"/>
                 </a:solidFill>
               </a:rPr>
-              <a:t>(约瑟夫环)有</a:t>
-            </a:r>
-            <a:r>
-              <a:rPr lang="en-US" altLang="zh-CN" sz="1800" dirty="0">
-                <a:solidFill>
-                  <a:srgbClr val="000000"/>
-                </a:solidFill>
-              </a:rPr>
-              <a:t>n</a:t>
-            </a:r>
-            <a:r>
-              <a:rPr lang="zh-CN" altLang="en-US" sz="1800" dirty="0">
-                <a:solidFill>
-                  <a:srgbClr val="000000"/>
-                </a:solidFill>
-              </a:rPr>
-              <a:t>个人围成一个圈，他们的编号为1~</a:t>
-            </a:r>
-            <a:r>
-              <a:rPr lang="en-US" altLang="zh-CN" sz="1800" dirty="0">
-                <a:solidFill>
-                  <a:srgbClr val="000000"/>
-                </a:solidFill>
-              </a:rPr>
-              <a:t>n。</a:t>
-            </a:r>
-            <a:r>
-              <a:rPr lang="zh-CN" altLang="en-US" sz="1800" dirty="0">
-                <a:solidFill>
-                  <a:srgbClr val="000000"/>
-                </a:solidFill>
-              </a:rPr>
-              <a:t>现在要求从第</a:t>
-            </a:r>
-            <a:r>
-              <a:rPr lang="en-US" altLang="zh-CN" sz="1800" dirty="0">
-                <a:solidFill>
-                  <a:srgbClr val="000000"/>
-                </a:solidFill>
-              </a:rPr>
-              <a:t>s</a:t>
-            </a:r>
-            <a:r>
-              <a:rPr lang="zh-CN" altLang="en-US" sz="1800" dirty="0">
-                <a:solidFill>
-                  <a:srgbClr val="000000"/>
-                </a:solidFill>
-              </a:rPr>
-              <a:t>个人开始报数，数到</a:t>
-            </a:r>
-            <a:r>
-              <a:rPr lang="en-US" altLang="zh-CN" sz="1800" dirty="0">
-                <a:solidFill>
-                  <a:srgbClr val="000000"/>
-                </a:solidFill>
-              </a:rPr>
-              <a:t>m</a:t>
-            </a:r>
-            <a:r>
-              <a:rPr lang="zh-CN" altLang="en-US" sz="1800" dirty="0">
-                <a:solidFill>
-                  <a:srgbClr val="000000"/>
-                </a:solidFill>
-              </a:rPr>
-              <a:t>的人出列，出列后的下一个人继续从1开始报数，同样数到</a:t>
-            </a:r>
-            <a:r>
-              <a:rPr lang="en-US" altLang="zh-CN" sz="1800" dirty="0">
-                <a:solidFill>
-                  <a:srgbClr val="000000"/>
-                </a:solidFill>
-              </a:rPr>
-              <a:t>m</a:t>
-            </a:r>
-            <a:r>
-              <a:rPr lang="zh-CN" altLang="en-US" sz="1800" dirty="0">
-                <a:solidFill>
-                  <a:srgbClr val="000000"/>
-                </a:solidFill>
-              </a:rPr>
-              <a:t>的人出列，一直重复此过程，直到圈中只剩下最后一个人，返回其编号。（8分）</a:t>
-            </a:r>
-            <a:endParaRPr lang="zh-CN" altLang="en-US" sz="1800" dirty="0">
-              <a:solidFill>
-                <a:srgbClr val="000000"/>
-              </a:solidFill>
-            </a:endParaRPr>
+              <a:t>这是基础阶段最后一节，学完就进强化阶段</a:t>
+            </a:r>
+            <a:endParaRPr lang="en-US" sz="1800" dirty="0"/>
           </a:p>
         </p:txBody>
       </p:sp>
@@ -5358,7 +5606,7 @@
 
 <file path=ppt/slides/slide3.xml><?xml version="1.0" encoding="utf-8"?>
 <p:sld xmlns:a="http://schemas.openxmlformats.org/drawingml/2006/main" xmlns:r="http://schemas.openxmlformats.org/officeDocument/2006/relationships" xmlns:p="http://schemas.openxmlformats.org/presentationml/2006/main">
-  <p:cSld>
+  <p:cSld name="Slide 3">
     <p:bg>
       <p:bgPr>
         <a:blipFill dpi="0" rotWithShape="1">
@@ -5402,12 +5650,13 @@
             <a:avLst/>
           </a:prstGeom>
           <a:noFill/>
+          <a:ln/>
         </p:spPr>
         <p:txBody>
           <a:bodyPr wrap="square" rtlCol="0" anchor="ctr"/>
           <a:lstStyle/>
           <a:p>
-            <a:pPr marL="0" indent="0" algn="r">
+            <a:pPr algn="r" indent="0" marL="0">
               <a:buNone/>
             </a:pPr>
             <a:r>
@@ -5415,9 +5664,9 @@
                 <a:solidFill>
                   <a:srgbClr val="8A9099"/>
                 </a:solidFill>
-                <a:latin typeface="微软雅黑" panose="020B0503020204020204" pitchFamily="34" charset="-122"/>
-                <a:ea typeface="微软雅黑" panose="020B0503020204020204" pitchFamily="34" charset="-122"/>
-                <a:cs typeface="微软雅黑" panose="020B0503020204020204" pitchFamily="34" charset="-120"/>
+                <a:latin typeface="微软雅黑" pitchFamily="34" charset="0"/>
+                <a:ea typeface="微软雅黑" pitchFamily="34" charset="-122"/>
+                <a:cs typeface="微软雅黑" pitchFamily="34" charset="-120"/>
               </a:rPr>
               <a:t>3 / 15</a:t>
             </a:r>
@@ -5440,12 +5689,13 @@
             <a:avLst/>
           </a:prstGeom>
           <a:noFill/>
+          <a:ln/>
         </p:spPr>
         <p:txBody>
           <a:bodyPr wrap="square" rtlCol="0" anchor="ctr"/>
           <a:lstStyle/>
           <a:p>
-            <a:pPr marL="0" indent="0" algn="l">
+            <a:pPr algn="l" indent="0" marL="0">
               <a:buNone/>
             </a:pPr>
             <a:r>
@@ -5453,9 +5703,9 @@
                 <a:solidFill>
                   <a:srgbClr val="1F4E9C"/>
                 </a:solidFill>
-                <a:latin typeface="微软雅黑" panose="020B0503020204020204" pitchFamily="34" charset="-122"/>
-                <a:ea typeface="微软雅黑" panose="020B0503020204020204" pitchFamily="34" charset="-122"/>
-                <a:cs typeface="微软雅黑" panose="020B0503020204020204" pitchFamily="34" charset="-120"/>
+                <a:latin typeface="微软雅黑" pitchFamily="34" charset="0"/>
+                <a:ea typeface="微软雅黑" pitchFamily="34" charset="-122"/>
+                <a:cs typeface="微软雅黑" pitchFamily="34" charset="-120"/>
               </a:rPr>
               <a:t>函数是什么</a:t>
             </a:r>
@@ -5478,12 +5728,13 @@
             <a:avLst/>
           </a:prstGeom>
           <a:noFill/>
+          <a:ln/>
         </p:spPr>
         <p:txBody>
           <a:bodyPr wrap="square" rtlCol="0" anchor="ctr"/>
           <a:lstStyle/>
           <a:p>
-            <a:pPr marL="0" indent="0" algn="l">
+            <a:pPr algn="l" indent="0" marL="0">
               <a:buNone/>
             </a:pPr>
             <a:r>
@@ -5491,9 +5742,9 @@
                 <a:solidFill>
                   <a:srgbClr val="1F2329"/>
                 </a:solidFill>
-                <a:latin typeface="微软雅黑" panose="020B0503020204020204" pitchFamily="34" charset="-122"/>
-                <a:ea typeface="微软雅黑" panose="020B0503020204020204" pitchFamily="34" charset="-122"/>
-                <a:cs typeface="微软雅黑" panose="020B0503020204020204" pitchFamily="34" charset="-120"/>
+                <a:latin typeface="微软雅黑" pitchFamily="34" charset="0"/>
+                <a:ea typeface="微软雅黑" pitchFamily="34" charset="-122"/>
+                <a:cs typeface="微软雅黑" pitchFamily="34" charset="-120"/>
               </a:rPr>
               <a:t>函数 = 打包好的干活步骤</a:t>
             </a:r>
@@ -5503,15 +5754,21 @@
       </p:sp>
       <p:graphicFrame>
         <p:nvGraphicFramePr>
-          <p:cNvPr id="5" name="Table 0"/>
+          <p:cNvPr id="4" name="Table 0"/>
           <p:cNvGraphicFramePr>
             <a:graphicFrameLocks noGrp="1"/>
           </p:cNvGraphicFramePr>
-          <p:nvPr/>
+          <p:nvPr>
+            <p:extLst>
+              <p:ext uri="{D42A27DB-BD31-4B8C-83A1-F6EECF244321}">
+                <p14:modId xmlns:p14="http://schemas.microsoft.com/office/powerpoint/2010/main" val="1579011935"/>
+              </p:ext>
+            </p:extLst>
+          </p:nvPr>
         </p:nvGraphicFramePr>
         <p:xfrm>
           <a:off x="822960" y="2395728"/>
-          <a:ext cx="10545776" cy="2103120"/>
+          <a:ext cx="10545775" cy="914400"/>
         </p:xfrm>
         <a:graphic>
           <a:graphicData uri="http://schemas.openxmlformats.org/drawingml/2006/table">
@@ -5527,7 +5784,7 @@
                     <a:bodyPr/>
                     <a:lstStyle/>
                     <a:p>
-                      <a:pPr marL="0" indent="0" algn="ctr">
+                      <a:pPr algn="ctr" indent="0" marL="0">
                         <a:buNone/>
                       </a:pPr>
                       <a:r>
@@ -5535,20 +5792,20 @@
                           <a:solidFill>
                             <a:srgbClr val="1F4E9C"/>
                           </a:solidFill>
-                          <a:latin typeface="微软雅黑" panose="020B0503020204020204" pitchFamily="34" charset="-122"/>
-                          <a:ea typeface="微软雅黑" panose="020B0503020204020204" pitchFamily="34" charset="-122"/>
-                          <a:cs typeface="微软雅黑" panose="020B0503020204020204" pitchFamily="34" charset="-120"/>
+                          <a:latin typeface="微软雅黑" pitchFamily="34" charset="0"/>
+                          <a:ea typeface="微软雅黑" pitchFamily="34" charset="-122"/>
+                          <a:cs typeface="微软雅黑" pitchFamily="34" charset="-120"/>
                         </a:rPr>
                         <a:t>做菜类比</a:t>
                       </a:r>
                       <a:endParaRPr lang="en-US" sz="1500" dirty="0">
-                        <a:latin typeface="微软雅黑" panose="020B0503020204020204" pitchFamily="34" charset="-122"/>
-                        <a:ea typeface="微软雅黑" panose="020B0503020204020204" pitchFamily="34" charset="-122"/>
-                        <a:cs typeface="微软雅黑" panose="020B0503020204020204" pitchFamily="34" charset="-122"/>
+                        <a:latin typeface="微软雅黑" charset="0"/>
+                        <a:ea typeface="微软雅黑" charset="0"/>
+                        <a:cs typeface="微软雅黑" charset="0"/>
                       </a:endParaRPr>
                     </a:p>
                   </a:txBody>
-                  <a:tcPr anchor="ctr">
+                  <a:tcPr marL="91440" marR="91440" marT="45720" marB="45720" anchor="ctr">
                     <a:lnL w="9525" cap="flat" cmpd="sng" algn="ctr">
                       <a:solidFill>
                         <a:srgbClr val="D8DBE0"/>
@@ -5595,7 +5852,7 @@
                     <a:bodyPr/>
                     <a:lstStyle/>
                     <a:p>
-                      <a:pPr marL="0" indent="0" algn="ctr">
+                      <a:pPr algn="ctr" indent="0" marL="0">
                         <a:buNone/>
                       </a:pPr>
                       <a:r>
@@ -5603,20 +5860,20 @@
                           <a:solidFill>
                             <a:srgbClr val="1F4E9C"/>
                           </a:solidFill>
-                          <a:latin typeface="微软雅黑" panose="020B0503020204020204" pitchFamily="34" charset="-122"/>
-                          <a:ea typeface="微软雅黑" panose="020B0503020204020204" pitchFamily="34" charset="-122"/>
-                          <a:cs typeface="微软雅黑" panose="020B0503020204020204" pitchFamily="34" charset="-120"/>
+                          <a:latin typeface="微软雅黑" pitchFamily="34" charset="0"/>
+                          <a:ea typeface="微软雅黑" pitchFamily="34" charset="-122"/>
+                          <a:cs typeface="微软雅黑" pitchFamily="34" charset="-120"/>
                         </a:rPr>
                         <a:t>函数对应</a:t>
                       </a:r>
                       <a:endParaRPr lang="en-US" sz="1500" dirty="0">
-                        <a:latin typeface="微软雅黑" panose="020B0503020204020204" pitchFamily="34" charset="-122"/>
-                        <a:ea typeface="微软雅黑" panose="020B0503020204020204" pitchFamily="34" charset="-122"/>
-                        <a:cs typeface="微软雅黑" panose="020B0503020204020204" pitchFamily="34" charset="-122"/>
+                        <a:latin typeface="微软雅黑" charset="0"/>
+                        <a:ea typeface="微软雅黑" charset="0"/>
+                        <a:cs typeface="微软雅黑" charset="0"/>
                       </a:endParaRPr>
                     </a:p>
                   </a:txBody>
-                  <a:tcPr anchor="ctr">
+                  <a:tcPr marL="91440" marR="91440" marT="45720" marB="45720" anchor="ctr">
                     <a:lnL w="9525" cap="flat" cmpd="sng" algn="ctr">
                       <a:solidFill>
                         <a:srgbClr val="D8DBE0"/>
@@ -5665,7 +5922,7 @@
                     <a:bodyPr/>
                     <a:lstStyle/>
                     <a:p>
-                      <a:pPr marL="0" indent="0" algn="ctr">
+                      <a:pPr algn="ctr" indent="0" marL="0">
                         <a:buNone/>
                       </a:pPr>
                       <a:r>
@@ -5673,20 +5930,20 @@
                           <a:solidFill>
                             <a:srgbClr val="1F2329"/>
                           </a:solidFill>
-                          <a:latin typeface="微软雅黑" panose="020B0503020204020204" pitchFamily="34" charset="-122"/>
-                          <a:ea typeface="微软雅黑" panose="020B0503020204020204" pitchFamily="34" charset="-122"/>
-                          <a:cs typeface="微软雅黑" panose="020B0503020204020204" pitchFamily="34" charset="-120"/>
+                          <a:latin typeface="微软雅黑" pitchFamily="34" charset="0"/>
+                          <a:ea typeface="微软雅黑" pitchFamily="34" charset="-122"/>
+                          <a:cs typeface="微软雅黑" pitchFamily="34" charset="-120"/>
                         </a:rPr>
                         <a:t>菜谱名字</a:t>
                       </a:r>
                       <a:endParaRPr lang="en-US" sz="1500" dirty="0">
-                        <a:latin typeface="微软雅黑" panose="020B0503020204020204" pitchFamily="34" charset="-122"/>
-                        <a:ea typeface="微软雅黑" panose="020B0503020204020204" pitchFamily="34" charset="-122"/>
-                        <a:cs typeface="微软雅黑" panose="020B0503020204020204" pitchFamily="34" charset="-122"/>
+                        <a:latin typeface="微软雅黑" charset="0"/>
+                        <a:ea typeface="微软雅黑" charset="0"/>
+                        <a:cs typeface="微软雅黑" charset="0"/>
                       </a:endParaRPr>
                     </a:p>
                   </a:txBody>
-                  <a:tcPr anchor="ctr">
+                  <a:tcPr marL="91440" marR="91440" marT="45720" marB="45720" anchor="ctr">
                     <a:lnL w="9525" cap="flat" cmpd="sng" algn="ctr">
                       <a:solidFill>
                         <a:srgbClr val="D8DBE0"/>
@@ -5733,7 +5990,7 @@
                     <a:bodyPr/>
                     <a:lstStyle/>
                     <a:p>
-                      <a:pPr marL="0" indent="0" algn="ctr">
+                      <a:pPr algn="ctr" indent="0" marL="0">
                         <a:buNone/>
                       </a:pPr>
                       <a:r>
@@ -5741,20 +5998,20 @@
                           <a:solidFill>
                             <a:srgbClr val="1F2329"/>
                           </a:solidFill>
-                          <a:latin typeface="微软雅黑" panose="020B0503020204020204" pitchFamily="34" charset="-122"/>
-                          <a:ea typeface="微软雅黑" panose="020B0503020204020204" pitchFamily="34" charset="-122"/>
-                          <a:cs typeface="微软雅黑" panose="020B0503020204020204" pitchFamily="34" charset="-120"/>
+                          <a:latin typeface="微软雅黑" pitchFamily="34" charset="0"/>
+                          <a:ea typeface="微软雅黑" pitchFamily="34" charset="-122"/>
+                          <a:cs typeface="微软雅黑" pitchFamily="34" charset="-120"/>
                         </a:rPr>
                         <a:t>函数名</a:t>
                       </a:r>
                       <a:endParaRPr lang="en-US" sz="1500" dirty="0">
-                        <a:latin typeface="微软雅黑" panose="020B0503020204020204" pitchFamily="34" charset="-122"/>
-                        <a:ea typeface="微软雅黑" panose="020B0503020204020204" pitchFamily="34" charset="-122"/>
-                        <a:cs typeface="微软雅黑" panose="020B0503020204020204" pitchFamily="34" charset="-122"/>
+                        <a:latin typeface="微软雅黑" charset="0"/>
+                        <a:ea typeface="微软雅黑" charset="0"/>
+                        <a:cs typeface="微软雅黑" charset="0"/>
                       </a:endParaRPr>
                     </a:p>
                   </a:txBody>
-                  <a:tcPr anchor="ctr">
+                  <a:tcPr marL="91440" marR="91440" marT="45720" marB="45720" anchor="ctr">
                     <a:lnL w="9525" cap="flat" cmpd="sng" algn="ctr">
                       <a:solidFill>
                         <a:srgbClr val="D8DBE0"/>
@@ -5803,7 +6060,7 @@
                     <a:bodyPr/>
                     <a:lstStyle/>
                     <a:p>
-                      <a:pPr marL="0" indent="0" algn="ctr">
+                      <a:pPr algn="ctr" indent="0" marL="0">
                         <a:buNone/>
                       </a:pPr>
                       <a:r>
@@ -5811,20 +6068,20 @@
                           <a:solidFill>
                             <a:srgbClr val="1F2329"/>
                           </a:solidFill>
-                          <a:latin typeface="微软雅黑" panose="020B0503020204020204" pitchFamily="34" charset="-122"/>
-                          <a:ea typeface="微软雅黑" panose="020B0503020204020204" pitchFamily="34" charset="-122"/>
-                          <a:cs typeface="微软雅黑" panose="020B0503020204020204" pitchFamily="34" charset="-120"/>
+                          <a:latin typeface="微软雅黑" pitchFamily="34" charset="0"/>
+                          <a:ea typeface="微软雅黑" pitchFamily="34" charset="-122"/>
+                          <a:cs typeface="微软雅黑" pitchFamily="34" charset="-120"/>
                         </a:rPr>
                         <a:t>需要的食材</a:t>
                       </a:r>
                       <a:endParaRPr lang="en-US" sz="1500" dirty="0">
-                        <a:latin typeface="微软雅黑" panose="020B0503020204020204" pitchFamily="34" charset="-122"/>
-                        <a:ea typeface="微软雅黑" panose="020B0503020204020204" pitchFamily="34" charset="-122"/>
-                        <a:cs typeface="微软雅黑" panose="020B0503020204020204" pitchFamily="34" charset="-122"/>
+                        <a:latin typeface="微软雅黑" charset="0"/>
+                        <a:ea typeface="微软雅黑" charset="0"/>
+                        <a:cs typeface="微软雅黑" charset="0"/>
                       </a:endParaRPr>
                     </a:p>
                   </a:txBody>
-                  <a:tcPr anchor="ctr">
+                  <a:tcPr marL="91440" marR="91440" marT="45720" marB="45720" anchor="ctr">
                     <a:lnL w="9525" cap="flat" cmpd="sng" algn="ctr">
                       <a:solidFill>
                         <a:srgbClr val="D8DBE0"/>
@@ -5871,7 +6128,7 @@
                     <a:bodyPr/>
                     <a:lstStyle/>
                     <a:p>
-                      <a:pPr marL="0" indent="0" algn="ctr">
+                      <a:pPr algn="ctr" indent="0" marL="0">
                         <a:buNone/>
                       </a:pPr>
                       <a:r>
@@ -5879,20 +6136,20 @@
                           <a:solidFill>
                             <a:srgbClr val="1F2329"/>
                           </a:solidFill>
-                          <a:latin typeface="微软雅黑" panose="020B0503020204020204" pitchFamily="34" charset="-122"/>
-                          <a:ea typeface="微软雅黑" panose="020B0503020204020204" pitchFamily="34" charset="-122"/>
-                          <a:cs typeface="微软雅黑" panose="020B0503020204020204" pitchFamily="34" charset="-120"/>
+                          <a:latin typeface="微软雅黑" pitchFamily="34" charset="0"/>
+                          <a:ea typeface="微软雅黑" pitchFamily="34" charset="-122"/>
+                          <a:cs typeface="微软雅黑" pitchFamily="34" charset="-120"/>
                         </a:rPr>
                         <a:t>参数（输入）</a:t>
                       </a:r>
                       <a:endParaRPr lang="en-US" sz="1500" dirty="0">
-                        <a:latin typeface="微软雅黑" panose="020B0503020204020204" pitchFamily="34" charset="-122"/>
-                        <a:ea typeface="微软雅黑" panose="020B0503020204020204" pitchFamily="34" charset="-122"/>
-                        <a:cs typeface="微软雅黑" panose="020B0503020204020204" pitchFamily="34" charset="-122"/>
+                        <a:latin typeface="微软雅黑" charset="0"/>
+                        <a:ea typeface="微软雅黑" charset="0"/>
+                        <a:cs typeface="微软雅黑" charset="0"/>
                       </a:endParaRPr>
                     </a:p>
                   </a:txBody>
-                  <a:tcPr anchor="ctr">
+                  <a:tcPr marL="91440" marR="91440" marT="45720" marB="45720" anchor="ctr">
                     <a:lnL w="9525" cap="flat" cmpd="sng" algn="ctr">
                       <a:solidFill>
                         <a:srgbClr val="D8DBE0"/>
@@ -5941,7 +6198,7 @@
                     <a:bodyPr/>
                     <a:lstStyle/>
                     <a:p>
-                      <a:pPr marL="0" indent="0" algn="ctr">
+                      <a:pPr algn="ctr" indent="0" marL="0">
                         <a:buNone/>
                       </a:pPr>
                       <a:r>
@@ -5949,20 +6206,20 @@
                           <a:solidFill>
                             <a:srgbClr val="1F2329"/>
                           </a:solidFill>
-                          <a:latin typeface="微软雅黑" panose="020B0503020204020204" pitchFamily="34" charset="-122"/>
-                          <a:ea typeface="微软雅黑" panose="020B0503020204020204" pitchFamily="34" charset="-122"/>
-                          <a:cs typeface="微软雅黑" panose="020B0503020204020204" pitchFamily="34" charset="-120"/>
+                          <a:latin typeface="微软雅黑" pitchFamily="34" charset="0"/>
+                          <a:ea typeface="微软雅黑" pitchFamily="34" charset="-122"/>
+                          <a:cs typeface="微软雅黑" pitchFamily="34" charset="-120"/>
                         </a:rPr>
                         <a:t>做出来的菜</a:t>
                       </a:r>
                       <a:endParaRPr lang="en-US" sz="1500" dirty="0">
-                        <a:latin typeface="微软雅黑" panose="020B0503020204020204" pitchFamily="34" charset="-122"/>
-                        <a:ea typeface="微软雅黑" panose="020B0503020204020204" pitchFamily="34" charset="-122"/>
-                        <a:cs typeface="微软雅黑" panose="020B0503020204020204" pitchFamily="34" charset="-122"/>
+                        <a:latin typeface="微软雅黑" charset="0"/>
+                        <a:ea typeface="微软雅黑" charset="0"/>
+                        <a:cs typeface="微软雅黑" charset="0"/>
                       </a:endParaRPr>
                     </a:p>
                   </a:txBody>
-                  <a:tcPr anchor="ctr">
+                  <a:tcPr marL="91440" marR="91440" marT="45720" marB="45720" anchor="ctr">
                     <a:lnL w="9525" cap="flat" cmpd="sng" algn="ctr">
                       <a:solidFill>
                         <a:srgbClr val="D8DBE0"/>
@@ -6009,7 +6266,7 @@
                     <a:bodyPr/>
                     <a:lstStyle/>
                     <a:p>
-                      <a:pPr marL="0" indent="0" algn="ctr">
+                      <a:pPr algn="ctr" indent="0" marL="0">
                         <a:buNone/>
                       </a:pPr>
                       <a:r>
@@ -6017,20 +6274,20 @@
                           <a:solidFill>
                             <a:srgbClr val="1F2329"/>
                           </a:solidFill>
-                          <a:latin typeface="微软雅黑" panose="020B0503020204020204" pitchFamily="34" charset="-122"/>
-                          <a:ea typeface="微软雅黑" panose="020B0503020204020204" pitchFamily="34" charset="-122"/>
-                          <a:cs typeface="微软雅黑" panose="020B0503020204020204" pitchFamily="34" charset="-120"/>
+                          <a:latin typeface="微软雅黑" pitchFamily="34" charset="0"/>
+                          <a:ea typeface="微软雅黑" pitchFamily="34" charset="-122"/>
+                          <a:cs typeface="微软雅黑" pitchFamily="34" charset="-120"/>
                         </a:rPr>
                         <a:t>返回值（输出）</a:t>
                       </a:r>
                       <a:endParaRPr lang="en-US" sz="1500" dirty="0">
-                        <a:latin typeface="微软雅黑" panose="020B0503020204020204" pitchFamily="34" charset="-122"/>
-                        <a:ea typeface="微软雅黑" panose="020B0503020204020204" pitchFamily="34" charset="-122"/>
-                        <a:cs typeface="微软雅黑" panose="020B0503020204020204" pitchFamily="34" charset="-122"/>
+                        <a:latin typeface="微软雅黑" charset="0"/>
+                        <a:ea typeface="微软雅黑" charset="0"/>
+                        <a:cs typeface="微软雅黑" charset="0"/>
                       </a:endParaRPr>
                     </a:p>
                   </a:txBody>
-                  <a:tcPr anchor="ctr">
+                  <a:tcPr marL="91440" marR="91440" marT="45720" marB="45720" anchor="ctr">
                     <a:lnL w="9525" cap="flat" cmpd="sng" algn="ctr">
                       <a:solidFill>
                         <a:srgbClr val="D8DBE0"/>
@@ -6079,7 +6336,7 @@
                     <a:bodyPr/>
                     <a:lstStyle/>
                     <a:p>
-                      <a:pPr marL="0" indent="0" algn="ctr">
+                      <a:pPr algn="ctr" indent="0" marL="0">
                         <a:buNone/>
                       </a:pPr>
                       <a:r>
@@ -6087,20 +6344,20 @@
                           <a:solidFill>
                             <a:srgbClr val="1F2329"/>
                           </a:solidFill>
-                          <a:latin typeface="微软雅黑" panose="020B0503020204020204" pitchFamily="34" charset="-122"/>
-                          <a:ea typeface="微软雅黑" panose="020B0503020204020204" pitchFamily="34" charset="-122"/>
-                          <a:cs typeface="微软雅黑" panose="020B0503020204020204" pitchFamily="34" charset="-120"/>
+                          <a:latin typeface="微软雅黑" pitchFamily="34" charset="0"/>
+                          <a:ea typeface="微软雅黑" pitchFamily="34" charset="-122"/>
+                          <a:cs typeface="微软雅黑" pitchFamily="34" charset="-120"/>
                         </a:rPr>
                         <a:t>做菜步骤</a:t>
                       </a:r>
                       <a:endParaRPr lang="en-US" sz="1500" dirty="0">
-                        <a:latin typeface="微软雅黑" panose="020B0503020204020204" pitchFamily="34" charset="-122"/>
-                        <a:ea typeface="微软雅黑" panose="020B0503020204020204" pitchFamily="34" charset="-122"/>
-                        <a:cs typeface="微软雅黑" panose="020B0503020204020204" pitchFamily="34" charset="-122"/>
+                        <a:latin typeface="微软雅黑" charset="0"/>
+                        <a:ea typeface="微软雅黑" charset="0"/>
+                        <a:cs typeface="微软雅黑" charset="0"/>
                       </a:endParaRPr>
                     </a:p>
                   </a:txBody>
-                  <a:tcPr anchor="ctr">
+                  <a:tcPr marL="91440" marR="91440" marT="45720" marB="45720" anchor="ctr">
                     <a:lnL w="9525" cap="flat" cmpd="sng" algn="ctr">
                       <a:solidFill>
                         <a:srgbClr val="D8DBE0"/>
@@ -6147,7 +6404,7 @@
                     <a:bodyPr/>
                     <a:lstStyle/>
                     <a:p>
-                      <a:pPr marL="0" indent="0" algn="ctr">
+                      <a:pPr algn="ctr" indent="0" marL="0">
                         <a:buNone/>
                       </a:pPr>
                       <a:r>
@@ -6155,20 +6412,20 @@
                           <a:solidFill>
                             <a:srgbClr val="1F2329"/>
                           </a:solidFill>
-                          <a:latin typeface="微软雅黑" panose="020B0503020204020204" pitchFamily="34" charset="-122"/>
-                          <a:ea typeface="微软雅黑" panose="020B0503020204020204" pitchFamily="34" charset="-122"/>
-                          <a:cs typeface="微软雅黑" panose="020B0503020204020204" pitchFamily="34" charset="-120"/>
+                          <a:latin typeface="微软雅黑" pitchFamily="34" charset="0"/>
+                          <a:ea typeface="微软雅黑" pitchFamily="34" charset="-122"/>
+                          <a:cs typeface="微软雅黑" pitchFamily="34" charset="-120"/>
                         </a:rPr>
                         <a:t>函数体</a:t>
                       </a:r>
                       <a:endParaRPr lang="en-US" sz="1500" dirty="0">
-                        <a:latin typeface="微软雅黑" panose="020B0503020204020204" pitchFamily="34" charset="-122"/>
-                        <a:ea typeface="微软雅黑" panose="020B0503020204020204" pitchFamily="34" charset="-122"/>
-                        <a:cs typeface="微软雅黑" panose="020B0503020204020204" pitchFamily="34" charset="-122"/>
+                        <a:latin typeface="微软雅黑" charset="0"/>
+                        <a:ea typeface="微软雅黑" charset="0"/>
+                        <a:cs typeface="微软雅黑" charset="0"/>
                       </a:endParaRPr>
                     </a:p>
                   </a:txBody>
-                  <a:tcPr anchor="ctr">
+                  <a:tcPr marL="91440" marR="91440" marT="45720" marB="45720" anchor="ctr">
                     <a:lnL w="9525" cap="flat" cmpd="sng" algn="ctr">
                       <a:solidFill>
                         <a:srgbClr val="D8DBE0"/>
@@ -6230,12 +6487,13 @@
             <a:avLst/>
           </a:prstGeom>
           <a:noFill/>
+          <a:ln/>
         </p:spPr>
         <p:txBody>
           <a:bodyPr wrap="square" rtlCol="0" anchor="t"/>
           <a:lstStyle/>
           <a:p>
-            <a:pPr marL="0" indent="0" algn="l">
+            <a:pPr algn="l" indent="0" marL="0">
               <a:lnSpc>
                 <a:spcPct val="115000"/>
               </a:lnSpc>
@@ -6246,12 +6504,18 @@
                 <a:solidFill>
                   <a:srgbClr val="1F4E9C"/>
                 </a:solidFill>
-                <a:latin typeface="微软雅黑" panose="020B0503020204020204" pitchFamily="34" charset="-122"/>
-                <a:ea typeface="微软雅黑" panose="020B0503020204020204" pitchFamily="34" charset="-122"/>
-                <a:cs typeface="微软雅黑" panose="020B0503020204020204" pitchFamily="34" charset="-120"/>
+                <a:latin typeface="微软雅黑" pitchFamily="34" charset="0"/>
+                <a:ea typeface="微软雅黑" pitchFamily="34" charset="-122"/>
+                <a:cs typeface="微软雅黑" pitchFamily="34" charset="-120"/>
               </a:rPr>
               <a:t>•  </a:t>
             </a:r>
+            <a:pPr algn="l" indent="0" marL="0">
+              <a:lnSpc>
+                <a:spcPct val="115000"/>
+              </a:lnSpc>
+              <a:buNone/>
+            </a:pPr>
             <a:r>
               <a:rPr lang="en-US" sz="1800" dirty="0">
                 <a:solidFill>
@@ -6260,6 +6524,12 @@
               </a:rPr>
               <a:t>函数把一段干活步骤</a:t>
             </a:r>
+            <a:pPr algn="l" indent="0" marL="0">
+              <a:lnSpc>
+                <a:spcPct val="115000"/>
+              </a:lnSpc>
+              <a:buNone/>
+            </a:pPr>
             <a:r>
               <a:rPr lang="en-US" sz="1800" b="1" dirty="0">
                 <a:solidFill>
@@ -6268,6 +6538,12 @@
               </a:rPr>
               <a:t>打包起名</a:t>
             </a:r>
+            <a:pPr algn="l" indent="0" marL="0">
+              <a:lnSpc>
+                <a:spcPct val="115000"/>
+              </a:lnSpc>
+              <a:buNone/>
+            </a:pPr>
             <a:r>
               <a:rPr lang="en-US" sz="1800" dirty="0">
                 <a:solidFill>
@@ -6295,12 +6571,13 @@
             <a:avLst/>
           </a:prstGeom>
           <a:noFill/>
+          <a:ln/>
         </p:spPr>
         <p:txBody>
           <a:bodyPr wrap="square" rtlCol="0" anchor="t"/>
           <a:lstStyle/>
           <a:p>
-            <a:pPr marL="0" indent="0" algn="l">
+            <a:pPr algn="l" indent="0" marL="0">
               <a:lnSpc>
                 <a:spcPct val="115000"/>
               </a:lnSpc>
@@ -6311,12 +6588,18 @@
                 <a:solidFill>
                   <a:srgbClr val="1F4E9C"/>
                 </a:solidFill>
-                <a:latin typeface="微软雅黑" panose="020B0503020204020204" pitchFamily="34" charset="-122"/>
-                <a:ea typeface="微软雅黑" panose="020B0503020204020204" pitchFamily="34" charset="-122"/>
-                <a:cs typeface="微软雅黑" panose="020B0503020204020204" pitchFamily="34" charset="-120"/>
+                <a:latin typeface="微软雅黑" pitchFamily="34" charset="0"/>
+                <a:ea typeface="微软雅黑" pitchFamily="34" charset="-122"/>
+                <a:cs typeface="微软雅黑" pitchFamily="34" charset="-120"/>
               </a:rPr>
               <a:t>•  </a:t>
             </a:r>
+            <a:pPr algn="l" indent="0" marL="0">
+              <a:lnSpc>
+                <a:spcPct val="115000"/>
+              </a:lnSpc>
+              <a:buNone/>
+            </a:pPr>
             <a:r>
               <a:rPr lang="en-US" sz="1800" dirty="0">
                 <a:solidFill>
@@ -6339,7 +6622,7 @@
 
 <file path=ppt/slides/slide4.xml><?xml version="1.0" encoding="utf-8"?>
 <p:sld xmlns:a="http://schemas.openxmlformats.org/drawingml/2006/main" xmlns:r="http://schemas.openxmlformats.org/officeDocument/2006/relationships" xmlns:p="http://schemas.openxmlformats.org/presentationml/2006/main">
-  <p:cSld>
+  <p:cSld name="Slide 4">
     <p:bg>
       <p:bgPr>
         <a:blipFill dpi="0" rotWithShape="1">
@@ -6383,12 +6666,13 @@
             <a:avLst/>
           </a:prstGeom>
           <a:noFill/>
+          <a:ln/>
         </p:spPr>
         <p:txBody>
           <a:bodyPr wrap="square" rtlCol="0" anchor="ctr"/>
           <a:lstStyle/>
           <a:p>
-            <a:pPr marL="0" indent="0" algn="r">
+            <a:pPr algn="r" indent="0" marL="0">
               <a:buNone/>
             </a:pPr>
             <a:r>
@@ -6396,9 +6680,9 @@
                 <a:solidFill>
                   <a:srgbClr val="8A9099"/>
                 </a:solidFill>
-                <a:latin typeface="微软雅黑" panose="020B0503020204020204" pitchFamily="34" charset="-122"/>
-                <a:ea typeface="微软雅黑" panose="020B0503020204020204" pitchFamily="34" charset="-122"/>
-                <a:cs typeface="微软雅黑" panose="020B0503020204020204" pitchFamily="34" charset="-120"/>
+                <a:latin typeface="微软雅黑" pitchFamily="34" charset="0"/>
+                <a:ea typeface="微软雅黑" pitchFamily="34" charset="-122"/>
+                <a:cs typeface="微软雅黑" pitchFamily="34" charset="-120"/>
               </a:rPr>
               <a:t>4 / 15</a:t>
             </a:r>
@@ -6421,12 +6705,13 @@
             <a:avLst/>
           </a:prstGeom>
           <a:noFill/>
+          <a:ln/>
         </p:spPr>
         <p:txBody>
           <a:bodyPr wrap="square" rtlCol="0" anchor="ctr"/>
           <a:lstStyle/>
           <a:p>
-            <a:pPr marL="0" indent="0" algn="l">
+            <a:pPr algn="l" indent="0" marL="0">
               <a:buNone/>
             </a:pPr>
             <a:r>
@@ -6434,9 +6719,9 @@
                 <a:solidFill>
                   <a:srgbClr val="1F4E9C"/>
                 </a:solidFill>
-                <a:latin typeface="微软雅黑" panose="020B0503020204020204" pitchFamily="34" charset="-122"/>
-                <a:ea typeface="微软雅黑" panose="020B0503020204020204" pitchFamily="34" charset="-122"/>
-                <a:cs typeface="微软雅黑" panose="020B0503020204020204" pitchFamily="34" charset="-120"/>
+                <a:latin typeface="微软雅黑" pitchFamily="34" charset="0"/>
+                <a:ea typeface="微软雅黑" pitchFamily="34" charset="-122"/>
+                <a:cs typeface="微软雅黑" pitchFamily="34" charset="-120"/>
               </a:rPr>
               <a:t>定义一个函数</a:t>
             </a:r>
@@ -6459,12 +6744,13 @@
             <a:avLst/>
           </a:prstGeom>
           <a:noFill/>
+          <a:ln/>
         </p:spPr>
         <p:txBody>
           <a:bodyPr wrap="square" rtlCol="0" anchor="ctr"/>
           <a:lstStyle/>
           <a:p>
-            <a:pPr marL="0" indent="0" algn="l">
+            <a:pPr algn="l" indent="0" marL="0">
               <a:buNone/>
             </a:pPr>
             <a:r>
@@ -6472,9 +6758,9 @@
                 <a:solidFill>
                   <a:srgbClr val="1F2329"/>
                 </a:solidFill>
-                <a:latin typeface="微软雅黑" panose="020B0503020204020204" pitchFamily="34" charset="-122"/>
-                <a:ea typeface="微软雅黑" panose="020B0503020204020204" pitchFamily="34" charset="-122"/>
-                <a:cs typeface="微软雅黑" panose="020B0503020204020204" pitchFamily="34" charset="-120"/>
+                <a:latin typeface="微软雅黑" pitchFamily="34" charset="0"/>
+                <a:ea typeface="微软雅黑" pitchFamily="34" charset="-122"/>
+                <a:cs typeface="微软雅黑" pitchFamily="34" charset="-120"/>
               </a:rPr>
               <a:t>函数的四部分</a:t>
             </a:r>
@@ -6522,12 +6808,13 @@
             <a:avLst/>
           </a:prstGeom>
           <a:noFill/>
+          <a:ln/>
         </p:spPr>
         <p:txBody>
           <a:bodyPr wrap="square" rtlCol="0" anchor="t"/>
           <a:lstStyle/>
           <a:p>
-            <a:pPr marL="0" indent="0" algn="l">
+            <a:pPr algn="l" indent="0" marL="0">
               <a:lnSpc>
                 <a:spcPct val="125000"/>
               </a:lnSpc>
@@ -6538,9 +6825,9 @@
                 <a:solidFill>
                   <a:srgbClr val="1F2329"/>
                 </a:solidFill>
-                <a:latin typeface="Consolas" panose="020B0609020204030204" pitchFamily="34" charset="0"/>
-                <a:ea typeface="Consolas" panose="020B0609020204030204" pitchFamily="34" charset="-122"/>
-                <a:cs typeface="Consolas" panose="020B0609020204030204" pitchFamily="34" charset="-120"/>
+                <a:latin typeface="Consolas" pitchFamily="34" charset="0"/>
+                <a:ea typeface="Consolas" pitchFamily="34" charset="-122"/>
+                <a:cs typeface="Consolas" pitchFamily="34" charset="-120"/>
               </a:rPr>
               <a:t>int max(int a, int b){      // 返回类型 函数名(参数)
     if(a &gt; b) return a;
@@ -6567,12 +6854,13 @@
             <a:avLst/>
           </a:prstGeom>
           <a:noFill/>
+          <a:ln/>
         </p:spPr>
         <p:txBody>
           <a:bodyPr wrap="square" rtlCol="0" anchor="t"/>
           <a:lstStyle/>
           <a:p>
-            <a:pPr marL="0" indent="0" algn="l">
+            <a:pPr algn="l" indent="0" marL="0">
               <a:lnSpc>
                 <a:spcPct val="115000"/>
               </a:lnSpc>
@@ -6583,12 +6871,18 @@
                 <a:solidFill>
                   <a:srgbClr val="1F4E9C"/>
                 </a:solidFill>
-                <a:latin typeface="微软雅黑" panose="020B0503020204020204" pitchFamily="34" charset="-122"/>
-                <a:ea typeface="微软雅黑" panose="020B0503020204020204" pitchFamily="34" charset="-122"/>
-                <a:cs typeface="微软雅黑" panose="020B0503020204020204" pitchFamily="34" charset="-120"/>
+                <a:latin typeface="微软雅黑" pitchFamily="34" charset="0"/>
+                <a:ea typeface="微软雅黑" pitchFamily="34" charset="-122"/>
+                <a:cs typeface="微软雅黑" pitchFamily="34" charset="-120"/>
               </a:rPr>
               <a:t>•  </a:t>
             </a:r>
+            <a:pPr algn="l" indent="0" marL="0">
+              <a:lnSpc>
+                <a:spcPct val="115000"/>
+              </a:lnSpc>
+              <a:buNone/>
+            </a:pPr>
             <a:r>
               <a:rPr lang="en-US" sz="1800" b="1" dirty="0">
                 <a:solidFill>
@@ -6597,6 +6891,12 @@
               </a:rPr>
               <a:t>返回类型</a:t>
             </a:r>
+            <a:pPr algn="l" indent="0" marL="0">
+              <a:lnSpc>
+                <a:spcPct val="115000"/>
+              </a:lnSpc>
+              <a:buNone/>
+            </a:pPr>
             <a:r>
               <a:rPr lang="en-US" sz="1800" dirty="0">
                 <a:solidFill>
@@ -6624,12 +6924,13 @@
             <a:avLst/>
           </a:prstGeom>
           <a:noFill/>
+          <a:ln/>
         </p:spPr>
         <p:txBody>
           <a:bodyPr wrap="square" rtlCol="0" anchor="t"/>
           <a:lstStyle/>
           <a:p>
-            <a:pPr marL="0" indent="0" algn="l">
+            <a:pPr algn="l" indent="0" marL="0">
               <a:lnSpc>
                 <a:spcPct val="115000"/>
               </a:lnSpc>
@@ -6640,12 +6941,18 @@
                 <a:solidFill>
                   <a:srgbClr val="1F4E9C"/>
                 </a:solidFill>
-                <a:latin typeface="微软雅黑" panose="020B0503020204020204" pitchFamily="34" charset="-122"/>
-                <a:ea typeface="微软雅黑" panose="020B0503020204020204" pitchFamily="34" charset="-122"/>
-                <a:cs typeface="微软雅黑" panose="020B0503020204020204" pitchFamily="34" charset="-120"/>
+                <a:latin typeface="微软雅黑" pitchFamily="34" charset="0"/>
+                <a:ea typeface="微软雅黑" pitchFamily="34" charset="-122"/>
+                <a:cs typeface="微软雅黑" pitchFamily="34" charset="-120"/>
               </a:rPr>
               <a:t>•  </a:t>
             </a:r>
+            <a:pPr algn="l" indent="0" marL="0">
+              <a:lnSpc>
+                <a:spcPct val="115000"/>
+              </a:lnSpc>
+              <a:buNone/>
+            </a:pPr>
             <a:r>
               <a:rPr lang="en-US" sz="1800" b="1" dirty="0">
                 <a:solidFill>
@@ -6654,21 +6961,19 @@
               </a:rPr>
               <a:t>函数名</a:t>
             </a:r>
+            <a:pPr algn="l" indent="0" marL="0">
+              <a:lnSpc>
+                <a:spcPct val="115000"/>
+              </a:lnSpc>
+              <a:buNone/>
+            </a:pPr>
             <a:r>
               <a:rPr lang="en-US" sz="1800" dirty="0">
                 <a:solidFill>
                   <a:srgbClr val="000000"/>
                 </a:solidFill>
               </a:rPr>
-              <a:t>：</a:t>
-            </a:r>
-            <a:r>
-              <a:rPr lang="zh-CN" altLang="en-US" sz="1800" dirty="0">
-                <a:solidFill>
-                  <a:srgbClr val="000000"/>
-                </a:solidFill>
-              </a:rPr>
-              <a:t>函数的名称</a:t>
+              <a:t>：喊它用的名字</a:t>
             </a:r>
             <a:endParaRPr lang="en-US" sz="1800" dirty="0"/>
           </a:p>
@@ -6689,12 +6994,13 @@
             <a:avLst/>
           </a:prstGeom>
           <a:noFill/>
+          <a:ln/>
         </p:spPr>
         <p:txBody>
           <a:bodyPr wrap="square" rtlCol="0" anchor="t"/>
           <a:lstStyle/>
           <a:p>
-            <a:pPr marL="0" indent="0" algn="l">
+            <a:pPr algn="l" indent="0" marL="0">
               <a:lnSpc>
                 <a:spcPct val="115000"/>
               </a:lnSpc>
@@ -6705,12 +7011,18 @@
                 <a:solidFill>
                   <a:srgbClr val="1F4E9C"/>
                 </a:solidFill>
-                <a:latin typeface="微软雅黑" panose="020B0503020204020204" pitchFamily="34" charset="-122"/>
-                <a:ea typeface="微软雅黑" panose="020B0503020204020204" pitchFamily="34" charset="-122"/>
-                <a:cs typeface="微软雅黑" panose="020B0503020204020204" pitchFamily="34" charset="-120"/>
+                <a:latin typeface="微软雅黑" pitchFamily="34" charset="0"/>
+                <a:ea typeface="微软雅黑" pitchFamily="34" charset="-122"/>
+                <a:cs typeface="微软雅黑" pitchFamily="34" charset="-120"/>
               </a:rPr>
               <a:t>•  </a:t>
             </a:r>
+            <a:pPr algn="l" indent="0" marL="0">
+              <a:lnSpc>
+                <a:spcPct val="115000"/>
+              </a:lnSpc>
+              <a:buNone/>
+            </a:pPr>
             <a:r>
               <a:rPr lang="en-US" sz="1800" b="1" dirty="0">
                 <a:solidFill>
@@ -6719,6 +7031,12 @@
               </a:rPr>
               <a:t>参数</a:t>
             </a:r>
+            <a:pPr algn="l" indent="0" marL="0">
+              <a:lnSpc>
+                <a:spcPct val="115000"/>
+              </a:lnSpc>
+              <a:buNone/>
+            </a:pPr>
             <a:r>
               <a:rPr lang="en-US" sz="1800" dirty="0">
                 <a:solidFill>
@@ -6746,12 +7064,13 @@
             <a:avLst/>
           </a:prstGeom>
           <a:noFill/>
+          <a:ln/>
         </p:spPr>
         <p:txBody>
           <a:bodyPr wrap="square" rtlCol="0" anchor="t"/>
           <a:lstStyle/>
           <a:p>
-            <a:pPr marL="0" indent="0" algn="l">
+            <a:pPr algn="l" indent="0" marL="0">
               <a:lnSpc>
                 <a:spcPct val="115000"/>
               </a:lnSpc>
@@ -6762,12 +7081,18 @@
                 <a:solidFill>
                   <a:srgbClr val="1F4E9C"/>
                 </a:solidFill>
-                <a:latin typeface="微软雅黑" panose="020B0503020204020204" pitchFamily="34" charset="-122"/>
-                <a:ea typeface="微软雅黑" panose="020B0503020204020204" pitchFamily="34" charset="-122"/>
-                <a:cs typeface="微软雅黑" panose="020B0503020204020204" pitchFamily="34" charset="-120"/>
+                <a:latin typeface="微软雅黑" pitchFamily="34" charset="0"/>
+                <a:ea typeface="微软雅黑" pitchFamily="34" charset="-122"/>
+                <a:cs typeface="微软雅黑" pitchFamily="34" charset="-120"/>
               </a:rPr>
               <a:t>•  </a:t>
             </a:r>
+            <a:pPr algn="l" indent="0" marL="0">
+              <a:lnSpc>
+                <a:spcPct val="115000"/>
+              </a:lnSpc>
+              <a:buNone/>
+            </a:pPr>
             <a:r>
               <a:rPr lang="en-US" sz="1800" b="1" dirty="0">
                 <a:solidFill>
@@ -6776,6 +7101,12 @@
               </a:rPr>
               <a:t>函数体</a:t>
             </a:r>
+            <a:pPr algn="l" indent="0" marL="0">
+              <a:lnSpc>
+                <a:spcPct val="115000"/>
+              </a:lnSpc>
+              <a:buNone/>
+            </a:pPr>
             <a:r>
               <a:rPr lang="en-US" sz="1800" dirty="0">
                 <a:solidFill>
@@ -6798,7 +7129,7 @@
 
 <file path=ppt/slides/slide5.xml><?xml version="1.0" encoding="utf-8"?>
 <p:sld xmlns:a="http://schemas.openxmlformats.org/drawingml/2006/main" xmlns:r="http://schemas.openxmlformats.org/officeDocument/2006/relationships" xmlns:p="http://schemas.openxmlformats.org/presentationml/2006/main">
-  <p:cSld>
+  <p:cSld name="Slide 5">
     <p:bg>
       <p:bgPr>
         <a:blipFill dpi="0" rotWithShape="1">
@@ -6842,12 +7173,13 @@
             <a:avLst/>
           </a:prstGeom>
           <a:noFill/>
+          <a:ln/>
         </p:spPr>
         <p:txBody>
           <a:bodyPr wrap="square" rtlCol="0" anchor="ctr"/>
           <a:lstStyle/>
           <a:p>
-            <a:pPr marL="0" indent="0" algn="r">
+            <a:pPr algn="r" indent="0" marL="0">
               <a:buNone/>
             </a:pPr>
             <a:r>
@@ -6855,9 +7187,9 @@
                 <a:solidFill>
                   <a:srgbClr val="8A9099"/>
                 </a:solidFill>
-                <a:latin typeface="微软雅黑" panose="020B0503020204020204" pitchFamily="34" charset="-122"/>
-                <a:ea typeface="微软雅黑" panose="020B0503020204020204" pitchFamily="34" charset="-122"/>
-                <a:cs typeface="微软雅黑" panose="020B0503020204020204" pitchFamily="34" charset="-120"/>
+                <a:latin typeface="微软雅黑" pitchFamily="34" charset="0"/>
+                <a:ea typeface="微软雅黑" pitchFamily="34" charset="-122"/>
+                <a:cs typeface="微软雅黑" pitchFamily="34" charset="-120"/>
               </a:rPr>
               <a:t>5 / 15</a:t>
             </a:r>
@@ -6880,12 +7212,13 @@
             <a:avLst/>
           </a:prstGeom>
           <a:noFill/>
+          <a:ln/>
         </p:spPr>
         <p:txBody>
           <a:bodyPr wrap="square" rtlCol="0" anchor="ctr"/>
           <a:lstStyle/>
           <a:p>
-            <a:pPr marL="0" indent="0" algn="l">
+            <a:pPr algn="l" indent="0" marL="0">
               <a:buNone/>
             </a:pPr>
             <a:r>
@@ -6893,9 +7226,9 @@
                 <a:solidFill>
                   <a:srgbClr val="1F4E9C"/>
                 </a:solidFill>
-                <a:latin typeface="微软雅黑" panose="020B0503020204020204" pitchFamily="34" charset="-122"/>
-                <a:ea typeface="微软雅黑" panose="020B0503020204020204" pitchFamily="34" charset="-122"/>
-                <a:cs typeface="微软雅黑" panose="020B0503020204020204" pitchFamily="34" charset="-120"/>
+                <a:latin typeface="微软雅黑" pitchFamily="34" charset="0"/>
+                <a:ea typeface="微软雅黑" pitchFamily="34" charset="-122"/>
+                <a:cs typeface="微软雅黑" pitchFamily="34" charset="-120"/>
               </a:rPr>
               <a:t>调用函数</a:t>
             </a:r>
@@ -6918,12 +7251,13 @@
             <a:avLst/>
           </a:prstGeom>
           <a:noFill/>
+          <a:ln/>
         </p:spPr>
         <p:txBody>
           <a:bodyPr wrap="square" rtlCol="0" anchor="ctr"/>
           <a:lstStyle/>
           <a:p>
-            <a:pPr marL="0" indent="0" algn="l">
+            <a:pPr algn="l" indent="0" marL="0">
               <a:buNone/>
             </a:pPr>
             <a:r>
@@ -6931,9 +7265,9 @@
                 <a:solidFill>
                   <a:srgbClr val="1F2329"/>
                 </a:solidFill>
-                <a:latin typeface="微软雅黑" panose="020B0503020204020204" pitchFamily="34" charset="-122"/>
-                <a:ea typeface="微软雅黑" panose="020B0503020204020204" pitchFamily="34" charset="-122"/>
-                <a:cs typeface="微软雅黑" panose="020B0503020204020204" pitchFamily="34" charset="-120"/>
+                <a:latin typeface="微软雅黑" pitchFamily="34" charset="0"/>
+                <a:ea typeface="微软雅黑" pitchFamily="34" charset="-122"/>
+                <a:cs typeface="微软雅黑" pitchFamily="34" charset="-120"/>
               </a:rPr>
               <a:t>喊名字，交原料，收结果</a:t>
             </a:r>
@@ -6981,12 +7315,13 @@
             <a:avLst/>
           </a:prstGeom>
           <a:noFill/>
+          <a:ln/>
         </p:spPr>
         <p:txBody>
           <a:bodyPr wrap="square" rtlCol="0" anchor="t"/>
           <a:lstStyle/>
           <a:p>
-            <a:pPr marL="0" indent="0" algn="l">
+            <a:pPr algn="l" indent="0" marL="0">
               <a:lnSpc>
                 <a:spcPct val="125000"/>
               </a:lnSpc>
@@ -6997,9 +7332,9 @@
                 <a:solidFill>
                   <a:srgbClr val="1F2329"/>
                 </a:solidFill>
-                <a:latin typeface="Consolas" panose="020B0609020204030204" pitchFamily="34" charset="0"/>
-                <a:ea typeface="Consolas" panose="020B0609020204030204" pitchFamily="34" charset="-122"/>
-                <a:cs typeface="Consolas" panose="020B0609020204030204" pitchFamily="34" charset="-120"/>
+                <a:latin typeface="Consolas" pitchFamily="34" charset="0"/>
+                <a:ea typeface="Consolas" pitchFamily="34" charset="-122"/>
+                <a:cs typeface="Consolas" pitchFamily="34" charset="-120"/>
               </a:rPr>
               <a:t>int m = max(3, 8);          // 调用：把3和8交给max
 printf("%d", m);            // m里是8
@@ -7024,12 +7359,13 @@
             <a:avLst/>
           </a:prstGeom>
           <a:noFill/>
+          <a:ln/>
         </p:spPr>
         <p:txBody>
           <a:bodyPr wrap="square" rtlCol="0" anchor="t"/>
           <a:lstStyle/>
           <a:p>
-            <a:pPr marL="0" indent="0" algn="l">
+            <a:pPr algn="l" indent="0" marL="0">
               <a:lnSpc>
                 <a:spcPct val="115000"/>
               </a:lnSpc>
@@ -7040,12 +7376,18 @@
                 <a:solidFill>
                   <a:srgbClr val="1F4E9C"/>
                 </a:solidFill>
-                <a:latin typeface="微软雅黑" panose="020B0503020204020204" pitchFamily="34" charset="-122"/>
-                <a:ea typeface="微软雅黑" panose="020B0503020204020204" pitchFamily="34" charset="-122"/>
-                <a:cs typeface="微软雅黑" panose="020B0503020204020204" pitchFamily="34" charset="-120"/>
+                <a:latin typeface="微软雅黑" pitchFamily="34" charset="0"/>
+                <a:ea typeface="微软雅黑" pitchFamily="34" charset="-122"/>
+                <a:cs typeface="微软雅黑" pitchFamily="34" charset="-120"/>
               </a:rPr>
               <a:t>•  </a:t>
             </a:r>
+            <a:pPr algn="l" indent="0" marL="0">
+              <a:lnSpc>
+                <a:spcPct val="115000"/>
+              </a:lnSpc>
+              <a:buNone/>
+            </a:pPr>
             <a:r>
               <a:rPr lang="en-US" sz="1800" dirty="0">
                 <a:solidFill>
@@ -7054,6 +7396,12 @@
               </a:rPr>
               <a:t>调用就是：</a:t>
             </a:r>
+            <a:pPr algn="l" indent="0" marL="0">
+              <a:lnSpc>
+                <a:spcPct val="115000"/>
+              </a:lnSpc>
+              <a:buNone/>
+            </a:pPr>
             <a:r>
               <a:rPr lang="en-US" sz="1800" b="1" dirty="0">
                 <a:solidFill>
@@ -7081,12 +7429,13 @@
             <a:avLst/>
           </a:prstGeom>
           <a:noFill/>
+          <a:ln/>
         </p:spPr>
         <p:txBody>
           <a:bodyPr wrap="square" rtlCol="0" anchor="t"/>
           <a:lstStyle/>
           <a:p>
-            <a:pPr marL="0" indent="0" algn="l">
+            <a:pPr algn="l" indent="0" marL="0">
               <a:lnSpc>
                 <a:spcPct val="115000"/>
               </a:lnSpc>
@@ -7097,12 +7446,18 @@
                 <a:solidFill>
                   <a:srgbClr val="1F4E9C"/>
                 </a:solidFill>
-                <a:latin typeface="微软雅黑" panose="020B0503020204020204" pitchFamily="34" charset="-122"/>
-                <a:ea typeface="微软雅黑" panose="020B0503020204020204" pitchFamily="34" charset="-122"/>
-                <a:cs typeface="微软雅黑" panose="020B0503020204020204" pitchFamily="34" charset="-120"/>
+                <a:latin typeface="微软雅黑" pitchFamily="34" charset="0"/>
+                <a:ea typeface="微软雅黑" pitchFamily="34" charset="-122"/>
+                <a:cs typeface="微软雅黑" pitchFamily="34" charset="-120"/>
               </a:rPr>
               <a:t>•  </a:t>
             </a:r>
+            <a:pPr algn="l" indent="0" marL="0">
+              <a:lnSpc>
+                <a:spcPct val="115000"/>
+              </a:lnSpc>
+              <a:buNone/>
+            </a:pPr>
             <a:r>
               <a:rPr lang="en-US" sz="1800" dirty="0">
                 <a:solidFill>
@@ -7130,12 +7485,13 @@
             <a:avLst/>
           </a:prstGeom>
           <a:noFill/>
+          <a:ln/>
         </p:spPr>
         <p:txBody>
           <a:bodyPr wrap="square" rtlCol="0" anchor="t"/>
           <a:lstStyle/>
           <a:p>
-            <a:pPr marL="0" indent="0" algn="l">
+            <a:pPr algn="l" indent="0" marL="0">
               <a:lnSpc>
                 <a:spcPct val="115000"/>
               </a:lnSpc>
@@ -7146,12 +7502,18 @@
                 <a:solidFill>
                   <a:srgbClr val="1F4E9C"/>
                 </a:solidFill>
-                <a:latin typeface="微软雅黑" panose="020B0503020204020204" pitchFamily="34" charset="-122"/>
-                <a:ea typeface="微软雅黑" panose="020B0503020204020204" pitchFamily="34" charset="-122"/>
-                <a:cs typeface="微软雅黑" panose="020B0503020204020204" pitchFamily="34" charset="-120"/>
+                <a:latin typeface="微软雅黑" pitchFamily="34" charset="0"/>
+                <a:ea typeface="微软雅黑" pitchFamily="34" charset="-122"/>
+                <a:cs typeface="微软雅黑" pitchFamily="34" charset="-120"/>
               </a:rPr>
               <a:t>•  </a:t>
             </a:r>
+            <a:pPr algn="l" indent="0" marL="0">
+              <a:lnSpc>
+                <a:spcPct val="115000"/>
+              </a:lnSpc>
+              <a:buNone/>
+            </a:pPr>
             <a:r>
               <a:rPr lang="en-US" sz="1800" dirty="0">
                 <a:solidFill>
@@ -7174,7 +7536,7 @@
 
 <file path=ppt/slides/slide6.xml><?xml version="1.0" encoding="utf-8"?>
 <p:sld xmlns:a="http://schemas.openxmlformats.org/drawingml/2006/main" xmlns:r="http://schemas.openxmlformats.org/officeDocument/2006/relationships" xmlns:p="http://schemas.openxmlformats.org/presentationml/2006/main">
-  <p:cSld>
+  <p:cSld name="Slide 6">
     <p:bg>
       <p:bgPr>
         <a:blipFill dpi="0" rotWithShape="1">
@@ -7218,12 +7580,13 @@
             <a:avLst/>
           </a:prstGeom>
           <a:noFill/>
+          <a:ln/>
         </p:spPr>
         <p:txBody>
           <a:bodyPr wrap="square" rtlCol="0" anchor="ctr"/>
           <a:lstStyle/>
           <a:p>
-            <a:pPr marL="0" indent="0" algn="r">
+            <a:pPr algn="r" indent="0" marL="0">
               <a:buNone/>
             </a:pPr>
             <a:r>
@@ -7231,9 +7594,9 @@
                 <a:solidFill>
                   <a:srgbClr val="8A9099"/>
                 </a:solidFill>
-                <a:latin typeface="微软雅黑" panose="020B0503020204020204" pitchFamily="34" charset="-122"/>
-                <a:ea typeface="微软雅黑" panose="020B0503020204020204" pitchFamily="34" charset="-122"/>
-                <a:cs typeface="微软雅黑" panose="020B0503020204020204" pitchFamily="34" charset="-120"/>
+                <a:latin typeface="微软雅黑" pitchFamily="34" charset="0"/>
+                <a:ea typeface="微软雅黑" pitchFamily="34" charset="-122"/>
+                <a:cs typeface="微软雅黑" pitchFamily="34" charset="-120"/>
               </a:rPr>
               <a:t>6 / 15</a:t>
             </a:r>
@@ -7256,12 +7619,13 @@
             <a:avLst/>
           </a:prstGeom>
           <a:noFill/>
+          <a:ln/>
         </p:spPr>
         <p:txBody>
           <a:bodyPr wrap="square" rtlCol="0" anchor="ctr"/>
           <a:lstStyle/>
           <a:p>
-            <a:pPr marL="0" indent="0" algn="l">
+            <a:pPr algn="l" indent="0" marL="0">
               <a:buNone/>
             </a:pPr>
             <a:r>
@@ -7269,9 +7633,9 @@
                 <a:solidFill>
                   <a:srgbClr val="1F4E9C"/>
                 </a:solidFill>
-                <a:latin typeface="微软雅黑" panose="020B0503020204020204" pitchFamily="34" charset="-122"/>
-                <a:ea typeface="微软雅黑" panose="020B0503020204020204" pitchFamily="34" charset="-122"/>
-                <a:cs typeface="微软雅黑" panose="020B0503020204020204" pitchFamily="34" charset="-120"/>
+                <a:latin typeface="微软雅黑" pitchFamily="34" charset="0"/>
+                <a:ea typeface="微软雅黑" pitchFamily="34" charset="-122"/>
+                <a:cs typeface="微软雅黑" pitchFamily="34" charset="-120"/>
               </a:rPr>
               <a:t>返回值的两个细节</a:t>
             </a:r>
@@ -7294,12 +7658,13 @@
             <a:avLst/>
           </a:prstGeom>
           <a:noFill/>
+          <a:ln/>
         </p:spPr>
         <p:txBody>
           <a:bodyPr wrap="square" rtlCol="0" anchor="ctr"/>
           <a:lstStyle/>
           <a:p>
-            <a:pPr marL="0" indent="0" algn="l">
+            <a:pPr algn="l" indent="0" marL="0">
               <a:buNone/>
             </a:pPr>
             <a:r>
@@ -7307,9 +7672,9 @@
                 <a:solidFill>
                   <a:srgbClr val="1F2329"/>
                 </a:solidFill>
-                <a:latin typeface="微软雅黑" panose="020B0503020204020204" pitchFamily="34" charset="-122"/>
-                <a:ea typeface="微软雅黑" panose="020B0503020204020204" pitchFamily="34" charset="-122"/>
-                <a:cs typeface="微软雅黑" panose="020B0503020204020204" pitchFamily="34" charset="-120"/>
+                <a:latin typeface="微软雅黑" pitchFamily="34" charset="0"/>
+                <a:ea typeface="微软雅黑" pitchFamily="34" charset="-122"/>
+                <a:cs typeface="微软雅黑" pitchFamily="34" charset="-120"/>
               </a:rPr>
               <a:t>return 的两件事</a:t>
             </a:r>
@@ -7357,12 +7722,13 @@
             <a:avLst/>
           </a:prstGeom>
           <a:noFill/>
+          <a:ln/>
         </p:spPr>
         <p:txBody>
           <a:bodyPr wrap="square" rtlCol="0" anchor="t"/>
           <a:lstStyle/>
           <a:p>
-            <a:pPr marL="0" indent="0" algn="l">
+            <a:pPr algn="l" indent="0" marL="0">
               <a:lnSpc>
                 <a:spcPct val="125000"/>
               </a:lnSpc>
@@ -7373,9 +7739,9 @@
                 <a:solidFill>
                   <a:srgbClr val="1F2329"/>
                 </a:solidFill>
-                <a:latin typeface="Consolas" panose="020B0609020204030204" pitchFamily="34" charset="0"/>
-                <a:ea typeface="Consolas" panose="020B0609020204030204" pitchFamily="34" charset="-122"/>
-                <a:cs typeface="Consolas" panose="020B0609020204030204" pitchFamily="34" charset="-120"/>
+                <a:latin typeface="Consolas" pitchFamily="34" charset="0"/>
+                <a:ea typeface="Consolas" pitchFamily="34" charset="-122"/>
+                <a:cs typeface="Consolas" pitchFamily="34" charset="-120"/>
               </a:rPr>
               <a:t>int half(int n){
     if(n &lt; 0) return -1;    // ① 提前结束：不合要求，直接走人
@@ -7402,12 +7768,13 @@
             <a:avLst/>
           </a:prstGeom>
           <a:noFill/>
+          <a:ln/>
         </p:spPr>
         <p:txBody>
           <a:bodyPr wrap="square" rtlCol="0" anchor="t"/>
           <a:lstStyle/>
           <a:p>
-            <a:pPr marL="0" indent="0" algn="l">
+            <a:pPr algn="l" indent="0" marL="0">
               <a:lnSpc>
                 <a:spcPct val="115000"/>
               </a:lnSpc>
@@ -7418,12 +7785,18 @@
                 <a:solidFill>
                   <a:srgbClr val="1F4E9C"/>
                 </a:solidFill>
-                <a:latin typeface="微软雅黑" panose="020B0503020204020204" pitchFamily="34" charset="-122"/>
-                <a:ea typeface="微软雅黑" panose="020B0503020204020204" pitchFamily="34" charset="-122"/>
-                <a:cs typeface="微软雅黑" panose="020B0503020204020204" pitchFamily="34" charset="-120"/>
+                <a:latin typeface="微软雅黑" pitchFamily="34" charset="0"/>
+                <a:ea typeface="微软雅黑" pitchFamily="34" charset="-122"/>
+                <a:cs typeface="微软雅黑" pitchFamily="34" charset="-120"/>
               </a:rPr>
               <a:t>•  </a:t>
             </a:r>
+            <a:pPr algn="l" indent="0" marL="0">
+              <a:lnSpc>
+                <a:spcPct val="115000"/>
+              </a:lnSpc>
+              <a:buNone/>
+            </a:pPr>
             <a:r>
               <a:rPr lang="en-US" sz="1800" dirty="0">
                 <a:solidFill>
@@ -7432,6 +7805,12 @@
               </a:rPr>
               <a:t>return干两件事：</a:t>
             </a:r>
+            <a:pPr algn="l" indent="0" marL="0">
+              <a:lnSpc>
+                <a:spcPct val="115000"/>
+              </a:lnSpc>
+              <a:buNone/>
+            </a:pPr>
             <a:r>
               <a:rPr lang="en-US" sz="1800" b="1" dirty="0">
                 <a:solidFill>
@@ -7440,6 +7819,12 @@
               </a:rPr>
               <a:t>交出结果</a:t>
             </a:r>
+            <a:pPr algn="l" indent="0" marL="0">
+              <a:lnSpc>
+                <a:spcPct val="115000"/>
+              </a:lnSpc>
+              <a:buNone/>
+            </a:pPr>
             <a:r>
               <a:rPr lang="en-US" sz="1800" dirty="0">
                 <a:solidFill>
@@ -7448,6 +7833,12 @@
               </a:rPr>
               <a:t>，并且</a:t>
             </a:r>
+            <a:pPr algn="l" indent="0" marL="0">
+              <a:lnSpc>
+                <a:spcPct val="115000"/>
+              </a:lnSpc>
+              <a:buNone/>
+            </a:pPr>
             <a:r>
               <a:rPr lang="en-US" sz="1800" b="1" dirty="0">
                 <a:solidFill>
@@ -7475,12 +7866,13 @@
             <a:avLst/>
           </a:prstGeom>
           <a:noFill/>
+          <a:ln/>
         </p:spPr>
         <p:txBody>
           <a:bodyPr wrap="square" rtlCol="0" anchor="t"/>
           <a:lstStyle/>
           <a:p>
-            <a:pPr marL="0" indent="0" algn="l">
+            <a:pPr algn="l" indent="0" marL="0">
               <a:lnSpc>
                 <a:spcPct val="115000"/>
               </a:lnSpc>
@@ -7491,12 +7883,18 @@
                 <a:solidFill>
                   <a:srgbClr val="1F4E9C"/>
                 </a:solidFill>
-                <a:latin typeface="微软雅黑" panose="020B0503020204020204" pitchFamily="34" charset="-122"/>
-                <a:ea typeface="微软雅黑" panose="020B0503020204020204" pitchFamily="34" charset="-122"/>
-                <a:cs typeface="微软雅黑" panose="020B0503020204020204" pitchFamily="34" charset="-120"/>
+                <a:latin typeface="微软雅黑" pitchFamily="34" charset="0"/>
+                <a:ea typeface="微软雅黑" pitchFamily="34" charset="-122"/>
+                <a:cs typeface="微软雅黑" pitchFamily="34" charset="-120"/>
               </a:rPr>
               <a:t>•  </a:t>
             </a:r>
+            <a:pPr algn="l" indent="0" marL="0">
+              <a:lnSpc>
+                <a:spcPct val="115000"/>
+              </a:lnSpc>
+              <a:buNone/>
+            </a:pPr>
             <a:r>
               <a:rPr lang="en-US" sz="1800" dirty="0">
                 <a:solidFill>
@@ -7505,6 +7903,12 @@
               </a:rPr>
               <a:t>一个函数里可以有多个return，但</a:t>
             </a:r>
+            <a:pPr algn="l" indent="0" marL="0">
+              <a:lnSpc>
+                <a:spcPct val="115000"/>
+              </a:lnSpc>
+              <a:buNone/>
+            </a:pPr>
             <a:r>
               <a:rPr lang="en-US" sz="1800" b="1" dirty="0">
                 <a:solidFill>
@@ -7532,12 +7936,13 @@
             <a:avLst/>
           </a:prstGeom>
           <a:noFill/>
+          <a:ln/>
         </p:spPr>
         <p:txBody>
           <a:bodyPr wrap="square" rtlCol="0" anchor="t"/>
           <a:lstStyle/>
           <a:p>
-            <a:pPr marL="0" indent="0" algn="l">
+            <a:pPr algn="l" indent="0" marL="0">
               <a:lnSpc>
                 <a:spcPct val="115000"/>
               </a:lnSpc>
@@ -7548,12 +7953,18 @@
                 <a:solidFill>
                   <a:srgbClr val="1F4E9C"/>
                 </a:solidFill>
-                <a:latin typeface="微软雅黑" panose="020B0503020204020204" pitchFamily="34" charset="-122"/>
-                <a:ea typeface="微软雅黑" panose="020B0503020204020204" pitchFamily="34" charset="-122"/>
-                <a:cs typeface="微软雅黑" panose="020B0503020204020204" pitchFamily="34" charset="-120"/>
+                <a:latin typeface="微软雅黑" pitchFamily="34" charset="0"/>
+                <a:ea typeface="微软雅黑" pitchFamily="34" charset="-122"/>
+                <a:cs typeface="微软雅黑" pitchFamily="34" charset="-120"/>
               </a:rPr>
               <a:t>•  </a:t>
             </a:r>
+            <a:pPr algn="l" indent="0" marL="0">
+              <a:lnSpc>
+                <a:spcPct val="115000"/>
+              </a:lnSpc>
+              <a:buNone/>
+            </a:pPr>
             <a:r>
               <a:rPr lang="en-US" sz="1800" dirty="0">
                 <a:solidFill>
@@ -7576,7 +7987,7 @@
 
 <file path=ppt/slides/slide7.xml><?xml version="1.0" encoding="utf-8"?>
 <p:sld xmlns:a="http://schemas.openxmlformats.org/drawingml/2006/main" xmlns:r="http://schemas.openxmlformats.org/officeDocument/2006/relationships" xmlns:p="http://schemas.openxmlformats.org/presentationml/2006/main">
-  <p:cSld>
+  <p:cSld name="Slide 7">
     <p:bg>
       <p:bgPr>
         <a:blipFill dpi="0" rotWithShape="1">
@@ -7620,12 +8031,13 @@
             <a:avLst/>
           </a:prstGeom>
           <a:noFill/>
+          <a:ln/>
         </p:spPr>
         <p:txBody>
           <a:bodyPr wrap="square" rtlCol="0" anchor="ctr"/>
           <a:lstStyle/>
           <a:p>
-            <a:pPr marL="0" indent="0" algn="r">
+            <a:pPr algn="r" indent="0" marL="0">
               <a:buNone/>
             </a:pPr>
             <a:r>
@@ -7633,9 +8045,9 @@
                 <a:solidFill>
                   <a:srgbClr val="8A9099"/>
                 </a:solidFill>
-                <a:latin typeface="微软雅黑" panose="020B0503020204020204" pitchFamily="34" charset="-122"/>
-                <a:ea typeface="微软雅黑" panose="020B0503020204020204" pitchFamily="34" charset="-122"/>
-                <a:cs typeface="微软雅黑" panose="020B0503020204020204" pitchFamily="34" charset="-120"/>
+                <a:latin typeface="微软雅黑" pitchFamily="34" charset="0"/>
+                <a:ea typeface="微软雅黑" pitchFamily="34" charset="-122"/>
+                <a:cs typeface="微软雅黑" pitchFamily="34" charset="-120"/>
               </a:rPr>
               <a:t>7 / 15</a:t>
             </a:r>
@@ -7658,12 +8070,13 @@
             <a:avLst/>
           </a:prstGeom>
           <a:noFill/>
+          <a:ln/>
         </p:spPr>
         <p:txBody>
           <a:bodyPr wrap="square" rtlCol="0" anchor="ctr"/>
           <a:lstStyle/>
           <a:p>
-            <a:pPr marL="0" indent="0" algn="l">
+            <a:pPr algn="l" indent="0" marL="0">
               <a:buNone/>
             </a:pPr>
             <a:r>
@@ -7671,9 +8084,9 @@
                 <a:solidFill>
                   <a:srgbClr val="1F4E9C"/>
                 </a:solidFill>
-                <a:latin typeface="微软雅黑" panose="020B0503020204020204" pitchFamily="34" charset="-122"/>
-                <a:ea typeface="微软雅黑" panose="020B0503020204020204" pitchFamily="34" charset="-122"/>
-                <a:cs typeface="微软雅黑" panose="020B0503020204020204" pitchFamily="34" charset="-120"/>
+                <a:latin typeface="微软雅黑" pitchFamily="34" charset="0"/>
+                <a:ea typeface="微软雅黑" pitchFamily="34" charset="-122"/>
+                <a:cs typeface="微软雅黑" pitchFamily="34" charset="-120"/>
               </a:rPr>
               <a:t>数组登场</a:t>
             </a:r>
@@ -7696,12 +8109,13 @@
             <a:avLst/>
           </a:prstGeom>
           <a:noFill/>
+          <a:ln/>
         </p:spPr>
         <p:txBody>
           <a:bodyPr wrap="square" rtlCol="0" anchor="ctr"/>
           <a:lstStyle/>
           <a:p>
-            <a:pPr marL="0" indent="0" algn="l">
+            <a:pPr algn="l" indent="0" marL="0">
               <a:buNone/>
             </a:pPr>
             <a:r>
@@ -7709,9 +8123,9 @@
                 <a:solidFill>
                   <a:srgbClr val="1F2329"/>
                 </a:solidFill>
-                <a:latin typeface="微软雅黑" panose="020B0503020204020204" pitchFamily="34" charset="-122"/>
-                <a:ea typeface="微软雅黑" panose="020B0503020204020204" pitchFamily="34" charset="-122"/>
-                <a:cs typeface="微软雅黑" panose="020B0503020204020204" pitchFamily="34" charset="-120"/>
+                <a:latin typeface="微软雅黑" pitchFamily="34" charset="0"/>
+                <a:ea typeface="微软雅黑" pitchFamily="34" charset="-122"/>
+                <a:cs typeface="微软雅黑" pitchFamily="34" charset="-120"/>
               </a:rPr>
               <a:t>一批同类型的数据，放一排盒子里</a:t>
             </a:r>
@@ -7759,12 +8173,13 @@
             <a:avLst/>
           </a:prstGeom>
           <a:noFill/>
+          <a:ln/>
         </p:spPr>
         <p:txBody>
           <a:bodyPr wrap="square" rtlCol="0" anchor="t"/>
           <a:lstStyle/>
           <a:p>
-            <a:pPr marL="0" indent="0" algn="l">
+            <a:pPr algn="l" indent="0" marL="0">
               <a:lnSpc>
                 <a:spcPct val="125000"/>
               </a:lnSpc>
@@ -7775,9 +8190,9 @@
                 <a:solidFill>
                   <a:srgbClr val="1F2329"/>
                 </a:solidFill>
-                <a:latin typeface="Consolas" panose="020B0609020204030204" pitchFamily="34" charset="0"/>
-                <a:ea typeface="Consolas" panose="020B0609020204030204" pitchFamily="34" charset="-122"/>
-                <a:cs typeface="Consolas" panose="020B0609020204030204" pitchFamily="34" charset="-120"/>
+                <a:latin typeface="Consolas" pitchFamily="34" charset="0"/>
+                <a:ea typeface="Consolas" pitchFamily="34" charset="-122"/>
+                <a:cs typeface="Consolas" pitchFamily="34" charset="-120"/>
               </a:rPr>
               <a:t>int score[5];               // 一排5个int盒子，编号0到4
 score[0] = 85;
@@ -7803,12 +8218,13 @@
             <a:avLst/>
           </a:prstGeom>
           <a:noFill/>
+          <a:ln/>
         </p:spPr>
         <p:txBody>
           <a:bodyPr wrap="square" rtlCol="0" anchor="t"/>
           <a:lstStyle/>
           <a:p>
-            <a:pPr marL="0" indent="0" algn="l">
+            <a:pPr algn="l" indent="0" marL="0">
               <a:lnSpc>
                 <a:spcPct val="115000"/>
               </a:lnSpc>
@@ -7819,12 +8235,18 @@
                 <a:solidFill>
                   <a:srgbClr val="1F4E9C"/>
                 </a:solidFill>
-                <a:latin typeface="微软雅黑" panose="020B0503020204020204" pitchFamily="34" charset="-122"/>
-                <a:ea typeface="微软雅黑" panose="020B0503020204020204" pitchFamily="34" charset="-122"/>
-                <a:cs typeface="微软雅黑" panose="020B0503020204020204" pitchFamily="34" charset="-120"/>
+                <a:latin typeface="微软雅黑" pitchFamily="34" charset="0"/>
+                <a:ea typeface="微软雅黑" pitchFamily="34" charset="-122"/>
+                <a:cs typeface="微软雅黑" pitchFamily="34" charset="-120"/>
               </a:rPr>
               <a:t>•  </a:t>
             </a:r>
+            <a:pPr algn="l" indent="0" marL="0">
+              <a:lnSpc>
+                <a:spcPct val="115000"/>
+              </a:lnSpc>
+              <a:buNone/>
+            </a:pPr>
             <a:r>
               <a:rPr lang="en-US" sz="1800" dirty="0">
                 <a:solidFill>
@@ -7833,6 +8255,12 @@
               </a:rPr>
               <a:t>要存5个分数，难道声明5个变量？数组就是</a:t>
             </a:r>
+            <a:pPr algn="l" indent="0" marL="0">
+              <a:lnSpc>
+                <a:spcPct val="115000"/>
+              </a:lnSpc>
+              <a:buNone/>
+            </a:pPr>
             <a:r>
               <a:rPr lang="en-US" sz="1800" b="1" dirty="0">
                 <a:solidFill>
@@ -7860,12 +8288,13 @@
             <a:avLst/>
           </a:prstGeom>
           <a:noFill/>
+          <a:ln/>
         </p:spPr>
         <p:txBody>
           <a:bodyPr wrap="square" rtlCol="0" anchor="t"/>
           <a:lstStyle/>
           <a:p>
-            <a:pPr marL="0" indent="0" algn="l">
+            <a:pPr algn="l" indent="0" marL="0">
               <a:lnSpc>
                 <a:spcPct val="115000"/>
               </a:lnSpc>
@@ -7876,12 +8305,18 @@
                 <a:solidFill>
                   <a:srgbClr val="1F4E9C"/>
                 </a:solidFill>
-                <a:latin typeface="微软雅黑" panose="020B0503020204020204" pitchFamily="34" charset="-122"/>
-                <a:ea typeface="微软雅黑" panose="020B0503020204020204" pitchFamily="34" charset="-122"/>
-                <a:cs typeface="微软雅黑" panose="020B0503020204020204" pitchFamily="34" charset="-120"/>
+                <a:latin typeface="微软雅黑" pitchFamily="34" charset="0"/>
+                <a:ea typeface="微软雅黑" pitchFamily="34" charset="-122"/>
+                <a:cs typeface="微软雅黑" pitchFamily="34" charset="-120"/>
               </a:rPr>
               <a:t>•  </a:t>
             </a:r>
+            <a:pPr algn="l" indent="0" marL="0">
+              <a:lnSpc>
+                <a:spcPct val="115000"/>
+              </a:lnSpc>
+              <a:buNone/>
+            </a:pPr>
             <a:r>
               <a:rPr lang="en-US" sz="1800" dirty="0">
                 <a:solidFill>
@@ -7890,6 +8325,12 @@
               </a:rPr>
               <a:t>编号叫</a:t>
             </a:r>
+            <a:pPr algn="l" indent="0" marL="0">
+              <a:lnSpc>
+                <a:spcPct val="115000"/>
+              </a:lnSpc>
+              <a:buNone/>
+            </a:pPr>
             <a:r>
               <a:rPr lang="en-US" sz="1800" b="1" dirty="0">
                 <a:solidFill>
@@ -7898,6 +8339,12 @@
               </a:rPr>
               <a:t>下标</a:t>
             </a:r>
+            <a:pPr algn="l" indent="0" marL="0">
+              <a:lnSpc>
+                <a:spcPct val="115000"/>
+              </a:lnSpc>
+              <a:buNone/>
+            </a:pPr>
             <a:r>
               <a:rPr lang="en-US" sz="1800" dirty="0">
                 <a:solidFill>
@@ -7925,12 +8372,13 @@
             <a:avLst/>
           </a:prstGeom>
           <a:noFill/>
+          <a:ln/>
         </p:spPr>
         <p:txBody>
           <a:bodyPr wrap="square" rtlCol="0" anchor="t"/>
           <a:lstStyle/>
           <a:p>
-            <a:pPr marL="0" indent="0" algn="l">
+            <a:pPr algn="l" indent="0" marL="0">
               <a:lnSpc>
                 <a:spcPct val="115000"/>
               </a:lnSpc>
@@ -7941,12 +8389,18 @@
                 <a:solidFill>
                   <a:srgbClr val="1F4E9C"/>
                 </a:solidFill>
-                <a:latin typeface="微软雅黑" panose="020B0503020204020204" pitchFamily="34" charset="-122"/>
-                <a:ea typeface="微软雅黑" panose="020B0503020204020204" pitchFamily="34" charset="-122"/>
-                <a:cs typeface="微软雅黑" panose="020B0503020204020204" pitchFamily="34" charset="-120"/>
+                <a:latin typeface="微软雅黑" pitchFamily="34" charset="0"/>
+                <a:ea typeface="微软雅黑" pitchFamily="34" charset="-122"/>
+                <a:cs typeface="微软雅黑" pitchFamily="34" charset="-120"/>
               </a:rPr>
               <a:t>•  </a:t>
             </a:r>
+            <a:pPr algn="l" indent="0" marL="0">
+              <a:lnSpc>
+                <a:spcPct val="115000"/>
+              </a:lnSpc>
+              <a:buNone/>
+            </a:pPr>
             <a:r>
               <a:rPr lang="en-US" sz="1800" dirty="0">
                 <a:solidFill>
@@ -7969,7 +8423,7 @@
 
 <file path=ppt/slides/slide8.xml><?xml version="1.0" encoding="utf-8"?>
 <p:sld xmlns:a="http://schemas.openxmlformats.org/drawingml/2006/main" xmlns:r="http://schemas.openxmlformats.org/officeDocument/2006/relationships" xmlns:p="http://schemas.openxmlformats.org/presentationml/2006/main">
-  <p:cSld>
+  <p:cSld name="Slide 8">
     <p:bg>
       <p:bgPr>
         <a:blipFill dpi="0" rotWithShape="1">
@@ -8013,12 +8467,13 @@
             <a:avLst/>
           </a:prstGeom>
           <a:noFill/>
+          <a:ln/>
         </p:spPr>
         <p:txBody>
           <a:bodyPr wrap="square" rtlCol="0" anchor="ctr"/>
           <a:lstStyle/>
           <a:p>
-            <a:pPr marL="0" indent="0" algn="r">
+            <a:pPr algn="r" indent="0" marL="0">
               <a:buNone/>
             </a:pPr>
             <a:r>
@@ -8026,13 +8481,52 @@
                 <a:solidFill>
                   <a:srgbClr val="8A9099"/>
                 </a:solidFill>
-                <a:latin typeface="微软雅黑" panose="020B0503020204020204" pitchFamily="34" charset="-122"/>
-                <a:ea typeface="微软雅黑" panose="020B0503020204020204" pitchFamily="34" charset="-122"/>
-                <a:cs typeface="微软雅黑" panose="020B0503020204020204" pitchFamily="34" charset="-120"/>
+                <a:latin typeface="微软雅黑" pitchFamily="34" charset="0"/>
+                <a:ea typeface="微软雅黑" pitchFamily="34" charset="-122"/>
+                <a:cs typeface="微软雅黑" pitchFamily="34" charset="-120"/>
               </a:rPr>
               <a:t>8 / 15</a:t>
             </a:r>
             <a:endParaRPr lang="en-US" sz="1000" dirty="0"/>
+          </a:p>
+        </p:txBody>
+      </p:sp>
+      <p:sp>
+        <p:nvSpPr>
+          <p:cNvPr id="3" name="Text 1"/>
+          <p:cNvSpPr/>
+          <p:nvPr/>
+        </p:nvSpPr>
+        <p:spPr>
+          <a:xfrm>
+            <a:off x="822960" y="960120"/>
+            <a:ext cx="10545775" cy="365760"/>
+          </a:xfrm>
+          <a:prstGeom prst="rect">
+            <a:avLst/>
+          </a:prstGeom>
+          <a:noFill/>
+          <a:ln/>
+        </p:spPr>
+        <p:txBody>
+          <a:bodyPr wrap="square" rtlCol="0" anchor="ctr"/>
+          <a:lstStyle/>
+          <a:p>
+            <a:pPr algn="l" indent="0" marL="0">
+              <a:buNone/>
+            </a:pPr>
+            <a:r>
+              <a:rPr lang="en-US" sz="1400" b="1" dirty="0">
+                <a:solidFill>
+                  <a:srgbClr val="1F4E9C"/>
+                </a:solidFill>
+                <a:latin typeface="微软雅黑" pitchFamily="34" charset="0"/>
+                <a:ea typeface="微软雅黑" pitchFamily="34" charset="-122"/>
+                <a:cs typeface="微软雅黑" pitchFamily="34" charset="-120"/>
+              </a:rPr>
+              <a:t>本节难忘时刻</a:t>
+            </a:r>
+            <a:endParaRPr lang="en-US" sz="1400" dirty="0"/>
           </a:p>
         </p:txBody>
       </p:sp>
@@ -8051,12 +8545,13 @@
             <a:avLst/>
           </a:prstGeom>
           <a:noFill/>
+          <a:ln/>
         </p:spPr>
         <p:txBody>
           <a:bodyPr wrap="square" rtlCol="0" anchor="ctr"/>
           <a:lstStyle/>
           <a:p>
-            <a:pPr marL="0" indent="0" algn="l">
+            <a:pPr algn="l" indent="0" marL="0">
               <a:buNone/>
             </a:pPr>
             <a:r>
@@ -8064,9 +8559,9 @@
                 <a:solidFill>
                   <a:srgbClr val="1F2329"/>
                 </a:solidFill>
-                <a:latin typeface="微软雅黑" panose="020B0503020204020204" pitchFamily="34" charset="-122"/>
-                <a:ea typeface="微软雅黑" panose="020B0503020204020204" pitchFamily="34" charset="-122"/>
-                <a:cs typeface="微软雅黑" panose="020B0503020204020204" pitchFamily="34" charset="-120"/>
+                <a:latin typeface="微软雅黑" pitchFamily="34" charset="0"/>
+                <a:ea typeface="微软雅黑" pitchFamily="34" charset="-122"/>
+                <a:cs typeface="微软雅黑" pitchFamily="34" charset="-120"/>
               </a:rPr>
               <a:t>int a[5]，最大下标是几？</a:t>
             </a:r>
@@ -8114,12 +8609,13 @@
             <a:avLst/>
           </a:prstGeom>
           <a:noFill/>
+          <a:ln/>
         </p:spPr>
         <p:txBody>
           <a:bodyPr wrap="square" rtlCol="0" anchor="t"/>
           <a:lstStyle/>
           <a:p>
-            <a:pPr marL="0" indent="0" algn="l">
+            <a:pPr algn="l" indent="0" marL="0">
               <a:lnSpc>
                 <a:spcPct val="125000"/>
               </a:lnSpc>
@@ -8130,9 +8626,9 @@
                 <a:solidFill>
                   <a:srgbClr val="1F2329"/>
                 </a:solidFill>
-                <a:latin typeface="Consolas" panose="020B0609020204030204" pitchFamily="34" charset="0"/>
-                <a:ea typeface="Consolas" panose="020B0609020204030204" pitchFamily="34" charset="-122"/>
-                <a:cs typeface="Consolas" panose="020B0609020204030204" pitchFamily="34" charset="-120"/>
+                <a:latin typeface="Consolas" pitchFamily="34" charset="0"/>
+                <a:ea typeface="Consolas" pitchFamily="34" charset="-122"/>
+                <a:cs typeface="Consolas" pitchFamily="34" charset="-120"/>
               </a:rPr>
               <a:t>int a[5];
 a[5] = 10;                  // 这一行，越界了！
@@ -8157,12 +8653,13 @@
             <a:avLst/>
           </a:prstGeom>
           <a:noFill/>
+          <a:ln/>
         </p:spPr>
         <p:txBody>
           <a:bodyPr wrap="square" rtlCol="0" anchor="t"/>
           <a:lstStyle/>
           <a:p>
-            <a:pPr marL="0" indent="0" algn="l">
+            <a:pPr algn="l" indent="0" marL="0">
               <a:lnSpc>
                 <a:spcPct val="115000"/>
               </a:lnSpc>
@@ -8173,12 +8670,18 @@
                 <a:solidFill>
                   <a:srgbClr val="1F4E9C"/>
                 </a:solidFill>
-                <a:latin typeface="微软雅黑" panose="020B0503020204020204" pitchFamily="34" charset="-122"/>
-                <a:ea typeface="微软雅黑" panose="020B0503020204020204" pitchFamily="34" charset="-122"/>
-                <a:cs typeface="微软雅黑" panose="020B0503020204020204" pitchFamily="34" charset="-120"/>
+                <a:latin typeface="微软雅黑" pitchFamily="34" charset="0"/>
+                <a:ea typeface="微软雅黑" pitchFamily="34" charset="-122"/>
+                <a:cs typeface="微软雅黑" pitchFamily="34" charset="-120"/>
               </a:rPr>
               <a:t>•  </a:t>
             </a:r>
+            <a:pPr algn="l" indent="0" marL="0">
+              <a:lnSpc>
+                <a:spcPct val="115000"/>
+              </a:lnSpc>
+              <a:buNone/>
+            </a:pPr>
             <a:r>
               <a:rPr lang="en-US" sz="1800" dirty="0">
                 <a:solidFill>
@@ -8187,6 +8690,12 @@
               </a:rPr>
               <a:t>a[5]是5个盒子，下标是 </a:t>
             </a:r>
+            <a:pPr algn="l" indent="0" marL="0">
+              <a:lnSpc>
+                <a:spcPct val="115000"/>
+              </a:lnSpc>
+              <a:buNone/>
+            </a:pPr>
             <a:r>
               <a:rPr lang="en-US" sz="1800" b="1" dirty="0">
                 <a:solidFill>
@@ -8195,6 +8704,12 @@
               </a:rPr>
               <a:t>0、1、2、3、4</a:t>
             </a:r>
+            <a:pPr algn="l" indent="0" marL="0">
+              <a:lnSpc>
+                <a:spcPct val="115000"/>
+              </a:lnSpc>
+              <a:buNone/>
+            </a:pPr>
             <a:r>
               <a:rPr lang="en-US" sz="1800" dirty="0">
                 <a:solidFill>
@@ -8222,12 +8737,13 @@
             <a:avLst/>
           </a:prstGeom>
           <a:noFill/>
+          <a:ln/>
         </p:spPr>
         <p:txBody>
           <a:bodyPr wrap="square" rtlCol="0" anchor="t"/>
           <a:lstStyle/>
           <a:p>
-            <a:pPr marL="0" indent="0" algn="l">
+            <a:pPr algn="l" indent="0" marL="0">
               <a:lnSpc>
                 <a:spcPct val="115000"/>
               </a:lnSpc>
@@ -8238,12 +8754,18 @@
                 <a:solidFill>
                   <a:srgbClr val="1F4E9C"/>
                 </a:solidFill>
-                <a:latin typeface="微软雅黑" panose="020B0503020204020204" pitchFamily="34" charset="-122"/>
-                <a:ea typeface="微软雅黑" panose="020B0503020204020204" pitchFamily="34" charset="-122"/>
-                <a:cs typeface="微软雅黑" panose="020B0503020204020204" pitchFamily="34" charset="-120"/>
+                <a:latin typeface="微软雅黑" pitchFamily="34" charset="0"/>
+                <a:ea typeface="微软雅黑" pitchFamily="34" charset="-122"/>
+                <a:cs typeface="微软雅黑" pitchFamily="34" charset="-120"/>
               </a:rPr>
               <a:t>•  </a:t>
             </a:r>
+            <a:pPr algn="l" indent="0" marL="0">
+              <a:lnSpc>
+                <a:spcPct val="115000"/>
+              </a:lnSpc>
+              <a:buNone/>
+            </a:pPr>
             <a:r>
               <a:rPr lang="en-US" sz="1800" dirty="0">
                 <a:solidFill>
@@ -8252,6 +8774,12 @@
               </a:rPr>
               <a:t>最大下标是 </a:t>
             </a:r>
+            <a:pPr algn="l" indent="0" marL="0">
+              <a:lnSpc>
+                <a:spcPct val="115000"/>
+              </a:lnSpc>
+              <a:buNone/>
+            </a:pPr>
             <a:r>
               <a:rPr lang="en-US" sz="1800" b="1" dirty="0">
                 <a:solidFill>
@@ -8260,6 +8788,12 @@
               </a:rPr>
               <a:t>长度减1</a:t>
             </a:r>
+            <a:pPr algn="l" indent="0" marL="0">
+              <a:lnSpc>
+                <a:spcPct val="115000"/>
+              </a:lnSpc>
+              <a:buNone/>
+            </a:pPr>
             <a:r>
               <a:rPr lang="en-US" sz="1800" dirty="0">
                 <a:solidFill>
@@ -8287,12 +8821,13 @@
             <a:avLst/>
           </a:prstGeom>
           <a:noFill/>
+          <a:ln/>
         </p:spPr>
         <p:txBody>
           <a:bodyPr wrap="square" rtlCol="0" anchor="t"/>
           <a:lstStyle/>
           <a:p>
-            <a:pPr marL="0" indent="0" algn="l">
+            <a:pPr algn="l" indent="0" marL="0">
               <a:lnSpc>
                 <a:spcPct val="115000"/>
               </a:lnSpc>
@@ -8303,12 +8838,18 @@
                 <a:solidFill>
                   <a:srgbClr val="1F4E9C"/>
                 </a:solidFill>
-                <a:latin typeface="微软雅黑" panose="020B0503020204020204" pitchFamily="34" charset="-122"/>
-                <a:ea typeface="微软雅黑" panose="020B0503020204020204" pitchFamily="34" charset="-122"/>
-                <a:cs typeface="微软雅黑" panose="020B0503020204020204" pitchFamily="34" charset="-120"/>
+                <a:latin typeface="微软雅黑" pitchFamily="34" charset="0"/>
+                <a:ea typeface="微软雅黑" pitchFamily="34" charset="-122"/>
+                <a:cs typeface="微软雅黑" pitchFamily="34" charset="-120"/>
               </a:rPr>
               <a:t>•  </a:t>
             </a:r>
+            <a:pPr algn="l" indent="0" marL="0">
+              <a:lnSpc>
+                <a:spcPct val="115000"/>
+              </a:lnSpc>
+              <a:buNone/>
+            </a:pPr>
             <a:r>
               <a:rPr lang="en-US" sz="1800" dirty="0">
                 <a:solidFill>
@@ -8317,6 +8858,12 @@
               </a:rPr>
               <a:t>越界</a:t>
             </a:r>
+            <a:pPr algn="l" indent="0" marL="0">
+              <a:lnSpc>
+                <a:spcPct val="115000"/>
+              </a:lnSpc>
+              <a:buNone/>
+            </a:pPr>
             <a:r>
               <a:rPr lang="en-US" sz="1800" b="1" dirty="0">
                 <a:solidFill>
@@ -8325,6 +8872,12 @@
               </a:rPr>
               <a:t>不报错</a:t>
             </a:r>
+            <a:pPr algn="l" indent="0" marL="0">
+              <a:lnSpc>
+                <a:spcPct val="115000"/>
+              </a:lnSpc>
+              <a:buNone/>
+            </a:pPr>
             <a:r>
               <a:rPr lang="en-US" sz="1800" dirty="0">
                 <a:solidFill>
@@ -8347,7 +8900,7 @@
 
 <file path=ppt/slides/slide9.xml><?xml version="1.0" encoding="utf-8"?>
 <p:sld xmlns:a="http://schemas.openxmlformats.org/drawingml/2006/main" xmlns:r="http://schemas.openxmlformats.org/officeDocument/2006/relationships" xmlns:p="http://schemas.openxmlformats.org/presentationml/2006/main">
-  <p:cSld>
+  <p:cSld name="Slide 9">
     <p:bg>
       <p:bgPr>
         <a:blipFill dpi="0" rotWithShape="1">
@@ -8391,12 +8944,13 @@
             <a:avLst/>
           </a:prstGeom>
           <a:noFill/>
+          <a:ln/>
         </p:spPr>
         <p:txBody>
           <a:bodyPr wrap="square" rtlCol="0" anchor="ctr"/>
           <a:lstStyle/>
           <a:p>
-            <a:pPr marL="0" indent="0" algn="r">
+            <a:pPr algn="r" indent="0" marL="0">
               <a:buNone/>
             </a:pPr>
             <a:r>
@@ -8404,9 +8958,9 @@
                 <a:solidFill>
                   <a:srgbClr val="8A9099"/>
                 </a:solidFill>
-                <a:latin typeface="微软雅黑" panose="020B0503020204020204" pitchFamily="34" charset="-122"/>
-                <a:ea typeface="微软雅黑" panose="020B0503020204020204" pitchFamily="34" charset="-122"/>
-                <a:cs typeface="微软雅黑" panose="020B0503020204020204" pitchFamily="34" charset="-120"/>
+                <a:latin typeface="微软雅黑" pitchFamily="34" charset="0"/>
+                <a:ea typeface="微软雅黑" pitchFamily="34" charset="-122"/>
+                <a:cs typeface="微软雅黑" pitchFamily="34" charset="-120"/>
               </a:rPr>
               <a:t>9 / 15</a:t>
             </a:r>
@@ -8429,12 +8983,13 @@
             <a:avLst/>
           </a:prstGeom>
           <a:noFill/>
+          <a:ln/>
         </p:spPr>
         <p:txBody>
           <a:bodyPr wrap="square" rtlCol="0" anchor="ctr"/>
           <a:lstStyle/>
           <a:p>
-            <a:pPr marL="0" indent="0" algn="l">
+            <a:pPr algn="l" indent="0" marL="0">
               <a:buNone/>
             </a:pPr>
             <a:r>
@@ -8442,9 +8997,9 @@
                 <a:solidFill>
                   <a:srgbClr val="1F4E9C"/>
                 </a:solidFill>
-                <a:latin typeface="微软雅黑" panose="020B0503020204020204" pitchFamily="34" charset="-122"/>
-                <a:ea typeface="微软雅黑" panose="020B0503020204020204" pitchFamily="34" charset="-122"/>
-                <a:cs typeface="微软雅黑" panose="020B0503020204020204" pitchFamily="34" charset="-120"/>
+                <a:latin typeface="微软雅黑" pitchFamily="34" charset="0"/>
+                <a:ea typeface="微软雅黑" pitchFamily="34" charset="-122"/>
+                <a:cs typeface="微软雅黑" pitchFamily="34" charset="-120"/>
               </a:rPr>
               <a:t>初始化与遍历</a:t>
             </a:r>
@@ -8467,12 +9022,13 @@
             <a:avLst/>
           </a:prstGeom>
           <a:noFill/>
+          <a:ln/>
         </p:spPr>
         <p:txBody>
           <a:bodyPr wrap="square" rtlCol="0" anchor="ctr"/>
           <a:lstStyle/>
           <a:p>
-            <a:pPr marL="0" indent="0" algn="l">
+            <a:pPr algn="l" indent="0" marL="0">
               <a:buNone/>
             </a:pPr>
             <a:r>
@@ -8480,9 +9036,9 @@
                 <a:solidFill>
                   <a:srgbClr val="1F2329"/>
                 </a:solidFill>
-                <a:latin typeface="微软雅黑" panose="020B0503020204020204" pitchFamily="34" charset="-122"/>
-                <a:ea typeface="微软雅黑" panose="020B0503020204020204" pitchFamily="34" charset="-122"/>
-                <a:cs typeface="微软雅黑" panose="020B0503020204020204" pitchFamily="34" charset="-120"/>
+                <a:latin typeface="微软雅黑" pitchFamily="34" charset="0"/>
+                <a:ea typeface="微软雅黑" pitchFamily="34" charset="-122"/>
+                <a:cs typeface="微软雅黑" pitchFamily="34" charset="-120"/>
               </a:rPr>
               <a:t>数组的声明、初始化、for遍历</a:t>
             </a:r>
@@ -8530,12 +9086,13 @@
             <a:avLst/>
           </a:prstGeom>
           <a:noFill/>
+          <a:ln/>
         </p:spPr>
         <p:txBody>
           <a:bodyPr wrap="square" rtlCol="0" anchor="t"/>
           <a:lstStyle/>
           <a:p>
-            <a:pPr marL="0" indent="0" algn="l">
+            <a:pPr algn="l" indent="0" marL="0">
               <a:lnSpc>
                 <a:spcPct val="125000"/>
               </a:lnSpc>
@@ -8546,9 +9103,9 @@
                 <a:solidFill>
                   <a:srgbClr val="1F2329"/>
                 </a:solidFill>
-                <a:latin typeface="Consolas" panose="020B0609020204030204" pitchFamily="34" charset="0"/>
-                <a:ea typeface="Consolas" panose="020B0609020204030204" pitchFamily="34" charset="-122"/>
-                <a:cs typeface="Consolas" panose="020B0609020204030204" pitchFamily="34" charset="-120"/>
+                <a:latin typeface="Consolas" pitchFamily="34" charset="0"/>
+                <a:ea typeface="Consolas" pitchFamily="34" charset="-122"/>
+                <a:cs typeface="Consolas" pitchFamily="34" charset="-120"/>
               </a:rPr>
               <a:t>int a[5] = {3, 1, 4, 1, 5};        // 声明的同时装好
 for(int i = 0; i &lt; 5; i++){
@@ -8575,12 +9132,13 @@
             <a:avLst/>
           </a:prstGeom>
           <a:noFill/>
+          <a:ln/>
         </p:spPr>
         <p:txBody>
           <a:bodyPr wrap="square" rtlCol="0" anchor="t"/>
           <a:lstStyle/>
           <a:p>
-            <a:pPr marL="0" indent="0" algn="l">
+            <a:pPr algn="l" indent="0" marL="0">
               <a:lnSpc>
                 <a:spcPct val="115000"/>
               </a:lnSpc>
@@ -8591,12 +9149,18 @@
                 <a:solidFill>
                   <a:srgbClr val="1F4E9C"/>
                 </a:solidFill>
-                <a:latin typeface="微软雅黑" panose="020B0503020204020204" pitchFamily="34" charset="-122"/>
-                <a:ea typeface="微软雅黑" panose="020B0503020204020204" pitchFamily="34" charset="-122"/>
-                <a:cs typeface="微软雅黑" panose="020B0503020204020204" pitchFamily="34" charset="-120"/>
+                <a:latin typeface="微软雅黑" pitchFamily="34" charset="0"/>
+                <a:ea typeface="微软雅黑" pitchFamily="34" charset="-122"/>
+                <a:cs typeface="微软雅黑" pitchFamily="34" charset="-120"/>
               </a:rPr>
               <a:t>•  </a:t>
             </a:r>
+            <a:pPr algn="l" indent="0" marL="0">
+              <a:lnSpc>
+                <a:spcPct val="115000"/>
+              </a:lnSpc>
+              <a:buNone/>
+            </a:pPr>
             <a:r>
               <a:rPr lang="en-US" sz="1800" dirty="0">
                 <a:solidFill>
@@ -8605,6 +9169,12 @@
               </a:rPr>
               <a:t>花括号一次性装好，叫</a:t>
             </a:r>
+            <a:pPr algn="l" indent="0" marL="0">
+              <a:lnSpc>
+                <a:spcPct val="115000"/>
+              </a:lnSpc>
+              <a:buNone/>
+            </a:pPr>
             <a:r>
               <a:rPr lang="en-US" sz="1800" b="1" dirty="0">
                 <a:solidFill>
@@ -8632,12 +9202,13 @@
             <a:avLst/>
           </a:prstGeom>
           <a:noFill/>
+          <a:ln/>
         </p:spPr>
         <p:txBody>
           <a:bodyPr wrap="square" rtlCol="0" anchor="t"/>
           <a:lstStyle/>
           <a:p>
-            <a:pPr marL="0" indent="0" algn="l">
+            <a:pPr algn="l" indent="0" marL="0">
               <a:lnSpc>
                 <a:spcPct val="115000"/>
               </a:lnSpc>
@@ -8648,12 +9219,18 @@
                 <a:solidFill>
                   <a:srgbClr val="1F4E9C"/>
                 </a:solidFill>
-                <a:latin typeface="微软雅黑" panose="020B0503020204020204" pitchFamily="34" charset="-122"/>
-                <a:ea typeface="微软雅黑" panose="020B0503020204020204" pitchFamily="34" charset="-122"/>
-                <a:cs typeface="微软雅黑" panose="020B0503020204020204" pitchFamily="34" charset="-120"/>
+                <a:latin typeface="微软雅黑" pitchFamily="34" charset="0"/>
+                <a:ea typeface="微软雅黑" pitchFamily="34" charset="-122"/>
+                <a:cs typeface="微软雅黑" pitchFamily="34" charset="-120"/>
               </a:rPr>
               <a:t>•  </a:t>
             </a:r>
+            <a:pPr algn="l" indent="0" marL="0">
+              <a:lnSpc>
+                <a:spcPct val="115000"/>
+              </a:lnSpc>
+              <a:buNone/>
+            </a:pPr>
             <a:r>
               <a:rPr lang="en-US" sz="1800" dirty="0">
                 <a:solidFill>
@@ -8662,6 +9239,12 @@
               </a:rPr>
               <a:t>遍历数组的标准姿势：</a:t>
             </a:r>
+            <a:pPr algn="l" indent="0" marL="0">
+              <a:lnSpc>
+                <a:spcPct val="115000"/>
+              </a:lnSpc>
+              <a:buNone/>
+            </a:pPr>
             <a:r>
               <a:rPr lang="en-US" sz="1800" b="1" dirty="0">
                 <a:solidFill>
@@ -8689,12 +9272,13 @@
             <a:avLst/>
           </a:prstGeom>
           <a:noFill/>
+          <a:ln/>
         </p:spPr>
         <p:txBody>
           <a:bodyPr wrap="square" rtlCol="0" anchor="t"/>
           <a:lstStyle/>
           <a:p>
-            <a:pPr marL="0" indent="0" algn="l">
+            <a:pPr algn="l" indent="0" marL="0">
               <a:lnSpc>
                 <a:spcPct val="115000"/>
               </a:lnSpc>
@@ -8705,12 +9289,18 @@
                 <a:solidFill>
                   <a:srgbClr val="1F4E9C"/>
                 </a:solidFill>
-                <a:latin typeface="微软雅黑" panose="020B0503020204020204" pitchFamily="34" charset="-122"/>
-                <a:ea typeface="微软雅黑" panose="020B0503020204020204" pitchFamily="34" charset="-122"/>
-                <a:cs typeface="微软雅黑" panose="020B0503020204020204" pitchFamily="34" charset="-120"/>
+                <a:latin typeface="微软雅黑" pitchFamily="34" charset="0"/>
+                <a:ea typeface="微软雅黑" pitchFamily="34" charset="-122"/>
+                <a:cs typeface="微软雅黑" pitchFamily="34" charset="-120"/>
               </a:rPr>
               <a:t>•  </a:t>
             </a:r>
+            <a:pPr algn="l" indent="0" marL="0">
+              <a:lnSpc>
+                <a:spcPct val="115000"/>
+              </a:lnSpc>
+              <a:buNone/>
+            </a:pPr>
             <a:r>
               <a:rPr lang="en-US" sz="1800" dirty="0">
                 <a:solidFill>
@@ -8774,7 +9364,7 @@
     </a:clrScheme>
     <a:fontScheme name="Office">
       <a:majorFont>
-        <a:latin typeface="Calibri Light"/>
+        <a:latin typeface="Calibri Light" panose="020F0302020204030204"/>
         <a:ea typeface=""/>
         <a:cs typeface=""/>
         <a:font script="Jpan" typeface="游ゴシック Light"/>
@@ -8807,9 +9397,26 @@
         <a:font script="Viet" typeface="Times New Roman"/>
         <a:font script="Uigh" typeface="Microsoft Uighur"/>
         <a:font script="Geor" typeface="Sylfaen"/>
+        <a:font script="Armn" typeface="Arial"/>
+        <a:font script="Bugi" typeface="Leelawadee UI"/>
+        <a:font script="Bopo" typeface="Microsoft JhengHei"/>
+        <a:font script="Java" typeface="Javanese Text"/>
+        <a:font script="Lisu" typeface="Segoe UI"/>
+        <a:font script="Mymr" typeface="Myanmar Text"/>
+        <a:font script="Nkoo" typeface="Ebrima"/>
+        <a:font script="Olck" typeface="Nirmala UI"/>
+        <a:font script="Osma" typeface="Ebrima"/>
+        <a:font script="Phag" typeface="Phagspa"/>
+        <a:font script="Syrn" typeface="Estrangelo Edessa"/>
+        <a:font script="Syrj" typeface="Estrangelo Edessa"/>
+        <a:font script="Syre" typeface="Estrangelo Edessa"/>
+        <a:font script="Sora" typeface="Nirmala UI"/>
+        <a:font script="Tale" typeface="Microsoft Tai Le"/>
+        <a:font script="Talu" typeface="Microsoft New Tai Lue"/>
+        <a:font script="Tfng" typeface="Ebrima"/>
       </a:majorFont>
       <a:minorFont>
-        <a:latin typeface="Calibri"/>
+        <a:latin typeface="Calibri" panose="020F0502020204030204"/>
         <a:ea typeface=""/>
         <a:cs typeface=""/>
         <a:font script="Jpan" typeface="游ゴシック"/>
@@ -8842,6 +9449,23 @@
         <a:font script="Viet" typeface="Arial"/>
         <a:font script="Uigh" typeface="Microsoft Uighur"/>
         <a:font script="Geor" typeface="Sylfaen"/>
+        <a:font script="Armn" typeface="Arial"/>
+        <a:font script="Bugi" typeface="Leelawadee UI"/>
+        <a:font script="Bopo" typeface="Microsoft JhengHei"/>
+        <a:font script="Java" typeface="Javanese Text"/>
+        <a:font script="Lisu" typeface="Segoe UI"/>
+        <a:font script="Mymr" typeface="Myanmar Text"/>
+        <a:font script="Nkoo" typeface="Ebrima"/>
+        <a:font script="Olck" typeface="Nirmala UI"/>
+        <a:font script="Osma" typeface="Ebrima"/>
+        <a:font script="Phag" typeface="Phagspa"/>
+        <a:font script="Syrn" typeface="Estrangelo Edessa"/>
+        <a:font script="Syrj" typeface="Estrangelo Edessa"/>
+        <a:font script="Syre" typeface="Estrangelo Edessa"/>
+        <a:font script="Sora" typeface="Nirmala UI"/>
+        <a:font script="Tale" typeface="Microsoft Tai Le"/>
+        <a:font script="Talu" typeface="Microsoft New Tai Lue"/>
+        <a:font script="Tfng" typeface="Ebrima"/>
       </a:minorFont>
     </a:fontScheme>
     <a:fmtScheme name="Office">
@@ -8982,265 +9606,8 @@
       </a:bgFillStyleLst>
     </a:fmtScheme>
   </a:themeElements>
-  <a:extLst>
-    <a:ext uri="{05A4C25C-085E-4340-85A3-A5531E510DB2}">
-      <thm15:themeFamily xmlns:thm15="http://schemas.microsoft.com/office/thememl/2012/main" name="Office Theme" id="{62F939B6-93AF-4DB8-9C6B-D6C7DFDC589F}" vid="{4A3C46E8-61CC-4603-A589-7422A47A8E4A}"/>
-    </a:ext>
-  </a:extLst>
-</a:theme>
-</file>
-
-<file path=ppt/theme/theme2.xml><?xml version="1.0" encoding="utf-8"?>
-<a:theme xmlns:a="http://schemas.openxmlformats.org/drawingml/2006/main" name="Office Theme">
-  <a:themeElements>
-    <a:clrScheme name="Office">
-      <a:dk1>
-        <a:sysClr val="windowText" lastClr="000000"/>
-      </a:dk1>
-      <a:lt1>
-        <a:sysClr val="window" lastClr="FFFFFF"/>
-      </a:lt1>
-      <a:dk2>
-        <a:srgbClr val="44546A"/>
-      </a:dk2>
-      <a:lt2>
-        <a:srgbClr val="E7E6E6"/>
-      </a:lt2>
-      <a:accent1>
-        <a:srgbClr val="4472C4"/>
-      </a:accent1>
-      <a:accent2>
-        <a:srgbClr val="ED7D31"/>
-      </a:accent2>
-      <a:accent3>
-        <a:srgbClr val="A5A5A5"/>
-      </a:accent3>
-      <a:accent4>
-        <a:srgbClr val="FFC000"/>
-      </a:accent4>
-      <a:accent5>
-        <a:srgbClr val="5B9BD5"/>
-      </a:accent5>
-      <a:accent6>
-        <a:srgbClr val="70AD47"/>
-      </a:accent6>
-      <a:hlink>
-        <a:srgbClr val="0563C1"/>
-      </a:hlink>
-      <a:folHlink>
-        <a:srgbClr val="954F72"/>
-      </a:folHlink>
-    </a:clrScheme>
-    <a:fontScheme name="Office">
-      <a:majorFont>
-        <a:latin typeface="Calibri Light"/>
-        <a:ea typeface=""/>
-        <a:cs typeface=""/>
-        <a:font script="Jpan" typeface="游ゴシック Light"/>
-        <a:font script="Hang" typeface="맑은 고딕"/>
-        <a:font script="Hans" typeface="等线 Light"/>
-        <a:font script="Hant" typeface="新細明體"/>
-        <a:font script="Arab" typeface="Times New Roman"/>
-        <a:font script="Hebr" typeface="Times New Roman"/>
-        <a:font script="Thai" typeface="Angsana New"/>
-        <a:font script="Ethi" typeface="Nyala"/>
-        <a:font script="Beng" typeface="Vrinda"/>
-        <a:font script="Gujr" typeface="Shruti"/>
-        <a:font script="Khmr" typeface="MoolBoran"/>
-        <a:font script="Knda" typeface="Tunga"/>
-        <a:font script="Guru" typeface="Raavi"/>
-        <a:font script="Cans" typeface="Euphemia"/>
-        <a:font script="Cher" typeface="Plantagenet Cherokee"/>
-        <a:font script="Yiii" typeface="Microsoft Yi Baiti"/>
-        <a:font script="Tibt" typeface="Microsoft Himalaya"/>
-        <a:font script="Thaa" typeface="MV Boli"/>
-        <a:font script="Deva" typeface="Mangal"/>
-        <a:font script="Telu" typeface="Gautami"/>
-        <a:font script="Taml" typeface="Latha"/>
-        <a:font script="Syrc" typeface="Estrangelo Edessa"/>
-        <a:font script="Orya" typeface="Kalinga"/>
-        <a:font script="Mlym" typeface="Kartika"/>
-        <a:font script="Laoo" typeface="DokChampa"/>
-        <a:font script="Sinh" typeface="Iskoola Pota"/>
-        <a:font script="Mong" typeface="Mongolian Baiti"/>
-        <a:font script="Viet" typeface="Times New Roman"/>
-        <a:font script="Uigh" typeface="Microsoft Uighur"/>
-        <a:font script="Geor" typeface="Sylfaen"/>
-      </a:majorFont>
-      <a:minorFont>
-        <a:latin typeface="Calibri"/>
-        <a:ea typeface=""/>
-        <a:cs typeface=""/>
-        <a:font script="Jpan" typeface="游ゴシック"/>
-        <a:font script="Hang" typeface="맑은 고딕"/>
-        <a:font script="Hans" typeface="等线"/>
-        <a:font script="Hant" typeface="新細明體"/>
-        <a:font script="Arab" typeface="Arial"/>
-        <a:font script="Hebr" typeface="Arial"/>
-        <a:font script="Thai" typeface="Cordia New"/>
-        <a:font script="Ethi" typeface="Nyala"/>
-        <a:font script="Beng" typeface="Vrinda"/>
-        <a:font script="Gujr" typeface="Shruti"/>
-        <a:font script="Khmr" typeface="DaunPenh"/>
-        <a:font script="Knda" typeface="Tunga"/>
-        <a:font script="Guru" typeface="Raavi"/>
-        <a:font script="Cans" typeface="Euphemia"/>
-        <a:font script="Cher" typeface="Plantagenet Cherokee"/>
-        <a:font script="Yiii" typeface="Microsoft Yi Baiti"/>
-        <a:font script="Tibt" typeface="Microsoft Himalaya"/>
-        <a:font script="Thaa" typeface="MV Boli"/>
-        <a:font script="Deva" typeface="Mangal"/>
-        <a:font script="Telu" typeface="Gautami"/>
-        <a:font script="Taml" typeface="Latha"/>
-        <a:font script="Syrc" typeface="Estrangelo Edessa"/>
-        <a:font script="Orya" typeface="Kalinga"/>
-        <a:font script="Mlym" typeface="Kartika"/>
-        <a:font script="Laoo" typeface="DokChampa"/>
-        <a:font script="Sinh" typeface="Iskoola Pota"/>
-        <a:font script="Mong" typeface="Mongolian Baiti"/>
-        <a:font script="Viet" typeface="Arial"/>
-        <a:font script="Uigh" typeface="Microsoft Uighur"/>
-        <a:font script="Geor" typeface="Sylfaen"/>
-      </a:minorFont>
-    </a:fontScheme>
-    <a:fmtScheme name="Office">
-      <a:fillStyleLst>
-        <a:solidFill>
-          <a:schemeClr val="phClr"/>
-        </a:solidFill>
-        <a:gradFill rotWithShape="1">
-          <a:gsLst>
-            <a:gs pos="0">
-              <a:schemeClr val="phClr">
-                <a:lumMod val="110000"/>
-                <a:satMod val="105000"/>
-                <a:tint val="67000"/>
-              </a:schemeClr>
-            </a:gs>
-            <a:gs pos="50000">
-              <a:schemeClr val="phClr">
-                <a:lumMod val="105000"/>
-                <a:satMod val="103000"/>
-                <a:tint val="73000"/>
-              </a:schemeClr>
-            </a:gs>
-            <a:gs pos="100000">
-              <a:schemeClr val="phClr">
-                <a:lumMod val="105000"/>
-                <a:satMod val="109000"/>
-                <a:tint val="81000"/>
-              </a:schemeClr>
-            </a:gs>
-          </a:gsLst>
-          <a:lin ang="5400000" scaled="0"/>
-        </a:gradFill>
-        <a:gradFill rotWithShape="1">
-          <a:gsLst>
-            <a:gs pos="0">
-              <a:schemeClr val="phClr">
-                <a:satMod val="103000"/>
-                <a:lumMod val="102000"/>
-                <a:tint val="94000"/>
-              </a:schemeClr>
-            </a:gs>
-            <a:gs pos="50000">
-              <a:schemeClr val="phClr">
-                <a:satMod val="110000"/>
-                <a:lumMod val="100000"/>
-                <a:shade val="100000"/>
-              </a:schemeClr>
-            </a:gs>
-            <a:gs pos="100000">
-              <a:schemeClr val="phClr">
-                <a:lumMod val="99000"/>
-                <a:satMod val="120000"/>
-                <a:shade val="78000"/>
-              </a:schemeClr>
-            </a:gs>
-          </a:gsLst>
-          <a:lin ang="5400000" scaled="0"/>
-        </a:gradFill>
-      </a:fillStyleLst>
-      <a:lnStyleLst>
-        <a:ln w="6350" cap="flat" cmpd="sng" algn="ctr">
-          <a:solidFill>
-            <a:schemeClr val="phClr"/>
-          </a:solidFill>
-          <a:prstDash val="solid"/>
-          <a:miter lim="800000"/>
-        </a:ln>
-        <a:ln w="12700" cap="flat" cmpd="sng" algn="ctr">
-          <a:solidFill>
-            <a:schemeClr val="phClr"/>
-          </a:solidFill>
-          <a:prstDash val="solid"/>
-          <a:miter lim="800000"/>
-        </a:ln>
-        <a:ln w="19050" cap="flat" cmpd="sng" algn="ctr">
-          <a:solidFill>
-            <a:schemeClr val="phClr"/>
-          </a:solidFill>
-          <a:prstDash val="solid"/>
-          <a:miter lim="800000"/>
-        </a:ln>
-      </a:lnStyleLst>
-      <a:effectStyleLst>
-        <a:effectStyle>
-          <a:effectLst/>
-        </a:effectStyle>
-        <a:effectStyle>
-          <a:effectLst/>
-        </a:effectStyle>
-        <a:effectStyle>
-          <a:effectLst>
-            <a:outerShdw blurRad="57150" dist="19050" dir="5400000" algn="ctr" rotWithShape="0">
-              <a:srgbClr val="000000">
-                <a:alpha val="63000"/>
-              </a:srgbClr>
-            </a:outerShdw>
-          </a:effectLst>
-        </a:effectStyle>
-      </a:effectStyleLst>
-      <a:bgFillStyleLst>
-        <a:solidFill>
-          <a:schemeClr val="phClr"/>
-        </a:solidFill>
-        <a:solidFill>
-          <a:schemeClr val="phClr">
-            <a:tint val="95000"/>
-            <a:satMod val="170000"/>
-          </a:schemeClr>
-        </a:solidFill>
-        <a:gradFill rotWithShape="1">
-          <a:gsLst>
-            <a:gs pos="0">
-              <a:schemeClr val="phClr">
-                <a:tint val="93000"/>
-                <a:satMod val="150000"/>
-                <a:shade val="98000"/>
-                <a:lumMod val="102000"/>
-              </a:schemeClr>
-            </a:gs>
-            <a:gs pos="50000">
-              <a:schemeClr val="phClr">
-                <a:tint val="98000"/>
-                <a:satMod val="130000"/>
-                <a:shade val="90000"/>
-                <a:lumMod val="103000"/>
-              </a:schemeClr>
-            </a:gs>
-            <a:gs pos="100000">
-              <a:schemeClr val="phClr">
-                <a:shade val="63000"/>
-                <a:satMod val="120000"/>
-              </a:schemeClr>
-            </a:gs>
-          </a:gsLst>
-          <a:lin ang="5400000" scaled="0"/>
-        </a:gradFill>
-      </a:bgFillStyleLst>
-    </a:fmtScheme>
-  </a:themeElements>
+  <a:objectDefaults/>
+  <a:extraClrSchemeLst/>
   <a:extLst>
     <a:ext uri="{05A4C25C-085E-4340-85A3-A5531E510DB2}">
       <thm15:themeFamily xmlns:thm15="http://schemas.microsoft.com/office/thememl/2012/main" name="Office Theme" id="{62F939B6-93AF-4DB8-9C6B-D6C7DFDC589F}" vid="{4A3C46E8-61CC-4603-A589-7422A47A8E4A}"/>

--- a/课件/C1/C1-A-05/C1-A-05.pptx
+++ b/课件/C1/C1-A-05/C1-A-05.pptx
@@ -20,9 +20,11 @@
     <p:sldId id="268" r:id="rId14"/>
     <p:sldId id="269" r:id="rId15"/>
     <p:sldId id="270" r:id="rId16"/>
+    <p:sldId id="271" r:id="rId17"/>
+    <p:sldId id="272" r:id="rId18"/>
   </p:sldIdLst>
   <p:notesMasterIdLst>
-    <p:notesMasterId r:id="rId17"/>
+    <p:notesMasterId r:id="rId19"/>
   </p:notesMasterIdLst>
   <p:sldSz cx="12191695" cy="6858000"/>
   <p:notesSz cx="6858000" cy="12191695"/>
@@ -1068,6 +1070,182 @@
             <a:fld id="{F7021451-1387-4CA6-816F-3879F97B5CBC}" type="slidenum">
               <a:rPr lang="en-US"/>
               <a:t>15</a:t>
+            </a:fld>
+            <a:endParaRPr lang="en-US"/>
+          </a:p>
+        </p:txBody>
+      </p:sp>
+    </p:spTree>
+    <p:extLst>
+      <p:ext uri="{BB962C8B-B14F-4D97-AF65-F5344CB8AC3E}">
+        <p14:creationId xmlns:p14="http://schemas.microsoft.com/office/powerpoint/2010/main" val="1024086991"/>
+      </p:ext>
+    </p:extLst>
+  </p:cSld>
+  <p:clrMapOvr>
+    <a:masterClrMapping/>
+  </p:clrMapOvr>
+</p:notes>
+</file>
+
+<file path=ppt/notesSlides/notesSlide16.xml><?xml version="1.0" encoding="utf-8"?>
+<p:notes xmlns:a="http://schemas.openxmlformats.org/drawingml/2006/main" xmlns:r="http://schemas.openxmlformats.org/officeDocument/2006/relationships" xmlns:p="http://schemas.openxmlformats.org/presentationml/2006/main">
+  <p:cSld>
+    <p:spTree>
+      <p:nvGrpSpPr>
+        <p:cNvPr id="1" name=""/>
+        <p:cNvGrpSpPr/>
+        <p:nvPr/>
+      </p:nvGrpSpPr>
+      <p:grpSpPr>
+        <a:xfrm>
+          <a:off x="0" y="0"/>
+          <a:ext cx="0" cy="0"/>
+          <a:chOff x="0" y="0"/>
+          <a:chExt cx="0" cy="0"/>
+        </a:xfrm>
+      </p:grpSpPr>
+      <p:sp>
+        <p:nvSpPr>
+          <p:cNvPr id="2" name="Slide Image Placeholder 1"/>
+          <p:cNvSpPr>
+            <a:spLocks noGrp="1" noRot="1" noChangeAspect="1"/>
+          </p:cNvSpPr>
+          <p:nvPr>
+            <p:ph type="sldImg"/>
+          </p:nvPr>
+        </p:nvSpPr>
+        <p:spPr/>
+      </p:sp>
+      <p:sp>
+        <p:nvSpPr>
+          <p:cNvPr id="3" name="Notes Placeholder 2"/>
+          <p:cNvSpPr>
+            <a:spLocks noGrp="1"/>
+          </p:cNvSpPr>
+          <p:nvPr>
+            <p:ph type="body" idx="1"/>
+          </p:nvPr>
+        </p:nvSpPr>
+        <p:spPr/>
+        <p:txBody>
+          <a:bodyPr/>
+          <a:lstStyle/>
+          <a:p>
+            <a:r>
+              <a:rPr lang="en-US" dirty="0"/>
+              <a:t/>
+            </a:r>
+            <a:endParaRPr lang="en-US" dirty="0"/>
+          </a:p>
+        </p:txBody>
+      </p:sp>
+      <p:sp>
+        <p:nvSpPr>
+          <p:cNvPr id="4" name="Slide Number Placeholder 3"/>
+          <p:cNvSpPr>
+            <a:spLocks noGrp="1"/>
+          </p:cNvSpPr>
+          <p:nvPr>
+            <p:ph type="sldNum" sz="quarter" idx="10"/>
+          </p:nvPr>
+        </p:nvSpPr>
+        <p:spPr/>
+        <p:txBody>
+          <a:bodyPr/>
+          <a:lstStyle/>
+          <a:p>
+            <a:fld id="{F7021451-1387-4CA6-816F-3879F97B5CBC}" type="slidenum">
+              <a:rPr lang="en-US"/>
+              <a:t>16</a:t>
+            </a:fld>
+            <a:endParaRPr lang="en-US"/>
+          </a:p>
+        </p:txBody>
+      </p:sp>
+    </p:spTree>
+    <p:extLst>
+      <p:ext uri="{BB962C8B-B14F-4D97-AF65-F5344CB8AC3E}">
+        <p14:creationId xmlns:p14="http://schemas.microsoft.com/office/powerpoint/2010/main" val="1024086991"/>
+      </p:ext>
+    </p:extLst>
+  </p:cSld>
+  <p:clrMapOvr>
+    <a:masterClrMapping/>
+  </p:clrMapOvr>
+</p:notes>
+</file>
+
+<file path=ppt/notesSlides/notesSlide17.xml><?xml version="1.0" encoding="utf-8"?>
+<p:notes xmlns:a="http://schemas.openxmlformats.org/drawingml/2006/main" xmlns:r="http://schemas.openxmlformats.org/officeDocument/2006/relationships" xmlns:p="http://schemas.openxmlformats.org/presentationml/2006/main">
+  <p:cSld>
+    <p:spTree>
+      <p:nvGrpSpPr>
+        <p:cNvPr id="1" name=""/>
+        <p:cNvGrpSpPr/>
+        <p:nvPr/>
+      </p:nvGrpSpPr>
+      <p:grpSpPr>
+        <a:xfrm>
+          <a:off x="0" y="0"/>
+          <a:ext cx="0" cy="0"/>
+          <a:chOff x="0" y="0"/>
+          <a:chExt cx="0" cy="0"/>
+        </a:xfrm>
+      </p:grpSpPr>
+      <p:sp>
+        <p:nvSpPr>
+          <p:cNvPr id="2" name="Slide Image Placeholder 1"/>
+          <p:cNvSpPr>
+            <a:spLocks noGrp="1" noRot="1" noChangeAspect="1"/>
+          </p:cNvSpPr>
+          <p:nvPr>
+            <p:ph type="sldImg"/>
+          </p:nvPr>
+        </p:nvSpPr>
+        <p:spPr/>
+      </p:sp>
+      <p:sp>
+        <p:nvSpPr>
+          <p:cNvPr id="3" name="Notes Placeholder 2"/>
+          <p:cNvSpPr>
+            <a:spLocks noGrp="1"/>
+          </p:cNvSpPr>
+          <p:nvPr>
+            <p:ph type="body" idx="1"/>
+          </p:nvPr>
+        </p:nvSpPr>
+        <p:spPr/>
+        <p:txBody>
+          <a:bodyPr/>
+          <a:lstStyle/>
+          <a:p>
+            <a:r>
+              <a:rPr lang="en-US" dirty="0"/>
+              <a:t/>
+            </a:r>
+            <a:endParaRPr lang="en-US" dirty="0"/>
+          </a:p>
+        </p:txBody>
+      </p:sp>
+      <p:sp>
+        <p:nvSpPr>
+          <p:cNvPr id="4" name="Slide Number Placeholder 3"/>
+          <p:cNvSpPr>
+            <a:spLocks noGrp="1"/>
+          </p:cNvSpPr>
+          <p:nvPr>
+            <p:ph type="sldNum" sz="quarter" idx="10"/>
+          </p:nvPr>
+        </p:nvSpPr>
+        <p:spPr/>
+        <p:txBody>
+          <a:bodyPr/>
+          <a:lstStyle/>
+          <a:p>
+            <a:fld id="{F7021451-1387-4CA6-816F-3879F97B5CBC}" type="slidenum">
+              <a:rPr lang="en-US"/>
+              <a:t>17</a:t>
             </a:fld>
             <a:endParaRPr lang="en-US"/>
           </a:p>
@@ -2161,7 +2339,7 @@
                 <a:ea typeface="微软雅黑" pitchFamily="34" charset="-122"/>
                 <a:cs typeface="微软雅黑" pitchFamily="34" charset="-120"/>
               </a:rPr>
-              <a:t>1 / 15</a:t>
+              <a:t>1 / 17</a:t>
             </a:r>
             <a:endParaRPr lang="en-US" sz="1000" dirty="0"/>
           </a:p>
@@ -2395,7 +2573,7 @@
                 <a:ea typeface="微软雅黑" pitchFamily="34" charset="-122"/>
                 <a:cs typeface="微软雅黑" pitchFamily="34" charset="-120"/>
               </a:rPr>
-              <a:t>10 / 15</a:t>
+              <a:t>10 / 17</a:t>
             </a:r>
             <a:endParaRPr lang="en-US" sz="1000" dirty="0"/>
           </a:p>
@@ -2494,19 +2672,34 @@
             <a:avLst/>
           </a:prstGeom>
           <a:solidFill>
-            <a:srgbClr val="F5F6F7"/>
+            <a:srgbClr val="F7F9FC"/>
           </a:solidFill>
-          <a:ln w="9525">
-            <a:solidFill>
-              <a:srgbClr val="D8DBE0"/>
-            </a:solidFill>
-            <a:prstDash val="solid"/>
-          </a:ln>
-        </p:spPr>
-      </p:sp>
-      <p:sp>
-        <p:nvSpPr>
-          <p:cNvPr id="6" name="Text 4"/>
+          <a:ln/>
+        </p:spPr>
+      </p:sp>
+      <p:sp>
+        <p:nvSpPr>
+          <p:cNvPr id="6" name="Shape 4"/>
+          <p:cNvSpPr/>
+          <p:nvPr/>
+        </p:nvSpPr>
+        <p:spPr>
+          <a:xfrm>
+            <a:off x="822960" y="2395728"/>
+            <a:ext cx="50292" cy="1746504"/>
+          </a:xfrm>
+          <a:prstGeom prst="rect">
+            <a:avLst/>
+          </a:prstGeom>
+          <a:solidFill>
+            <a:srgbClr val="1F4E9C"/>
+          </a:solidFill>
+          <a:ln/>
+        </p:spPr>
+      </p:sp>
+      <p:sp>
+        <p:nvSpPr>
+          <p:cNvPr id="7" name="Text 5"/>
           <p:cNvSpPr/>
           <p:nvPr/>
         </p:nvSpPr>
@@ -2553,7 +2746,7 @@
       </p:sp>
       <p:sp>
         <p:nvSpPr>
-          <p:cNvPr id="7" name="Text 5"/>
+          <p:cNvPr id="8" name="Text 6"/>
           <p:cNvSpPr/>
           <p:nvPr/>
         </p:nvSpPr>
@@ -2637,7 +2830,7 @@
       </p:sp>
       <p:sp>
         <p:nvSpPr>
-          <p:cNvPr id="8" name="Text 6"/>
+          <p:cNvPr id="9" name="Text 7"/>
           <p:cNvSpPr/>
           <p:nvPr/>
         </p:nvSpPr>
@@ -2693,7 +2886,7 @@
       </p:sp>
       <p:sp>
         <p:nvSpPr>
-          <p:cNvPr id="9" name="Text 7"/>
+          <p:cNvPr id="10" name="Text 8"/>
           <p:cNvSpPr/>
           <p:nvPr/>
         </p:nvSpPr>
@@ -2819,7 +3012,7 @@
                 <a:ea typeface="微软雅黑" pitchFamily="34" charset="-122"/>
                 <a:cs typeface="微软雅黑" pitchFamily="34" charset="-120"/>
               </a:rPr>
-              <a:t>11 / 15</a:t>
+              <a:t>11 / 17</a:t>
             </a:r>
             <a:endParaRPr lang="en-US" sz="1000" dirty="0"/>
           </a:p>
@@ -2918,19 +3111,34 @@
             <a:avLst/>
           </a:prstGeom>
           <a:solidFill>
-            <a:srgbClr val="F5F6F7"/>
+            <a:srgbClr val="F7F9FC"/>
           </a:solidFill>
-          <a:ln w="9525">
-            <a:solidFill>
-              <a:srgbClr val="D8DBE0"/>
-            </a:solidFill>
-            <a:prstDash val="solid"/>
-          </a:ln>
-        </p:spPr>
-      </p:sp>
-      <p:sp>
-        <p:nvSpPr>
-          <p:cNvPr id="6" name="Text 4"/>
+          <a:ln/>
+        </p:spPr>
+      </p:sp>
+      <p:sp>
+        <p:nvSpPr>
+          <p:cNvPr id="6" name="Shape 4"/>
+          <p:cNvSpPr/>
+          <p:nvPr/>
+        </p:nvSpPr>
+        <p:spPr>
+          <a:xfrm>
+            <a:off x="822960" y="2395728"/>
+            <a:ext cx="50292" cy="1033272"/>
+          </a:xfrm>
+          <a:prstGeom prst="rect">
+            <a:avLst/>
+          </a:prstGeom>
+          <a:solidFill>
+            <a:srgbClr val="1F4E9C"/>
+          </a:solidFill>
+          <a:ln/>
+        </p:spPr>
+      </p:sp>
+      <p:sp>
+        <p:nvSpPr>
+          <p:cNvPr id="7" name="Text 5"/>
           <p:cNvSpPr/>
           <p:nvPr/>
         </p:nvSpPr>
@@ -2974,7 +3182,7 @@
       </p:sp>
       <p:sp>
         <p:nvSpPr>
-          <p:cNvPr id="7" name="Text 5"/>
+          <p:cNvPr id="8" name="Text 6"/>
           <p:cNvSpPr/>
           <p:nvPr/>
         </p:nvSpPr>
@@ -3058,7 +3266,7 @@
       </p:sp>
       <p:sp>
         <p:nvSpPr>
-          <p:cNvPr id="8" name="Text 6"/>
+          <p:cNvPr id="9" name="Text 7"/>
           <p:cNvSpPr/>
           <p:nvPr/>
         </p:nvSpPr>
@@ -3114,7 +3322,7 @@
       </p:sp>
       <p:sp>
         <p:nvSpPr>
-          <p:cNvPr id="9" name="Text 7"/>
+          <p:cNvPr id="10" name="Text 8"/>
           <p:cNvSpPr/>
           <p:nvPr/>
         </p:nvSpPr>
@@ -3240,7 +3448,7 @@
                 <a:ea typeface="微软雅黑" pitchFamily="34" charset="-122"/>
                 <a:cs typeface="微软雅黑" pitchFamily="34" charset="-120"/>
               </a:rPr>
-              <a:t>12 / 15</a:t>
+              <a:t>12 / 17</a:t>
             </a:r>
             <a:endParaRPr lang="en-US" sz="1000" dirty="0"/>
           </a:p>
@@ -3499,7 +3707,7 @@
                 <a:ea typeface="微软雅黑" pitchFamily="34" charset="-122"/>
                 <a:cs typeface="微软雅黑" pitchFamily="34" charset="-120"/>
               </a:rPr>
-              <a:t>13 / 15</a:t>
+              <a:t>13 / 17</a:t>
             </a:r>
             <a:endParaRPr lang="en-US" sz="1000" dirty="0"/>
           </a:p>
@@ -3592,32 +3800,47 @@
         <p:spPr>
           <a:xfrm>
             <a:off x="822960" y="2395728"/>
-            <a:ext cx="10545775" cy="3410712"/>
+            <a:ext cx="10545775" cy="3088350"/>
           </a:xfrm>
           <a:prstGeom prst="rect">
             <a:avLst/>
           </a:prstGeom>
           <a:solidFill>
-            <a:srgbClr val="F5F6F7"/>
+            <a:srgbClr val="F7F9FC"/>
           </a:solidFill>
-          <a:ln w="9525">
-            <a:solidFill>
-              <a:srgbClr val="D8DBE0"/>
-            </a:solidFill>
-            <a:prstDash val="solid"/>
-          </a:ln>
-        </p:spPr>
-      </p:sp>
-      <p:sp>
-        <p:nvSpPr>
-          <p:cNvPr id="6" name="Text 4"/>
+          <a:ln/>
+        </p:spPr>
+      </p:sp>
+      <p:sp>
+        <p:nvSpPr>
+          <p:cNvPr id="6" name="Shape 4"/>
+          <p:cNvSpPr/>
+          <p:nvPr/>
+        </p:nvSpPr>
+        <p:spPr>
+          <a:xfrm>
+            <a:off x="822960" y="2395728"/>
+            <a:ext cx="50292" cy="3088350"/>
+          </a:xfrm>
+          <a:prstGeom prst="rect">
+            <a:avLst/>
+          </a:prstGeom>
+          <a:solidFill>
+            <a:srgbClr val="1F4E9C"/>
+          </a:solidFill>
+          <a:ln/>
+        </p:spPr>
+      </p:sp>
+      <p:sp>
+        <p:nvSpPr>
+          <p:cNvPr id="7" name="Text 5"/>
           <p:cNvSpPr/>
           <p:nvPr/>
         </p:nvSpPr>
         <p:spPr>
           <a:xfrm>
             <a:off x="1078992" y="2505456"/>
-            <a:ext cx="10033711" cy="3191256"/>
+            <a:ext cx="10033711" cy="2868894"/>
           </a:xfrm>
           <a:prstGeom prst="rect">
             <a:avLst/>
@@ -3664,13 +3887,13 @@
       </p:sp>
       <p:sp>
         <p:nvSpPr>
-          <p:cNvPr id="7" name="Text 5"/>
-          <p:cNvSpPr/>
-          <p:nvPr/>
-        </p:nvSpPr>
-        <p:spPr>
-          <a:xfrm>
-            <a:off x="822960" y="6007608"/>
+          <p:cNvPr id="8" name="Text 6"/>
+          <p:cNvSpPr/>
+          <p:nvPr/>
+        </p:nvSpPr>
+        <p:spPr>
+          <a:xfrm>
+            <a:off x="822960" y="5685246"/>
             <a:ext cx="10545775" cy="320802"/>
           </a:xfrm>
           <a:prstGeom prst="rect">
@@ -3773,7 +3996,7 @@
                 <a:ea typeface="微软雅黑" pitchFamily="34" charset="-122"/>
                 <a:cs typeface="微软雅黑" pitchFamily="34" charset="-120"/>
               </a:rPr>
-              <a:t>14 / 15</a:t>
+              <a:t>14 / 17</a:t>
             </a:r>
             <a:endParaRPr lang="en-US" sz="1000" dirty="0"/>
           </a:p>
@@ -4845,7 +5068,7 @@
                 <a:ea typeface="微软雅黑" pitchFamily="34" charset="-122"/>
                 <a:cs typeface="微软雅黑" pitchFamily="34" charset="-120"/>
               </a:rPr>
-              <a:t>15 / 15</a:t>
+              <a:t>15 / 17</a:t>
             </a:r>
             <a:endParaRPr lang="en-US" sz="1000" dirty="0"/>
           </a:p>
@@ -5102,9 +5325,733 @@
                 <a:ea typeface="微软雅黑" pitchFamily="34" charset="-122"/>
                 <a:cs typeface="微软雅黑" pitchFamily="34" charset="-120"/>
               </a:rPr>
-              <a:t>写完对照讲稿附录的参考答案；要求：合上笔记能默写"函数定义四部分"和"数组遍历的for"</a:t>
+              <a:t>参考答案在本PPT最后两页，课后自行对照；要求：合上笔记能默写"函数定义四部分"和"数组遍历的for"</a:t>
             </a:r>
             <a:endParaRPr lang="en-US" sz="1500" dirty="0"/>
+          </a:p>
+        </p:txBody>
+      </p:sp>
+    </p:spTree>
+  </p:cSld>
+  <p:clrMapOvr>
+    <a:masterClrMapping/>
+  </p:clrMapOvr>
+</p:sld>
+</file>
+
+<file path=ppt/slides/slide16.xml><?xml version="1.0" encoding="utf-8"?>
+<p:sld xmlns:a="http://schemas.openxmlformats.org/drawingml/2006/main" xmlns:r="http://schemas.openxmlformats.org/officeDocument/2006/relationships" xmlns:p="http://schemas.openxmlformats.org/presentationml/2006/main">
+  <p:cSld name="Slide 16">
+    <p:bg>
+      <p:bgPr>
+        <a:blipFill dpi="0" rotWithShape="1">
+          <a:blip r:embed="rId1">
+            <a:lum/>
+          </a:blip>
+          <a:srcRect/>
+          <a:stretch>
+            <a:fillRect/>
+          </a:stretch>
+        </a:blipFill>
+        <a:effectLst/>
+      </p:bgPr>
+    </p:bg>
+    <p:spTree>
+      <p:nvGrpSpPr>
+        <p:cNvPr id="1" name=""/>
+        <p:cNvGrpSpPr/>
+        <p:nvPr/>
+      </p:nvGrpSpPr>
+      <p:grpSpPr>
+        <a:xfrm>
+          <a:off x="0" y="0"/>
+          <a:ext cx="0" cy="0"/>
+          <a:chOff x="0" y="0"/>
+          <a:chExt cx="0" cy="0"/>
+        </a:xfrm>
+      </p:grpSpPr>
+      <p:sp>
+        <p:nvSpPr>
+          <p:cNvPr id="2" name="Text 0"/>
+          <p:cNvSpPr/>
+          <p:nvPr/>
+        </p:nvSpPr>
+        <p:spPr>
+          <a:xfrm>
+            <a:off x="10362895" y="6016752"/>
+            <a:ext cx="1463040" cy="320040"/>
+          </a:xfrm>
+          <a:prstGeom prst="rect">
+            <a:avLst/>
+          </a:prstGeom>
+          <a:noFill/>
+          <a:ln/>
+        </p:spPr>
+        <p:txBody>
+          <a:bodyPr wrap="square" rtlCol="0" anchor="ctr"/>
+          <a:lstStyle/>
+          <a:p>
+            <a:pPr algn="r" indent="0" marL="0">
+              <a:buNone/>
+            </a:pPr>
+            <a:r>
+              <a:rPr lang="en-US" sz="1000" dirty="0">
+                <a:solidFill>
+                  <a:srgbClr val="8A9099"/>
+                </a:solidFill>
+                <a:latin typeface="微软雅黑" pitchFamily="34" charset="0"/>
+                <a:ea typeface="微软雅黑" pitchFamily="34" charset="-122"/>
+                <a:cs typeface="微软雅黑" pitchFamily="34" charset="-120"/>
+              </a:rPr>
+              <a:t>16 / 17</a:t>
+            </a:r>
+            <a:endParaRPr lang="en-US" sz="1000" dirty="0"/>
+          </a:p>
+        </p:txBody>
+      </p:sp>
+      <p:sp>
+        <p:nvSpPr>
+          <p:cNvPr id="3" name="Text 1"/>
+          <p:cNvSpPr/>
+          <p:nvPr/>
+        </p:nvSpPr>
+        <p:spPr>
+          <a:xfrm>
+            <a:off x="822960" y="960120"/>
+            <a:ext cx="10545775" cy="365760"/>
+          </a:xfrm>
+          <a:prstGeom prst="rect">
+            <a:avLst/>
+          </a:prstGeom>
+          <a:noFill/>
+          <a:ln/>
+        </p:spPr>
+        <p:txBody>
+          <a:bodyPr wrap="square" rtlCol="0" anchor="ctr"/>
+          <a:lstStyle/>
+          <a:p>
+            <a:pPr algn="l" indent="0" marL="0">
+              <a:buNone/>
+            </a:pPr>
+            <a:r>
+              <a:rPr lang="en-US" sz="1400" b="1" dirty="0">
+                <a:solidFill>
+                  <a:srgbClr val="1F4E9C"/>
+                </a:solidFill>
+                <a:latin typeface="微软雅黑" pitchFamily="34" charset="0"/>
+                <a:ea typeface="微软雅黑" pitchFamily="34" charset="-122"/>
+                <a:cs typeface="微软雅黑" pitchFamily="34" charset="-120"/>
+              </a:rPr>
+              <a:t>参考答案 · 跟练题</a:t>
+            </a:r>
+            <a:endParaRPr lang="en-US" sz="1400" dirty="0"/>
+          </a:p>
+        </p:txBody>
+      </p:sp>
+      <p:sp>
+        <p:nvSpPr>
+          <p:cNvPr id="4" name="Text 2"/>
+          <p:cNvSpPr/>
+          <p:nvPr/>
+        </p:nvSpPr>
+        <p:spPr>
+          <a:xfrm>
+            <a:off x="822960" y="1344168"/>
+            <a:ext cx="10545775" cy="731520"/>
+          </a:xfrm>
+          <a:prstGeom prst="rect">
+            <a:avLst/>
+          </a:prstGeom>
+          <a:noFill/>
+          <a:ln/>
+        </p:spPr>
+        <p:txBody>
+          <a:bodyPr wrap="square" rtlCol="0" anchor="ctr"/>
+          <a:lstStyle/>
+          <a:p>
+            <a:pPr algn="l" indent="0" marL="0">
+              <a:buNone/>
+            </a:pPr>
+            <a:r>
+              <a:rPr lang="en-US" sz="2800" b="1" dirty="0">
+                <a:solidFill>
+                  <a:srgbClr val="1F2329"/>
+                </a:solidFill>
+                <a:latin typeface="微软雅黑" pitchFamily="34" charset="0"/>
+                <a:ea typeface="微软雅黑" pitchFamily="34" charset="-122"/>
+                <a:cs typeface="微软雅黑" pitchFamily="34" charset="-120"/>
+              </a:rPr>
+              <a:t>跟练题参考答案（自行对照）</a:t>
+            </a:r>
+            <a:endParaRPr lang="en-US" sz="2800" dirty="0"/>
+          </a:p>
+        </p:txBody>
+      </p:sp>
+      <p:sp>
+        <p:nvSpPr>
+          <p:cNvPr id="5" name="Shape 3"/>
+          <p:cNvSpPr/>
+          <p:nvPr/>
+        </p:nvSpPr>
+        <p:spPr>
+          <a:xfrm>
+            <a:off x="822960" y="2395728"/>
+            <a:ext cx="10545775" cy="2771930"/>
+          </a:xfrm>
+          <a:prstGeom prst="rect">
+            <a:avLst/>
+          </a:prstGeom>
+          <a:solidFill>
+            <a:srgbClr val="F7F9FC"/>
+          </a:solidFill>
+          <a:ln/>
+        </p:spPr>
+      </p:sp>
+      <p:sp>
+        <p:nvSpPr>
+          <p:cNvPr id="6" name="Shape 4"/>
+          <p:cNvSpPr/>
+          <p:nvPr/>
+        </p:nvSpPr>
+        <p:spPr>
+          <a:xfrm>
+            <a:off x="822960" y="2395728"/>
+            <a:ext cx="50292" cy="2771930"/>
+          </a:xfrm>
+          <a:prstGeom prst="rect">
+            <a:avLst/>
+          </a:prstGeom>
+          <a:solidFill>
+            <a:srgbClr val="1F4E9C"/>
+          </a:solidFill>
+          <a:ln/>
+        </p:spPr>
+      </p:sp>
+      <p:sp>
+        <p:nvSpPr>
+          <p:cNvPr id="7" name="Text 5"/>
+          <p:cNvSpPr/>
+          <p:nvPr/>
+        </p:nvSpPr>
+        <p:spPr>
+          <a:xfrm>
+            <a:off x="1078992" y="2505456"/>
+            <a:ext cx="10033711" cy="2552474"/>
+          </a:xfrm>
+          <a:prstGeom prst="rect">
+            <a:avLst/>
+          </a:prstGeom>
+          <a:noFill/>
+          <a:ln/>
+        </p:spPr>
+        <p:txBody>
+          <a:bodyPr wrap="square" rtlCol="0" anchor="t"/>
+          <a:lstStyle/>
+          <a:p>
+            <a:pPr algn="l" indent="0" marL="0">
+              <a:lnSpc>
+                <a:spcPct val="125000"/>
+              </a:lnSpc>
+              <a:buNone/>
+            </a:pPr>
+            <a:r>
+              <a:rPr lang="en-US" sz="1100" dirty="0">
+                <a:solidFill>
+                  <a:srgbClr val="1F2329"/>
+                </a:solidFill>
+                <a:latin typeface="Consolas" pitchFamily="34" charset="0"/>
+                <a:ea typeface="Consolas" pitchFamily="34" charset="-122"/>
+                <a:cs typeface="Consolas" pitchFamily="34" charset="-120"/>
+              </a:rPr>
+              <a:t>#include &lt;stdio.h&gt;
+int findMax(int a[], int n){
+    int m = a[0];
+    for(int i = 1; i &lt; n; i++)
+        if(a[i] &gt; m) m = a[i];
+    return m;
+}
+int main(){
+    int a[4] = {3, 9, 2, 7};
+    printf("最大值：%d\n", findMax(a, 4));
+    return 0;
+}
+</a:t>
+            </a:r>
+            <a:endParaRPr lang="en-US" sz="1100" dirty="0"/>
+          </a:p>
+        </p:txBody>
+      </p:sp>
+      <p:sp>
+        <p:nvSpPr>
+          <p:cNvPr id="8" name="Text 6"/>
+          <p:cNvSpPr/>
+          <p:nvPr/>
+        </p:nvSpPr>
+        <p:spPr>
+          <a:xfrm>
+            <a:off x="896112" y="5368826"/>
+            <a:ext cx="10454335" cy="321564"/>
+          </a:xfrm>
+          <a:prstGeom prst="rect">
+            <a:avLst/>
+          </a:prstGeom>
+          <a:noFill/>
+          <a:ln/>
+        </p:spPr>
+        <p:txBody>
+          <a:bodyPr wrap="square" rtlCol="0" anchor="t"/>
+          <a:lstStyle/>
+          <a:p>
+            <a:pPr algn="l" indent="0" marL="0">
+              <a:lnSpc>
+                <a:spcPct val="115000"/>
+              </a:lnSpc>
+              <a:buNone/>
+            </a:pPr>
+            <a:r>
+              <a:rPr lang="en-US" sz="1400" b="1" dirty="0">
+                <a:solidFill>
+                  <a:srgbClr val="1F4E9C"/>
+                </a:solidFill>
+                <a:latin typeface="微软雅黑" pitchFamily="34" charset="0"/>
+                <a:ea typeface="微软雅黑" pitchFamily="34" charset="-122"/>
+                <a:cs typeface="微软雅黑" pitchFamily="34" charset="-120"/>
+              </a:rPr>
+              <a:t>•  </a:t>
+            </a:r>
+            <a:pPr algn="l" indent="0" marL="0">
+              <a:lnSpc>
+                <a:spcPct val="115000"/>
+              </a:lnSpc>
+              <a:buNone/>
+            </a:pPr>
+            <a:r>
+              <a:rPr lang="en-US" sz="1400" dirty="0">
+                <a:solidFill>
+                  <a:srgbClr val="000000"/>
+                </a:solidFill>
+              </a:rPr>
+              <a:t>先把 a[0] 当作最大值，再从左到右逐个比大，遇到更大的就更新</a:t>
+            </a:r>
+            <a:endParaRPr lang="en-US" sz="1400" dirty="0"/>
+          </a:p>
+        </p:txBody>
+      </p:sp>
+      <p:sp>
+        <p:nvSpPr>
+          <p:cNvPr id="9" name="Text 7"/>
+          <p:cNvSpPr/>
+          <p:nvPr/>
+        </p:nvSpPr>
+        <p:spPr>
+          <a:xfrm>
+            <a:off x="896112" y="5763542"/>
+            <a:ext cx="10454335" cy="321564"/>
+          </a:xfrm>
+          <a:prstGeom prst="rect">
+            <a:avLst/>
+          </a:prstGeom>
+          <a:noFill/>
+          <a:ln/>
+        </p:spPr>
+        <p:txBody>
+          <a:bodyPr wrap="square" rtlCol="0" anchor="t"/>
+          <a:lstStyle/>
+          <a:p>
+            <a:pPr algn="l" indent="0" marL="0">
+              <a:lnSpc>
+                <a:spcPct val="115000"/>
+              </a:lnSpc>
+              <a:buNone/>
+            </a:pPr>
+            <a:r>
+              <a:rPr lang="en-US" sz="1400" b="1" dirty="0">
+                <a:solidFill>
+                  <a:srgbClr val="1F4E9C"/>
+                </a:solidFill>
+                <a:latin typeface="微软雅黑" pitchFamily="34" charset="0"/>
+                <a:ea typeface="微软雅黑" pitchFamily="34" charset="-122"/>
+                <a:cs typeface="微软雅黑" pitchFamily="34" charset="-120"/>
+              </a:rPr>
+              <a:t>•  </a:t>
+            </a:r>
+            <a:pPr algn="l" indent="0" marL="0">
+              <a:lnSpc>
+                <a:spcPct val="115000"/>
+              </a:lnSpc>
+              <a:buNone/>
+            </a:pPr>
+            <a:r>
+              <a:rPr lang="en-US" sz="1400" dirty="0">
+                <a:solidFill>
+                  <a:srgbClr val="000000"/>
+                </a:solidFill>
+              </a:rPr>
+              <a:t>函数定义四部分：返回类型、函数名、参数表、函数体；返回值类型与 return 一致</a:t>
+            </a:r>
+            <a:endParaRPr lang="en-US" sz="1400" dirty="0"/>
+          </a:p>
+        </p:txBody>
+      </p:sp>
+    </p:spTree>
+  </p:cSld>
+  <p:clrMapOvr>
+    <a:masterClrMapping/>
+  </p:clrMapOvr>
+</p:sld>
+</file>
+
+<file path=ppt/slides/slide17.xml><?xml version="1.0" encoding="utf-8"?>
+<p:sld xmlns:a="http://schemas.openxmlformats.org/drawingml/2006/main" xmlns:r="http://schemas.openxmlformats.org/officeDocument/2006/relationships" xmlns:p="http://schemas.openxmlformats.org/presentationml/2006/main">
+  <p:cSld name="Slide 17">
+    <p:bg>
+      <p:bgPr>
+        <a:blipFill dpi="0" rotWithShape="1">
+          <a:blip r:embed="rId1">
+            <a:lum/>
+          </a:blip>
+          <a:srcRect/>
+          <a:stretch>
+            <a:fillRect/>
+          </a:stretch>
+        </a:blipFill>
+        <a:effectLst/>
+      </p:bgPr>
+    </p:bg>
+    <p:spTree>
+      <p:nvGrpSpPr>
+        <p:cNvPr id="1" name=""/>
+        <p:cNvGrpSpPr/>
+        <p:nvPr/>
+      </p:nvGrpSpPr>
+      <p:grpSpPr>
+        <a:xfrm>
+          <a:off x="0" y="0"/>
+          <a:ext cx="0" cy="0"/>
+          <a:chOff x="0" y="0"/>
+          <a:chExt cx="0" cy="0"/>
+        </a:xfrm>
+      </p:grpSpPr>
+      <p:sp>
+        <p:nvSpPr>
+          <p:cNvPr id="2" name="Text 0"/>
+          <p:cNvSpPr/>
+          <p:nvPr/>
+        </p:nvSpPr>
+        <p:spPr>
+          <a:xfrm>
+            <a:off x="10362895" y="6016752"/>
+            <a:ext cx="1463040" cy="320040"/>
+          </a:xfrm>
+          <a:prstGeom prst="rect">
+            <a:avLst/>
+          </a:prstGeom>
+          <a:noFill/>
+          <a:ln/>
+        </p:spPr>
+        <p:txBody>
+          <a:bodyPr wrap="square" rtlCol="0" anchor="ctr"/>
+          <a:lstStyle/>
+          <a:p>
+            <a:pPr algn="r" indent="0" marL="0">
+              <a:buNone/>
+            </a:pPr>
+            <a:r>
+              <a:rPr lang="en-US" sz="1000" dirty="0">
+                <a:solidFill>
+                  <a:srgbClr val="8A9099"/>
+                </a:solidFill>
+                <a:latin typeface="微软雅黑" pitchFamily="34" charset="0"/>
+                <a:ea typeface="微软雅黑" pitchFamily="34" charset="-122"/>
+                <a:cs typeface="微软雅黑" pitchFamily="34" charset="-120"/>
+              </a:rPr>
+              <a:t>17 / 17</a:t>
+            </a:r>
+            <a:endParaRPr lang="en-US" sz="1000" dirty="0"/>
+          </a:p>
+        </p:txBody>
+      </p:sp>
+      <p:sp>
+        <p:nvSpPr>
+          <p:cNvPr id="3" name="Text 1"/>
+          <p:cNvSpPr/>
+          <p:nvPr/>
+        </p:nvSpPr>
+        <p:spPr>
+          <a:xfrm>
+            <a:off x="822960" y="960120"/>
+            <a:ext cx="10545775" cy="365760"/>
+          </a:xfrm>
+          <a:prstGeom prst="rect">
+            <a:avLst/>
+          </a:prstGeom>
+          <a:noFill/>
+          <a:ln/>
+        </p:spPr>
+        <p:txBody>
+          <a:bodyPr wrap="square" rtlCol="0" anchor="ctr"/>
+          <a:lstStyle/>
+          <a:p>
+            <a:pPr algn="l" indent="0" marL="0">
+              <a:buNone/>
+            </a:pPr>
+            <a:r>
+              <a:rPr lang="en-US" sz="1400" b="1" dirty="0">
+                <a:solidFill>
+                  <a:srgbClr val="1F4E9C"/>
+                </a:solidFill>
+                <a:latin typeface="微软雅黑" pitchFamily="34" charset="0"/>
+                <a:ea typeface="微软雅黑" pitchFamily="34" charset="-122"/>
+                <a:cs typeface="微软雅黑" pitchFamily="34" charset="-120"/>
+              </a:rPr>
+              <a:t>参考答案 · 模仿题</a:t>
+            </a:r>
+            <a:endParaRPr lang="en-US" sz="1400" dirty="0"/>
+          </a:p>
+        </p:txBody>
+      </p:sp>
+      <p:sp>
+        <p:nvSpPr>
+          <p:cNvPr id="4" name="Text 2"/>
+          <p:cNvSpPr/>
+          <p:nvPr/>
+        </p:nvSpPr>
+        <p:spPr>
+          <a:xfrm>
+            <a:off x="822960" y="1344168"/>
+            <a:ext cx="10545775" cy="731520"/>
+          </a:xfrm>
+          <a:prstGeom prst="rect">
+            <a:avLst/>
+          </a:prstGeom>
+          <a:noFill/>
+          <a:ln/>
+        </p:spPr>
+        <p:txBody>
+          <a:bodyPr wrap="square" rtlCol="0" anchor="ctr"/>
+          <a:lstStyle/>
+          <a:p>
+            <a:pPr algn="l" indent="0" marL="0">
+              <a:buNone/>
+            </a:pPr>
+            <a:r>
+              <a:rPr lang="en-US" sz="2800" b="1" dirty="0">
+                <a:solidFill>
+                  <a:srgbClr val="1F2329"/>
+                </a:solidFill>
+                <a:latin typeface="微软雅黑" pitchFamily="34" charset="0"/>
+                <a:ea typeface="微软雅黑" pitchFamily="34" charset="-122"/>
+                <a:cs typeface="微软雅黑" pitchFamily="34" charset="-120"/>
+              </a:rPr>
+              <a:t>模仿题参考答案（自行对照）</a:t>
+            </a:r>
+            <a:endParaRPr lang="en-US" sz="2800" dirty="0"/>
+          </a:p>
+        </p:txBody>
+      </p:sp>
+      <p:sp>
+        <p:nvSpPr>
+          <p:cNvPr id="5" name="Shape 3"/>
+          <p:cNvSpPr/>
+          <p:nvPr/>
+        </p:nvSpPr>
+        <p:spPr>
+          <a:xfrm>
+            <a:off x="822960" y="2395728"/>
+            <a:ext cx="10545775" cy="2771930"/>
+          </a:xfrm>
+          <a:prstGeom prst="rect">
+            <a:avLst/>
+          </a:prstGeom>
+          <a:solidFill>
+            <a:srgbClr val="F7F9FC"/>
+          </a:solidFill>
+          <a:ln/>
+        </p:spPr>
+      </p:sp>
+      <p:sp>
+        <p:nvSpPr>
+          <p:cNvPr id="6" name="Shape 4"/>
+          <p:cNvSpPr/>
+          <p:nvPr/>
+        </p:nvSpPr>
+        <p:spPr>
+          <a:xfrm>
+            <a:off x="822960" y="2395728"/>
+            <a:ext cx="50292" cy="2771930"/>
+          </a:xfrm>
+          <a:prstGeom prst="rect">
+            <a:avLst/>
+          </a:prstGeom>
+          <a:solidFill>
+            <a:srgbClr val="1F4E9C"/>
+          </a:solidFill>
+          <a:ln/>
+        </p:spPr>
+      </p:sp>
+      <p:sp>
+        <p:nvSpPr>
+          <p:cNvPr id="7" name="Text 5"/>
+          <p:cNvSpPr/>
+          <p:nvPr/>
+        </p:nvSpPr>
+        <p:spPr>
+          <a:xfrm>
+            <a:off x="1078992" y="2505456"/>
+            <a:ext cx="10033711" cy="2552474"/>
+          </a:xfrm>
+          <a:prstGeom prst="rect">
+            <a:avLst/>
+          </a:prstGeom>
+          <a:noFill/>
+          <a:ln/>
+        </p:spPr>
+        <p:txBody>
+          <a:bodyPr wrap="square" rtlCol="0" anchor="t"/>
+          <a:lstStyle/>
+          <a:p>
+            <a:pPr algn="l" indent="0" marL="0">
+              <a:lnSpc>
+                <a:spcPct val="125000"/>
+              </a:lnSpc>
+              <a:buNone/>
+            </a:pPr>
+            <a:r>
+              <a:rPr lang="en-US" sz="1100" dirty="0">
+                <a:solidFill>
+                  <a:srgbClr val="1F2329"/>
+                </a:solidFill>
+                <a:latin typeface="Consolas" pitchFamily="34" charset="0"/>
+                <a:ea typeface="Consolas" pitchFamily="34" charset="-122"/>
+                <a:cs typeface="Consolas" pitchFamily="34" charset="-120"/>
+              </a:rPr>
+              <a:t>#include &lt;stdio.h&gt;
+int findMin(int a[], int n){
+    int m = a[0];
+    for(int i = 1; i &lt; n; i++)
+        if(a[i] &lt; m) m = a[i];
+    return m;
+}
+int main(){
+    int a[4] = {3, 9, 2, 7};
+    printf("最小值：%d\n", findMin(a, 4));
+    return 0;
+}
+</a:t>
+            </a:r>
+            <a:endParaRPr lang="en-US" sz="1100" dirty="0"/>
+          </a:p>
+        </p:txBody>
+      </p:sp>
+      <p:sp>
+        <p:nvSpPr>
+          <p:cNvPr id="8" name="Text 6"/>
+          <p:cNvSpPr/>
+          <p:nvPr/>
+        </p:nvSpPr>
+        <p:spPr>
+          <a:xfrm>
+            <a:off x="896112" y="5368826"/>
+            <a:ext cx="10454335" cy="321564"/>
+          </a:xfrm>
+          <a:prstGeom prst="rect">
+            <a:avLst/>
+          </a:prstGeom>
+          <a:noFill/>
+          <a:ln/>
+        </p:spPr>
+        <p:txBody>
+          <a:bodyPr wrap="square" rtlCol="0" anchor="t"/>
+          <a:lstStyle/>
+          <a:p>
+            <a:pPr algn="l" indent="0" marL="0">
+              <a:lnSpc>
+                <a:spcPct val="115000"/>
+              </a:lnSpc>
+              <a:buNone/>
+            </a:pPr>
+            <a:r>
+              <a:rPr lang="en-US" sz="1400" b="1" dirty="0">
+                <a:solidFill>
+                  <a:srgbClr val="1F4E9C"/>
+                </a:solidFill>
+                <a:latin typeface="微软雅黑" pitchFamily="34" charset="0"/>
+                <a:ea typeface="微软雅黑" pitchFamily="34" charset="-122"/>
+                <a:cs typeface="微软雅黑" pitchFamily="34" charset="-120"/>
+              </a:rPr>
+              <a:t>•  </a:t>
+            </a:r>
+            <a:pPr algn="l" indent="0" marL="0">
+              <a:lnSpc>
+                <a:spcPct val="115000"/>
+              </a:lnSpc>
+              <a:buNone/>
+            </a:pPr>
+            <a:r>
+              <a:rPr lang="en-US" sz="1400" dirty="0">
+                <a:solidFill>
+                  <a:srgbClr val="000000"/>
+                </a:solidFill>
+              </a:rPr>
+              <a:t>把 findMax 里的大于号换成小于号、函数名换成 findMin，即求最小值</a:t>
+            </a:r>
+            <a:endParaRPr lang="en-US" sz="1400" dirty="0"/>
+          </a:p>
+        </p:txBody>
+      </p:sp>
+      <p:sp>
+        <p:nvSpPr>
+          <p:cNvPr id="9" name="Text 7"/>
+          <p:cNvSpPr/>
+          <p:nvPr/>
+        </p:nvSpPr>
+        <p:spPr>
+          <a:xfrm>
+            <a:off x="896112" y="5763542"/>
+            <a:ext cx="10454335" cy="321564"/>
+          </a:xfrm>
+          <a:prstGeom prst="rect">
+            <a:avLst/>
+          </a:prstGeom>
+          <a:noFill/>
+          <a:ln/>
+        </p:spPr>
+        <p:txBody>
+          <a:bodyPr wrap="square" rtlCol="0" anchor="t"/>
+          <a:lstStyle/>
+          <a:p>
+            <a:pPr algn="l" indent="0" marL="0">
+              <a:lnSpc>
+                <a:spcPct val="115000"/>
+              </a:lnSpc>
+              <a:buNone/>
+            </a:pPr>
+            <a:r>
+              <a:rPr lang="en-US" sz="1400" b="1" dirty="0">
+                <a:solidFill>
+                  <a:srgbClr val="1F4E9C"/>
+                </a:solidFill>
+                <a:latin typeface="微软雅黑" pitchFamily="34" charset="0"/>
+                <a:ea typeface="微软雅黑" pitchFamily="34" charset="-122"/>
+                <a:cs typeface="微软雅黑" pitchFamily="34" charset="-120"/>
+              </a:rPr>
+              <a:t>•  </a:t>
+            </a:r>
+            <a:pPr algn="l" indent="0" marL="0">
+              <a:lnSpc>
+                <a:spcPct val="115000"/>
+              </a:lnSpc>
+              <a:buNone/>
+            </a:pPr>
+            <a:r>
+              <a:rPr lang="en-US" sz="1400" dirty="0">
+                <a:solidFill>
+                  <a:srgbClr val="000000"/>
+                </a:solidFill>
+              </a:rPr>
+              <a:t>数组下标从 0 到长度减 1；求最小值初值仍取 a[0]，不要从 0 起</a:t>
+            </a:r>
+            <a:endParaRPr lang="en-US" sz="1400" dirty="0"/>
           </a:p>
         </p:txBody>
       </p:sp>
@@ -5180,7 +6127,7 @@
                 <a:ea typeface="微软雅黑" pitchFamily="34" charset="-122"/>
                 <a:cs typeface="微软雅黑" pitchFamily="34" charset="-120"/>
               </a:rPr>
-              <a:t>2 / 15</a:t>
+              <a:t>2 / 17</a:t>
             </a:r>
             <a:endParaRPr lang="en-US" sz="1000" dirty="0"/>
           </a:p>
@@ -5668,7 +6615,7 @@
                 <a:ea typeface="微软雅黑" pitchFamily="34" charset="-122"/>
                 <a:cs typeface="微软雅黑" pitchFamily="34" charset="-120"/>
               </a:rPr>
-              <a:t>3 / 15</a:t>
+              <a:t>3 / 17</a:t>
             </a:r>
             <a:endParaRPr lang="en-US" sz="1000" dirty="0"/>
           </a:p>
@@ -6684,7 +7631,7 @@
                 <a:ea typeface="微软雅黑" pitchFamily="34" charset="-122"/>
                 <a:cs typeface="微软雅黑" pitchFamily="34" charset="-120"/>
               </a:rPr>
-              <a:t>4 / 15</a:t>
+              <a:t>4 / 17</a:t>
             </a:r>
             <a:endParaRPr lang="en-US" sz="1000" dirty="0"/>
           </a:p>
@@ -6783,19 +7730,34 @@
             <a:avLst/>
           </a:prstGeom>
           <a:solidFill>
-            <a:srgbClr val="F5F6F7"/>
+            <a:srgbClr val="F7F9FC"/>
           </a:solidFill>
-          <a:ln w="9525">
-            <a:solidFill>
-              <a:srgbClr val="D8DBE0"/>
-            </a:solidFill>
-            <a:prstDash val="solid"/>
-          </a:ln>
-        </p:spPr>
-      </p:sp>
-      <p:sp>
-        <p:nvSpPr>
-          <p:cNvPr id="6" name="Text 4"/>
+          <a:ln/>
+        </p:spPr>
+      </p:sp>
+      <p:sp>
+        <p:nvSpPr>
+          <p:cNvPr id="6" name="Shape 4"/>
+          <p:cNvSpPr/>
+          <p:nvPr/>
+        </p:nvSpPr>
+        <p:spPr>
+          <a:xfrm>
+            <a:off x="822960" y="2395728"/>
+            <a:ext cx="50292" cy="1508760"/>
+          </a:xfrm>
+          <a:prstGeom prst="rect">
+            <a:avLst/>
+          </a:prstGeom>
+          <a:solidFill>
+            <a:srgbClr val="1F4E9C"/>
+          </a:solidFill>
+          <a:ln/>
+        </p:spPr>
+      </p:sp>
+      <p:sp>
+        <p:nvSpPr>
+          <p:cNvPr id="7" name="Text 5"/>
           <p:cNvSpPr/>
           <p:nvPr/>
         </p:nvSpPr>
@@ -6841,7 +7803,7 @@
       </p:sp>
       <p:sp>
         <p:nvSpPr>
-          <p:cNvPr id="7" name="Text 5"/>
+          <p:cNvPr id="8" name="Text 6"/>
           <p:cNvSpPr/>
           <p:nvPr/>
         </p:nvSpPr>
@@ -6911,7 +7873,7 @@
       </p:sp>
       <p:sp>
         <p:nvSpPr>
-          <p:cNvPr id="8" name="Text 6"/>
+          <p:cNvPr id="9" name="Text 7"/>
           <p:cNvSpPr/>
           <p:nvPr/>
         </p:nvSpPr>
@@ -6981,7 +7943,7 @@
       </p:sp>
       <p:sp>
         <p:nvSpPr>
-          <p:cNvPr id="9" name="Text 7"/>
+          <p:cNvPr id="10" name="Text 8"/>
           <p:cNvSpPr/>
           <p:nvPr/>
         </p:nvSpPr>
@@ -7051,7 +8013,7 @@
       </p:sp>
       <p:sp>
         <p:nvSpPr>
-          <p:cNvPr id="10" name="Text 8"/>
+          <p:cNvPr id="11" name="Text 9"/>
           <p:cNvSpPr/>
           <p:nvPr/>
         </p:nvSpPr>
@@ -7191,7 +8153,7 @@
                 <a:ea typeface="微软雅黑" pitchFamily="34" charset="-122"/>
                 <a:cs typeface="微软雅黑" pitchFamily="34" charset="-120"/>
               </a:rPr>
-              <a:t>5 / 15</a:t>
+              <a:t>5 / 17</a:t>
             </a:r>
             <a:endParaRPr lang="en-US" sz="1000" dirty="0"/>
           </a:p>
@@ -7290,19 +8252,34 @@
             <a:avLst/>
           </a:prstGeom>
           <a:solidFill>
-            <a:srgbClr val="F5F6F7"/>
+            <a:srgbClr val="F7F9FC"/>
           </a:solidFill>
-          <a:ln w="9525">
-            <a:solidFill>
-              <a:srgbClr val="D8DBE0"/>
-            </a:solidFill>
-            <a:prstDash val="solid"/>
-          </a:ln>
-        </p:spPr>
-      </p:sp>
-      <p:sp>
-        <p:nvSpPr>
-          <p:cNvPr id="6" name="Text 4"/>
+          <a:ln/>
+        </p:spPr>
+      </p:sp>
+      <p:sp>
+        <p:nvSpPr>
+          <p:cNvPr id="6" name="Shape 4"/>
+          <p:cNvSpPr/>
+          <p:nvPr/>
+        </p:nvSpPr>
+        <p:spPr>
+          <a:xfrm>
+            <a:off x="822960" y="2395728"/>
+            <a:ext cx="50292" cy="1033272"/>
+          </a:xfrm>
+          <a:prstGeom prst="rect">
+            <a:avLst/>
+          </a:prstGeom>
+          <a:solidFill>
+            <a:srgbClr val="1F4E9C"/>
+          </a:solidFill>
+          <a:ln/>
+        </p:spPr>
+      </p:sp>
+      <p:sp>
+        <p:nvSpPr>
+          <p:cNvPr id="7" name="Text 5"/>
           <p:cNvSpPr/>
           <p:nvPr/>
         </p:nvSpPr>
@@ -7346,7 +8323,7 @@
       </p:sp>
       <p:sp>
         <p:nvSpPr>
-          <p:cNvPr id="7" name="Text 5"/>
+          <p:cNvPr id="8" name="Text 6"/>
           <p:cNvSpPr/>
           <p:nvPr/>
         </p:nvSpPr>
@@ -7416,7 +8393,7 @@
       </p:sp>
       <p:sp>
         <p:nvSpPr>
-          <p:cNvPr id="8" name="Text 6"/>
+          <p:cNvPr id="9" name="Text 7"/>
           <p:cNvSpPr/>
           <p:nvPr/>
         </p:nvSpPr>
@@ -7472,7 +8449,7 @@
       </p:sp>
       <p:sp>
         <p:nvSpPr>
-          <p:cNvPr id="9" name="Text 7"/>
+          <p:cNvPr id="10" name="Text 8"/>
           <p:cNvSpPr/>
           <p:nvPr/>
         </p:nvSpPr>
@@ -7598,7 +8575,7 @@
                 <a:ea typeface="微软雅黑" pitchFamily="34" charset="-122"/>
                 <a:cs typeface="微软雅黑" pitchFamily="34" charset="-120"/>
               </a:rPr>
-              <a:t>6 / 15</a:t>
+              <a:t>6 / 17</a:t>
             </a:r>
             <a:endParaRPr lang="en-US" sz="1000" dirty="0"/>
           </a:p>
@@ -7697,19 +8674,34 @@
             <a:avLst/>
           </a:prstGeom>
           <a:solidFill>
-            <a:srgbClr val="F5F6F7"/>
+            <a:srgbClr val="F7F9FC"/>
           </a:solidFill>
-          <a:ln w="9525">
-            <a:solidFill>
-              <a:srgbClr val="D8DBE0"/>
-            </a:solidFill>
-            <a:prstDash val="solid"/>
-          </a:ln>
-        </p:spPr>
-      </p:sp>
-      <p:sp>
-        <p:nvSpPr>
-          <p:cNvPr id="6" name="Text 4"/>
+          <a:ln/>
+        </p:spPr>
+      </p:sp>
+      <p:sp>
+        <p:nvSpPr>
+          <p:cNvPr id="6" name="Shape 4"/>
+          <p:cNvSpPr/>
+          <p:nvPr/>
+        </p:nvSpPr>
+        <p:spPr>
+          <a:xfrm>
+            <a:off x="822960" y="2395728"/>
+            <a:ext cx="50292" cy="1508760"/>
+          </a:xfrm>
+          <a:prstGeom prst="rect">
+            <a:avLst/>
+          </a:prstGeom>
+          <a:solidFill>
+            <a:srgbClr val="1F4E9C"/>
+          </a:solidFill>
+          <a:ln/>
+        </p:spPr>
+      </p:sp>
+      <p:sp>
+        <p:nvSpPr>
+          <p:cNvPr id="7" name="Text 5"/>
           <p:cNvSpPr/>
           <p:nvPr/>
         </p:nvSpPr>
@@ -7755,7 +8747,7 @@
       </p:sp>
       <p:sp>
         <p:nvSpPr>
-          <p:cNvPr id="7" name="Text 5"/>
+          <p:cNvPr id="8" name="Text 6"/>
           <p:cNvSpPr/>
           <p:nvPr/>
         </p:nvSpPr>
@@ -7853,7 +8845,7 @@
       </p:sp>
       <p:sp>
         <p:nvSpPr>
-          <p:cNvPr id="8" name="Text 6"/>
+          <p:cNvPr id="9" name="Text 7"/>
           <p:cNvSpPr/>
           <p:nvPr/>
         </p:nvSpPr>
@@ -7923,7 +8915,7 @@
       </p:sp>
       <p:sp>
         <p:nvSpPr>
-          <p:cNvPr id="9" name="Text 7"/>
+          <p:cNvPr id="10" name="Text 8"/>
           <p:cNvSpPr/>
           <p:nvPr/>
         </p:nvSpPr>
@@ -8049,7 +9041,7 @@
                 <a:ea typeface="微软雅黑" pitchFamily="34" charset="-122"/>
                 <a:cs typeface="微软雅黑" pitchFamily="34" charset="-120"/>
               </a:rPr>
-              <a:t>7 / 15</a:t>
+              <a:t>7 / 17</a:t>
             </a:r>
             <a:endParaRPr lang="en-US" sz="1000" dirty="0"/>
           </a:p>
@@ -8148,19 +9140,34 @@
             <a:avLst/>
           </a:prstGeom>
           <a:solidFill>
-            <a:srgbClr val="F5F6F7"/>
+            <a:srgbClr val="F7F9FC"/>
           </a:solidFill>
-          <a:ln w="9525">
-            <a:solidFill>
-              <a:srgbClr val="D8DBE0"/>
-            </a:solidFill>
-            <a:prstDash val="solid"/>
-          </a:ln>
-        </p:spPr>
-      </p:sp>
-      <p:sp>
-        <p:nvSpPr>
-          <p:cNvPr id="6" name="Text 4"/>
+          <a:ln/>
+        </p:spPr>
+      </p:sp>
+      <p:sp>
+        <p:nvSpPr>
+          <p:cNvPr id="6" name="Shape 4"/>
+          <p:cNvSpPr/>
+          <p:nvPr/>
+        </p:nvSpPr>
+        <p:spPr>
+          <a:xfrm>
+            <a:off x="822960" y="2395728"/>
+            <a:ext cx="50292" cy="1271016"/>
+          </a:xfrm>
+          <a:prstGeom prst="rect">
+            <a:avLst/>
+          </a:prstGeom>
+          <a:solidFill>
+            <a:srgbClr val="1F4E9C"/>
+          </a:solidFill>
+          <a:ln/>
+        </p:spPr>
+      </p:sp>
+      <p:sp>
+        <p:nvSpPr>
+          <p:cNvPr id="7" name="Text 5"/>
           <p:cNvSpPr/>
           <p:nvPr/>
         </p:nvSpPr>
@@ -8205,7 +9212,7 @@
       </p:sp>
       <p:sp>
         <p:nvSpPr>
-          <p:cNvPr id="7" name="Text 5"/>
+          <p:cNvPr id="8" name="Text 6"/>
           <p:cNvSpPr/>
           <p:nvPr/>
         </p:nvSpPr>
@@ -8275,7 +9282,7 @@
       </p:sp>
       <p:sp>
         <p:nvSpPr>
-          <p:cNvPr id="8" name="Text 6"/>
+          <p:cNvPr id="9" name="Text 7"/>
           <p:cNvSpPr/>
           <p:nvPr/>
         </p:nvSpPr>
@@ -8359,7 +9366,7 @@
       </p:sp>
       <p:sp>
         <p:nvSpPr>
-          <p:cNvPr id="9" name="Text 7"/>
+          <p:cNvPr id="10" name="Text 8"/>
           <p:cNvSpPr/>
           <p:nvPr/>
         </p:nvSpPr>
@@ -8485,7 +9492,7 @@
                 <a:ea typeface="微软雅黑" pitchFamily="34" charset="-122"/>
                 <a:cs typeface="微软雅黑" pitchFamily="34" charset="-120"/>
               </a:rPr>
-              <a:t>8 / 15</a:t>
+              <a:t>8 / 17</a:t>
             </a:r>
             <a:endParaRPr lang="en-US" sz="1000" dirty="0"/>
           </a:p>
@@ -8584,19 +9591,34 @@
             <a:avLst/>
           </a:prstGeom>
           <a:solidFill>
-            <a:srgbClr val="F5F6F7"/>
+            <a:srgbClr val="F7F9FC"/>
           </a:solidFill>
-          <a:ln w="9525">
-            <a:solidFill>
-              <a:srgbClr val="D8DBE0"/>
-            </a:solidFill>
-            <a:prstDash val="solid"/>
-          </a:ln>
-        </p:spPr>
-      </p:sp>
-      <p:sp>
-        <p:nvSpPr>
-          <p:cNvPr id="6" name="Text 4"/>
+          <a:ln/>
+        </p:spPr>
+      </p:sp>
+      <p:sp>
+        <p:nvSpPr>
+          <p:cNvPr id="6" name="Shape 4"/>
+          <p:cNvSpPr/>
+          <p:nvPr/>
+        </p:nvSpPr>
+        <p:spPr>
+          <a:xfrm>
+            <a:off x="822960" y="2395728"/>
+            <a:ext cx="50292" cy="1033272"/>
+          </a:xfrm>
+          <a:prstGeom prst="rect">
+            <a:avLst/>
+          </a:prstGeom>
+          <a:solidFill>
+            <a:srgbClr val="1F4E9C"/>
+          </a:solidFill>
+          <a:ln/>
+        </p:spPr>
+      </p:sp>
+      <p:sp>
+        <p:nvSpPr>
+          <p:cNvPr id="7" name="Text 5"/>
           <p:cNvSpPr/>
           <p:nvPr/>
         </p:nvSpPr>
@@ -8640,7 +9662,7 @@
       </p:sp>
       <p:sp>
         <p:nvSpPr>
-          <p:cNvPr id="7" name="Text 5"/>
+          <p:cNvPr id="8" name="Text 6"/>
           <p:cNvSpPr/>
           <p:nvPr/>
         </p:nvSpPr>
@@ -8724,7 +9746,7 @@
       </p:sp>
       <p:sp>
         <p:nvSpPr>
-          <p:cNvPr id="8" name="Text 6"/>
+          <p:cNvPr id="9" name="Text 7"/>
           <p:cNvSpPr/>
           <p:nvPr/>
         </p:nvSpPr>
@@ -8808,7 +9830,7 @@
       </p:sp>
       <p:sp>
         <p:nvSpPr>
-          <p:cNvPr id="9" name="Text 7"/>
+          <p:cNvPr id="10" name="Text 8"/>
           <p:cNvSpPr/>
           <p:nvPr/>
         </p:nvSpPr>
@@ -8962,7 +9984,7 @@
                 <a:ea typeface="微软雅黑" pitchFamily="34" charset="-122"/>
                 <a:cs typeface="微软雅黑" pitchFamily="34" charset="-120"/>
               </a:rPr>
-              <a:t>9 / 15</a:t>
+              <a:t>9 / 17</a:t>
             </a:r>
             <a:endParaRPr lang="en-US" sz="1000" dirty="0"/>
           </a:p>
@@ -9061,19 +10083,34 @@
             <a:avLst/>
           </a:prstGeom>
           <a:solidFill>
-            <a:srgbClr val="F5F6F7"/>
+            <a:srgbClr val="F7F9FC"/>
           </a:solidFill>
-          <a:ln w="9525">
-            <a:solidFill>
-              <a:srgbClr val="D8DBE0"/>
-            </a:solidFill>
-            <a:prstDash val="solid"/>
-          </a:ln>
-        </p:spPr>
-      </p:sp>
-      <p:sp>
-        <p:nvSpPr>
-          <p:cNvPr id="6" name="Text 4"/>
+          <a:ln/>
+        </p:spPr>
+      </p:sp>
+      <p:sp>
+        <p:nvSpPr>
+          <p:cNvPr id="6" name="Shape 4"/>
+          <p:cNvSpPr/>
+          <p:nvPr/>
+        </p:nvSpPr>
+        <p:spPr>
+          <a:xfrm>
+            <a:off x="822960" y="2395728"/>
+            <a:ext cx="50292" cy="1508760"/>
+          </a:xfrm>
+          <a:prstGeom prst="rect">
+            <a:avLst/>
+          </a:prstGeom>
+          <a:solidFill>
+            <a:srgbClr val="1F4E9C"/>
+          </a:solidFill>
+          <a:ln/>
+        </p:spPr>
+      </p:sp>
+      <p:sp>
+        <p:nvSpPr>
+          <p:cNvPr id="7" name="Text 5"/>
           <p:cNvSpPr/>
           <p:nvPr/>
         </p:nvSpPr>
@@ -9119,7 +10156,7 @@
       </p:sp>
       <p:sp>
         <p:nvSpPr>
-          <p:cNvPr id="7" name="Text 5"/>
+          <p:cNvPr id="8" name="Text 6"/>
           <p:cNvSpPr/>
           <p:nvPr/>
         </p:nvSpPr>
@@ -9189,7 +10226,7 @@
       </p:sp>
       <p:sp>
         <p:nvSpPr>
-          <p:cNvPr id="8" name="Text 6"/>
+          <p:cNvPr id="9" name="Text 7"/>
           <p:cNvSpPr/>
           <p:nvPr/>
         </p:nvSpPr>
@@ -9259,7 +10296,7 @@
       </p:sp>
       <p:sp>
         <p:nvSpPr>
-          <p:cNvPr id="9" name="Text 7"/>
+          <p:cNvPr id="10" name="Text 8"/>
           <p:cNvSpPr/>
           <p:nvPr/>
         </p:nvSpPr>
